--- a/プレゼンテーション1.pptx
+++ b/プレゼンテーション1.pptx
@@ -2,7 +2,7 @@
 <file path=ppt/presentation.xml><?xml version="1.0" encoding="utf-8"?>
 <p:presentation xmlns:a="http://schemas.openxmlformats.org/drawingml/2006/main" xmlns:r="http://schemas.openxmlformats.org/officeDocument/2006/relationships" xmlns:p="http://schemas.openxmlformats.org/presentationml/2006/main" saveSubsetFonts="1">
   <p:sldMasterIdLst>
-    <p:sldMasterId id="2147483648" r:id="rId1"/>
+    <p:sldMasterId id="2147483678" r:id="rId1"/>
   </p:sldMasterIdLst>
   <p:sldIdLst>
     <p:sldId id="256" r:id="rId2"/>
@@ -13,10 +13,10 @@
   <p:notesSz cx="6858000" cy="9144000"/>
   <p:defaultTextStyle>
     <a:defPPr>
-      <a:defRPr lang="ja-JP"/>
+      <a:defRPr lang="en-US"/>
     </a:defPPr>
-    <a:lvl1pPr marL="0" algn="l" defTabSz="914400" rtl="0" eaLnBrk="1" latinLnBrk="0" hangingPunct="1">
-      <a:defRPr kumimoji="1" sz="1800" kern="1200">
+    <a:lvl1pPr marL="0" algn="l" defTabSz="457200" rtl="0" eaLnBrk="1" latinLnBrk="0" hangingPunct="1">
+      <a:defRPr sz="1800" kern="1200">
         <a:solidFill>
           <a:schemeClr val="tx1"/>
         </a:solidFill>
@@ -25,8 +25,8 @@
         <a:cs typeface="+mn-cs"/>
       </a:defRPr>
     </a:lvl1pPr>
-    <a:lvl2pPr marL="457200" algn="l" defTabSz="914400" rtl="0" eaLnBrk="1" latinLnBrk="0" hangingPunct="1">
-      <a:defRPr kumimoji="1" sz="1800" kern="1200">
+    <a:lvl2pPr marL="457200" algn="l" defTabSz="457200" rtl="0" eaLnBrk="1" latinLnBrk="0" hangingPunct="1">
+      <a:defRPr sz="1800" kern="1200">
         <a:solidFill>
           <a:schemeClr val="tx1"/>
         </a:solidFill>
@@ -35,8 +35,8 @@
         <a:cs typeface="+mn-cs"/>
       </a:defRPr>
     </a:lvl2pPr>
-    <a:lvl3pPr marL="914400" algn="l" defTabSz="914400" rtl="0" eaLnBrk="1" latinLnBrk="0" hangingPunct="1">
-      <a:defRPr kumimoji="1" sz="1800" kern="1200">
+    <a:lvl3pPr marL="914400" algn="l" defTabSz="457200" rtl="0" eaLnBrk="1" latinLnBrk="0" hangingPunct="1">
+      <a:defRPr sz="1800" kern="1200">
         <a:solidFill>
           <a:schemeClr val="tx1"/>
         </a:solidFill>
@@ -45,8 +45,8 @@
         <a:cs typeface="+mn-cs"/>
       </a:defRPr>
     </a:lvl3pPr>
-    <a:lvl4pPr marL="1371600" algn="l" defTabSz="914400" rtl="0" eaLnBrk="1" latinLnBrk="0" hangingPunct="1">
-      <a:defRPr kumimoji="1" sz="1800" kern="1200">
+    <a:lvl4pPr marL="1371600" algn="l" defTabSz="457200" rtl="0" eaLnBrk="1" latinLnBrk="0" hangingPunct="1">
+      <a:defRPr sz="1800" kern="1200">
         <a:solidFill>
           <a:schemeClr val="tx1"/>
         </a:solidFill>
@@ -55,8 +55,8 @@
         <a:cs typeface="+mn-cs"/>
       </a:defRPr>
     </a:lvl4pPr>
-    <a:lvl5pPr marL="1828800" algn="l" defTabSz="914400" rtl="0" eaLnBrk="1" latinLnBrk="0" hangingPunct="1">
-      <a:defRPr kumimoji="1" sz="1800" kern="1200">
+    <a:lvl5pPr marL="1828800" algn="l" defTabSz="457200" rtl="0" eaLnBrk="1" latinLnBrk="0" hangingPunct="1">
+      <a:defRPr sz="1800" kern="1200">
         <a:solidFill>
           <a:schemeClr val="tx1"/>
         </a:solidFill>
@@ -65,8 +65,8 @@
         <a:cs typeface="+mn-cs"/>
       </a:defRPr>
     </a:lvl5pPr>
-    <a:lvl6pPr marL="2286000" algn="l" defTabSz="914400" rtl="0" eaLnBrk="1" latinLnBrk="0" hangingPunct="1">
-      <a:defRPr kumimoji="1" sz="1800" kern="1200">
+    <a:lvl6pPr marL="2286000" algn="l" defTabSz="457200" rtl="0" eaLnBrk="1" latinLnBrk="0" hangingPunct="1">
+      <a:defRPr sz="1800" kern="1200">
         <a:solidFill>
           <a:schemeClr val="tx1"/>
         </a:solidFill>
@@ -75,8 +75,8 @@
         <a:cs typeface="+mn-cs"/>
       </a:defRPr>
     </a:lvl6pPr>
-    <a:lvl7pPr marL="2743200" algn="l" defTabSz="914400" rtl="0" eaLnBrk="1" latinLnBrk="0" hangingPunct="1">
-      <a:defRPr kumimoji="1" sz="1800" kern="1200">
+    <a:lvl7pPr marL="2743200" algn="l" defTabSz="457200" rtl="0" eaLnBrk="1" latinLnBrk="0" hangingPunct="1">
+      <a:defRPr sz="1800" kern="1200">
         <a:solidFill>
           <a:schemeClr val="tx1"/>
         </a:solidFill>
@@ -85,8 +85,8 @@
         <a:cs typeface="+mn-cs"/>
       </a:defRPr>
     </a:lvl7pPr>
-    <a:lvl8pPr marL="3200400" algn="l" defTabSz="914400" rtl="0" eaLnBrk="1" latinLnBrk="0" hangingPunct="1">
-      <a:defRPr kumimoji="1" sz="1800" kern="1200">
+    <a:lvl8pPr marL="3200400" algn="l" defTabSz="457200" rtl="0" eaLnBrk="1" latinLnBrk="0" hangingPunct="1">
+      <a:defRPr sz="1800" kern="1200">
         <a:solidFill>
           <a:schemeClr val="tx1"/>
         </a:solidFill>
@@ -95,8 +95,8 @@
         <a:cs typeface="+mn-cs"/>
       </a:defRPr>
     </a:lvl8pPr>
-    <a:lvl9pPr marL="3657600" algn="l" defTabSz="914400" rtl="0" eaLnBrk="1" latinLnBrk="0" hangingPunct="1">
-      <a:defRPr kumimoji="1" sz="1800" kern="1200">
+    <a:lvl9pPr marL="3657600" algn="l" defTabSz="457200" rtl="0" eaLnBrk="1" latinLnBrk="0" hangingPunct="1">
+      <a:defRPr sz="1800" kern="1200">
         <a:solidFill>
           <a:schemeClr val="tx1"/>
         </a:solidFill>
@@ -131,15 +131,39 @@
           <a:chExt cx="0" cy="0"/>
         </a:xfrm>
       </p:grpSpPr>
-      <p:sp>
-        <p:nvSpPr>
-          <p:cNvPr id="2" name="タイトル 1">
+      <p:pic>
+        <p:nvPicPr>
+          <p:cNvPr id="7" name="Picture 6" descr="Droplets-HD-Title-R1d.png"/>
+          <p:cNvPicPr>
+            <a:picLocks noChangeAspect="1"/>
+          </p:cNvPicPr>
+          <p:nvPr/>
+        </p:nvPicPr>
+        <p:blipFill>
+          <a:blip r:embed="rId2">
             <a:extLst>
-              <a:ext uri="{FF2B5EF4-FFF2-40B4-BE49-F238E27FC236}">
-                <a16:creationId xmlns:a16="http://schemas.microsoft.com/office/drawing/2014/main" id="{AC5585B3-B24C-4448-869B-E4EDAEB9ACCD}"/>
+              <a:ext uri="{28A0092B-C50C-407E-A947-70E740481C1C}">
+                <a14:useLocalDpi xmlns:a14="http://schemas.microsoft.com/office/drawing/2010/main" val="0"/>
               </a:ext>
             </a:extLst>
-          </p:cNvPr>
+          </a:blip>
+          <a:stretch>
+            <a:fillRect/>
+          </a:stretch>
+        </p:blipFill>
+        <p:spPr>
+          <a:xfrm>
+            <a:off x="0" y="0"/>
+            <a:ext cx="12192000" cy="6858000"/>
+          </a:xfrm>
+          <a:prstGeom prst="rect">
+            <a:avLst/>
+          </a:prstGeom>
+        </p:spPr>
+      </p:pic>
+      <p:sp>
+        <p:nvSpPr>
+          <p:cNvPr id="2" name="Title 1"/>
           <p:cNvSpPr>
             <a:spLocks noGrp="1"/>
           </p:cNvSpPr>
@@ -149,34 +173,31 @@
         </p:nvSpPr>
         <p:spPr>
           <a:xfrm>
-            <a:off x="1524000" y="1122363"/>
-            <a:ext cx="9144000" cy="2387600"/>
-          </a:xfrm>
-        </p:spPr>
-        <p:txBody>
-          <a:bodyPr anchor="b"/>
+            <a:off x="1751012" y="1300785"/>
+            <a:ext cx="8689976" cy="2509213"/>
+          </a:xfrm>
+        </p:spPr>
+        <p:txBody>
+          <a:bodyPr anchor="b">
+            <a:normAutofit/>
+          </a:bodyPr>
           <a:lstStyle>
             <a:lvl1pPr algn="ctr">
-              <a:defRPr sz="6000"/>
+              <a:defRPr sz="4800"/>
             </a:lvl1pPr>
           </a:lstStyle>
           <a:p>
             <a:r>
-              <a:rPr kumimoji="1" lang="ja-JP" altLang="en-US"/>
+              <a:rPr lang="ja-JP" altLang="en-US"/>
               <a:t>マスター タイトルの書式設定</a:t>
             </a:r>
-          </a:p>
-        </p:txBody>
-      </p:sp>
-      <p:sp>
-        <p:nvSpPr>
-          <p:cNvPr id="3" name="字幕 2">
-            <a:extLst>
-              <a:ext uri="{FF2B5EF4-FFF2-40B4-BE49-F238E27FC236}">
-                <a16:creationId xmlns:a16="http://schemas.microsoft.com/office/drawing/2014/main" id="{830BE476-7F30-456B-BE1E-23F1A4EAA402}"/>
-              </a:ext>
-            </a:extLst>
-          </p:cNvPr>
+            <a:endParaRPr lang="en-US" dirty="0"/>
+          </a:p>
+        </p:txBody>
+      </p:sp>
+      <p:sp>
+        <p:nvSpPr>
+          <p:cNvPr id="3" name="Subtitle 2"/>
           <p:cNvSpPr>
             <a:spLocks noGrp="1"/>
           </p:cNvSpPr>
@@ -186,16 +207,24 @@
         </p:nvSpPr>
         <p:spPr>
           <a:xfrm>
-            <a:off x="1524000" y="3602038"/>
-            <a:ext cx="9144000" cy="1655762"/>
-          </a:xfrm>
-        </p:spPr>
-        <p:txBody>
-          <a:bodyPr/>
+            <a:off x="1751012" y="3886200"/>
+            <a:ext cx="8689976" cy="1371599"/>
+          </a:xfrm>
+        </p:spPr>
+        <p:txBody>
+          <a:bodyPr>
+            <a:normAutofit/>
+          </a:bodyPr>
           <a:lstStyle>
             <a:lvl1pPr marL="0" indent="0" algn="ctr">
               <a:buNone/>
-              <a:defRPr sz="2400"/>
+              <a:defRPr sz="2200">
+                <a:solidFill>
+                  <a:schemeClr val="bg1">
+                    <a:lumMod val="50000"/>
+                  </a:schemeClr>
+                </a:solidFill>
+              </a:defRPr>
             </a:lvl1pPr>
             <a:lvl2pPr marL="457200" indent="0" algn="ctr">
               <a:buNone/>
@@ -232,21 +261,16 @@
           </a:lstStyle>
           <a:p>
             <a:r>
-              <a:rPr kumimoji="1" lang="ja-JP" altLang="en-US"/>
+              <a:rPr lang="ja-JP" altLang="en-US"/>
               <a:t>マスター サブタイトルの書式設定</a:t>
             </a:r>
-          </a:p>
-        </p:txBody>
-      </p:sp>
-      <p:sp>
-        <p:nvSpPr>
-          <p:cNvPr id="4" name="日付プレースホルダー 3">
-            <a:extLst>
-              <a:ext uri="{FF2B5EF4-FFF2-40B4-BE49-F238E27FC236}">
-                <a16:creationId xmlns:a16="http://schemas.microsoft.com/office/drawing/2014/main" id="{661686AD-A9D6-48EB-9FB7-522A842E813E}"/>
-              </a:ext>
-            </a:extLst>
-          </p:cNvPr>
+            <a:endParaRPr lang="en-US" dirty="0"/>
+          </a:p>
+        </p:txBody>
+      </p:sp>
+      <p:sp>
+        <p:nvSpPr>
+          <p:cNvPr id="4" name="Date Placeholder 3"/>
           <p:cNvSpPr>
             <a:spLocks noGrp="1"/>
           </p:cNvSpPr>
@@ -261,7 +285,7 @@
           <a:p>
             <a:fld id="{5F305778-E222-4C85-8E95-A8CE1D926E62}" type="datetimeFigureOut">
               <a:rPr kumimoji="1" lang="ja-JP" altLang="en-US" smtClean="0"/>
-              <a:t>2025/10/29</a:t>
+              <a:t>2025/10/31</a:t>
             </a:fld>
             <a:endParaRPr kumimoji="1" lang="ja-JP" altLang="en-US"/>
           </a:p>
@@ -269,13 +293,7 @@
       </p:sp>
       <p:sp>
         <p:nvSpPr>
-          <p:cNvPr id="5" name="フッター プレースホルダー 4">
-            <a:extLst>
-              <a:ext uri="{FF2B5EF4-FFF2-40B4-BE49-F238E27FC236}">
-                <a16:creationId xmlns:a16="http://schemas.microsoft.com/office/drawing/2014/main" id="{0DB353CF-1A80-4ACE-836A-ECE3631E3FF3}"/>
-              </a:ext>
-            </a:extLst>
-          </p:cNvPr>
+          <p:cNvPr id="5" name="Footer Placeholder 4"/>
           <p:cNvSpPr>
             <a:spLocks noGrp="1"/>
           </p:cNvSpPr>
@@ -294,13 +312,7 @@
       </p:sp>
       <p:sp>
         <p:nvSpPr>
-          <p:cNvPr id="6" name="スライド番号プレースホルダー 5">
-            <a:extLst>
-              <a:ext uri="{FF2B5EF4-FFF2-40B4-BE49-F238E27FC236}">
-                <a16:creationId xmlns:a16="http://schemas.microsoft.com/office/drawing/2014/main" id="{BCC5FE87-3B59-415D-91CD-48357ED88894}"/>
-              </a:ext>
-            </a:extLst>
-          </p:cNvPr>
+          <p:cNvPr id="6" name="Slide Number Placeholder 5"/>
           <p:cNvSpPr>
             <a:spLocks noGrp="1"/>
           </p:cNvSpPr>
@@ -324,7 +336,7 @@
     </p:spTree>
     <p:extLst>
       <p:ext uri="{BB962C8B-B14F-4D97-AF65-F5344CB8AC3E}">
-        <p14:creationId xmlns:p14="http://schemas.microsoft.com/office/powerpoint/2010/main" val="3409266918"/>
+        <p14:creationId xmlns:p14="http://schemas.microsoft.com/office/powerpoint/2010/main" val="17570462"/>
       </p:ext>
     </p:extLst>
   </p:cSld>
@@ -335,6 +347,2713 @@
 </file>
 
 <file path=ppt/slideLayouts/slideLayout10.xml><?xml version="1.0" encoding="utf-8"?>
+<p:sldLayout xmlns:a="http://schemas.openxmlformats.org/drawingml/2006/main" xmlns:r="http://schemas.openxmlformats.org/officeDocument/2006/relationships" xmlns:p="http://schemas.openxmlformats.org/presentationml/2006/main" preserve="1">
+  <p:cSld name="パノラマ写真 (キャプション付き)">
+    <p:spTree>
+      <p:nvGrpSpPr>
+        <p:cNvPr id="1" name=""/>
+        <p:cNvGrpSpPr/>
+        <p:nvPr/>
+      </p:nvGrpSpPr>
+      <p:grpSpPr>
+        <a:xfrm>
+          <a:off x="0" y="0"/>
+          <a:ext cx="0" cy="0"/>
+          <a:chOff x="0" y="0"/>
+          <a:chExt cx="0" cy="0"/>
+        </a:xfrm>
+      </p:grpSpPr>
+      <p:pic>
+        <p:nvPicPr>
+          <p:cNvPr id="10" name="Picture 9" descr="Droplets-HD-Content-R1d.png"/>
+          <p:cNvPicPr>
+            <a:picLocks noChangeAspect="1"/>
+          </p:cNvPicPr>
+          <p:nvPr/>
+        </p:nvPicPr>
+        <p:blipFill>
+          <a:blip r:embed="rId2">
+            <a:extLst>
+              <a:ext uri="{28A0092B-C50C-407E-A947-70E740481C1C}">
+                <a14:useLocalDpi xmlns:a14="http://schemas.microsoft.com/office/drawing/2010/main" val="0"/>
+              </a:ext>
+            </a:extLst>
+          </a:blip>
+          <a:stretch>
+            <a:fillRect/>
+          </a:stretch>
+        </p:blipFill>
+        <p:spPr>
+          <a:xfrm>
+            <a:off x="0" y="0"/>
+            <a:ext cx="12192000" cy="6858000"/>
+          </a:xfrm>
+          <a:prstGeom prst="rect">
+            <a:avLst/>
+          </a:prstGeom>
+        </p:spPr>
+      </p:pic>
+      <p:sp>
+        <p:nvSpPr>
+          <p:cNvPr id="2" name="Title 1"/>
+          <p:cNvSpPr>
+            <a:spLocks noGrp="1"/>
+          </p:cNvSpPr>
+          <p:nvPr>
+            <p:ph type="title"/>
+          </p:nvPr>
+        </p:nvSpPr>
+        <p:spPr>
+          <a:xfrm>
+            <a:off x="913794" y="4289374"/>
+            <a:ext cx="10364432" cy="811610"/>
+          </a:xfrm>
+        </p:spPr>
+        <p:txBody>
+          <a:bodyPr anchor="b"/>
+          <a:lstStyle>
+            <a:lvl1pPr>
+              <a:defRPr sz="3200"/>
+            </a:lvl1pPr>
+          </a:lstStyle>
+          <a:p>
+            <a:r>
+              <a:rPr lang="ja-JP" altLang="en-US"/>
+              <a:t>マスター タイトルの書式設定</a:t>
+            </a:r>
+            <a:endParaRPr lang="en-US" dirty="0"/>
+          </a:p>
+        </p:txBody>
+      </p:sp>
+      <p:sp>
+        <p:nvSpPr>
+          <p:cNvPr id="3" name="Picture Placeholder 2"/>
+          <p:cNvSpPr>
+            <a:spLocks noGrp="1" noChangeAspect="1"/>
+          </p:cNvSpPr>
+          <p:nvPr>
+            <p:ph type="pic" idx="1"/>
+          </p:nvPr>
+        </p:nvSpPr>
+        <p:spPr>
+          <a:xfrm>
+            <a:off x="1184744" y="698261"/>
+            <a:ext cx="9822532" cy="3214136"/>
+          </a:xfrm>
+          <a:prstGeom prst="roundRect">
+            <a:avLst>
+              <a:gd name="adj" fmla="val 4944"/>
+            </a:avLst>
+          </a:prstGeom>
+          <a:noFill/>
+          <a:ln w="82550" cap="sq">
+            <a:solidFill>
+              <a:srgbClr val="EAEAEA"/>
+            </a:solidFill>
+            <a:miter lim="800000"/>
+          </a:ln>
+          <a:effectLst/>
+          <a:scene3d>
+            <a:camera prst="orthographicFront"/>
+            <a:lightRig rig="threePt" dir="t">
+              <a:rot lat="0" lon="0" rev="2700000"/>
+            </a:lightRig>
+          </a:scene3d>
+          <a:sp3d contourW="6350">
+            <a:bevelT h="38100"/>
+            <a:contourClr>
+              <a:srgbClr val="C0C0C0"/>
+            </a:contourClr>
+          </a:sp3d>
+        </p:spPr>
+        <p:txBody>
+          <a:bodyPr anchor="t"/>
+          <a:lstStyle>
+            <a:lvl1pPr marL="0" indent="0" algn="ctr">
+              <a:buNone/>
+              <a:defRPr sz="3200"/>
+            </a:lvl1pPr>
+            <a:lvl2pPr marL="457200" indent="0">
+              <a:buNone/>
+              <a:defRPr sz="2800"/>
+            </a:lvl2pPr>
+            <a:lvl3pPr marL="914400" indent="0">
+              <a:buNone/>
+              <a:defRPr sz="2400"/>
+            </a:lvl3pPr>
+            <a:lvl4pPr marL="1371600" indent="0">
+              <a:buNone/>
+              <a:defRPr sz="2000"/>
+            </a:lvl4pPr>
+            <a:lvl5pPr marL="1828800" indent="0">
+              <a:buNone/>
+              <a:defRPr sz="2000"/>
+            </a:lvl5pPr>
+            <a:lvl6pPr marL="2286000" indent="0">
+              <a:buNone/>
+              <a:defRPr sz="2000"/>
+            </a:lvl6pPr>
+            <a:lvl7pPr marL="2743200" indent="0">
+              <a:buNone/>
+              <a:defRPr sz="2000"/>
+            </a:lvl7pPr>
+            <a:lvl8pPr marL="3200400" indent="0">
+              <a:buNone/>
+              <a:defRPr sz="2000"/>
+            </a:lvl8pPr>
+            <a:lvl9pPr marL="3657600" indent="0">
+              <a:buNone/>
+              <a:defRPr sz="2000"/>
+            </a:lvl9pPr>
+          </a:lstStyle>
+          <a:p>
+            <a:r>
+              <a:rPr lang="ja-JP" altLang="en-US"/>
+              <a:t>アイコンをクリックして図を追加</a:t>
+            </a:r>
+            <a:endParaRPr lang="en-US" dirty="0"/>
+          </a:p>
+        </p:txBody>
+      </p:sp>
+      <p:sp>
+        <p:nvSpPr>
+          <p:cNvPr id="4" name="Text Placeholder 3"/>
+          <p:cNvSpPr>
+            <a:spLocks noGrp="1"/>
+          </p:cNvSpPr>
+          <p:nvPr>
+            <p:ph type="body" sz="half" idx="2"/>
+          </p:nvPr>
+        </p:nvSpPr>
+        <p:spPr>
+          <a:xfrm>
+            <a:off x="913774" y="5108728"/>
+            <a:ext cx="10364452" cy="682472"/>
+          </a:xfrm>
+        </p:spPr>
+        <p:txBody>
+          <a:bodyPr/>
+          <a:lstStyle>
+            <a:lvl1pPr marL="0" indent="0" algn="ctr">
+              <a:buNone/>
+              <a:defRPr sz="1600"/>
+            </a:lvl1pPr>
+            <a:lvl2pPr marL="457200" indent="0">
+              <a:buNone/>
+              <a:defRPr sz="1400"/>
+            </a:lvl2pPr>
+            <a:lvl3pPr marL="914400" indent="0">
+              <a:buNone/>
+              <a:defRPr sz="1200"/>
+            </a:lvl3pPr>
+            <a:lvl4pPr marL="1371600" indent="0">
+              <a:buNone/>
+              <a:defRPr sz="1000"/>
+            </a:lvl4pPr>
+            <a:lvl5pPr marL="1828800" indent="0">
+              <a:buNone/>
+              <a:defRPr sz="1000"/>
+            </a:lvl5pPr>
+            <a:lvl6pPr marL="2286000" indent="0">
+              <a:buNone/>
+              <a:defRPr sz="1000"/>
+            </a:lvl6pPr>
+            <a:lvl7pPr marL="2743200" indent="0">
+              <a:buNone/>
+              <a:defRPr sz="1000"/>
+            </a:lvl7pPr>
+            <a:lvl8pPr marL="3200400" indent="0">
+              <a:buNone/>
+              <a:defRPr sz="1000"/>
+            </a:lvl8pPr>
+            <a:lvl9pPr marL="3657600" indent="0">
+              <a:buNone/>
+              <a:defRPr sz="1000"/>
+            </a:lvl9pPr>
+          </a:lstStyle>
+          <a:p>
+            <a:pPr lvl="0"/>
+            <a:r>
+              <a:rPr lang="ja-JP" altLang="en-US"/>
+              <a:t>マスター テキストの書式設定</a:t>
+            </a:r>
+          </a:p>
+        </p:txBody>
+      </p:sp>
+      <p:sp>
+        <p:nvSpPr>
+          <p:cNvPr id="5" name="Date Placeholder 4"/>
+          <p:cNvSpPr>
+            <a:spLocks noGrp="1"/>
+          </p:cNvSpPr>
+          <p:nvPr>
+            <p:ph type="dt" sz="half" idx="10"/>
+          </p:nvPr>
+        </p:nvSpPr>
+        <p:spPr/>
+        <p:txBody>
+          <a:bodyPr/>
+          <a:lstStyle/>
+          <a:p>
+            <a:fld id="{5F305778-E222-4C85-8E95-A8CE1D926E62}" type="datetimeFigureOut">
+              <a:rPr kumimoji="1" lang="ja-JP" altLang="en-US" smtClean="0"/>
+              <a:t>2025/10/31</a:t>
+            </a:fld>
+            <a:endParaRPr kumimoji="1" lang="ja-JP" altLang="en-US"/>
+          </a:p>
+        </p:txBody>
+      </p:sp>
+      <p:sp>
+        <p:nvSpPr>
+          <p:cNvPr id="6" name="Footer Placeholder 5"/>
+          <p:cNvSpPr>
+            <a:spLocks noGrp="1"/>
+          </p:cNvSpPr>
+          <p:nvPr>
+            <p:ph type="ftr" sz="quarter" idx="11"/>
+          </p:nvPr>
+        </p:nvSpPr>
+        <p:spPr/>
+        <p:txBody>
+          <a:bodyPr/>
+          <a:lstStyle/>
+          <a:p>
+            <a:endParaRPr kumimoji="1" lang="ja-JP" altLang="en-US"/>
+          </a:p>
+        </p:txBody>
+      </p:sp>
+      <p:sp>
+        <p:nvSpPr>
+          <p:cNvPr id="7" name="Slide Number Placeholder 6"/>
+          <p:cNvSpPr>
+            <a:spLocks noGrp="1"/>
+          </p:cNvSpPr>
+          <p:nvPr>
+            <p:ph type="sldNum" sz="quarter" idx="12"/>
+          </p:nvPr>
+        </p:nvSpPr>
+        <p:spPr/>
+        <p:txBody>
+          <a:bodyPr/>
+          <a:lstStyle/>
+          <a:p>
+            <a:fld id="{48CB8B3E-63A1-441E-8AC1-5627B169235D}" type="slidenum">
+              <a:rPr kumimoji="1" lang="ja-JP" altLang="en-US" smtClean="0"/>
+              <a:t>‹#›</a:t>
+            </a:fld>
+            <a:endParaRPr kumimoji="1" lang="ja-JP" altLang="en-US"/>
+          </a:p>
+        </p:txBody>
+      </p:sp>
+    </p:spTree>
+    <p:extLst>
+      <p:ext uri="{BB962C8B-B14F-4D97-AF65-F5344CB8AC3E}">
+        <p14:creationId xmlns:p14="http://schemas.microsoft.com/office/powerpoint/2010/main" val="2788049946"/>
+      </p:ext>
+    </p:extLst>
+  </p:cSld>
+  <p:clrMapOvr>
+    <a:masterClrMapping/>
+  </p:clrMapOvr>
+</p:sldLayout>
+</file>
+
+<file path=ppt/slideLayouts/slideLayout11.xml><?xml version="1.0" encoding="utf-8"?>
+<p:sldLayout xmlns:a="http://schemas.openxmlformats.org/drawingml/2006/main" xmlns:r="http://schemas.openxmlformats.org/officeDocument/2006/relationships" xmlns:p="http://schemas.openxmlformats.org/presentationml/2006/main" preserve="1">
+  <p:cSld name="タイトルとキャプション">
+    <p:spTree>
+      <p:nvGrpSpPr>
+        <p:cNvPr id="1" name=""/>
+        <p:cNvGrpSpPr/>
+        <p:nvPr/>
+      </p:nvGrpSpPr>
+      <p:grpSpPr>
+        <a:xfrm>
+          <a:off x="0" y="0"/>
+          <a:ext cx="0" cy="0"/>
+          <a:chOff x="0" y="0"/>
+          <a:chExt cx="0" cy="0"/>
+        </a:xfrm>
+      </p:grpSpPr>
+      <p:pic>
+        <p:nvPicPr>
+          <p:cNvPr id="8" name="Picture 7" descr="Droplets-HD-Content-R1d.png"/>
+          <p:cNvPicPr>
+            <a:picLocks noChangeAspect="1"/>
+          </p:cNvPicPr>
+          <p:nvPr/>
+        </p:nvPicPr>
+        <p:blipFill>
+          <a:blip r:embed="rId2">
+            <a:extLst>
+              <a:ext uri="{28A0092B-C50C-407E-A947-70E740481C1C}">
+                <a14:useLocalDpi xmlns:a14="http://schemas.microsoft.com/office/drawing/2010/main" val="0"/>
+              </a:ext>
+            </a:extLst>
+          </a:blip>
+          <a:stretch>
+            <a:fillRect/>
+          </a:stretch>
+        </p:blipFill>
+        <p:spPr>
+          <a:xfrm>
+            <a:off x="0" y="0"/>
+            <a:ext cx="12192000" cy="6858000"/>
+          </a:xfrm>
+          <a:prstGeom prst="rect">
+            <a:avLst/>
+          </a:prstGeom>
+        </p:spPr>
+      </p:pic>
+      <p:sp>
+        <p:nvSpPr>
+          <p:cNvPr id="2" name="Title 1"/>
+          <p:cNvSpPr>
+            <a:spLocks noGrp="1"/>
+          </p:cNvSpPr>
+          <p:nvPr>
+            <p:ph type="title"/>
+          </p:nvPr>
+        </p:nvSpPr>
+        <p:spPr>
+          <a:xfrm>
+            <a:off x="913774" y="609599"/>
+            <a:ext cx="10364452" cy="3427245"/>
+          </a:xfrm>
+        </p:spPr>
+        <p:txBody>
+          <a:bodyPr anchor="ctr"/>
+          <a:lstStyle>
+            <a:lvl1pPr algn="ctr">
+              <a:defRPr sz="3200"/>
+            </a:lvl1pPr>
+          </a:lstStyle>
+          <a:p>
+            <a:r>
+              <a:rPr lang="ja-JP" altLang="en-US"/>
+              <a:t>マスター タイトルの書式設定</a:t>
+            </a:r>
+            <a:endParaRPr lang="en-US" dirty="0"/>
+          </a:p>
+        </p:txBody>
+      </p:sp>
+      <p:sp>
+        <p:nvSpPr>
+          <p:cNvPr id="4" name="Text Placeholder 3"/>
+          <p:cNvSpPr>
+            <a:spLocks noGrp="1"/>
+          </p:cNvSpPr>
+          <p:nvPr>
+            <p:ph type="body" sz="half" idx="2"/>
+          </p:nvPr>
+        </p:nvSpPr>
+        <p:spPr>
+          <a:xfrm>
+            <a:off x="913775" y="4204821"/>
+            <a:ext cx="10364452" cy="1586380"/>
+          </a:xfrm>
+        </p:spPr>
+        <p:txBody>
+          <a:bodyPr anchor="ctr"/>
+          <a:lstStyle>
+            <a:lvl1pPr marL="0" indent="0" algn="ctr">
+              <a:buNone/>
+              <a:defRPr sz="1600"/>
+            </a:lvl1pPr>
+            <a:lvl2pPr marL="457200" indent="0">
+              <a:buNone/>
+              <a:defRPr sz="1400"/>
+            </a:lvl2pPr>
+            <a:lvl3pPr marL="914400" indent="0">
+              <a:buNone/>
+              <a:defRPr sz="1200"/>
+            </a:lvl3pPr>
+            <a:lvl4pPr marL="1371600" indent="0">
+              <a:buNone/>
+              <a:defRPr sz="1000"/>
+            </a:lvl4pPr>
+            <a:lvl5pPr marL="1828800" indent="0">
+              <a:buNone/>
+              <a:defRPr sz="1000"/>
+            </a:lvl5pPr>
+            <a:lvl6pPr marL="2286000" indent="0">
+              <a:buNone/>
+              <a:defRPr sz="1000"/>
+            </a:lvl6pPr>
+            <a:lvl7pPr marL="2743200" indent="0">
+              <a:buNone/>
+              <a:defRPr sz="1000"/>
+            </a:lvl7pPr>
+            <a:lvl8pPr marL="3200400" indent="0">
+              <a:buNone/>
+              <a:defRPr sz="1000"/>
+            </a:lvl8pPr>
+            <a:lvl9pPr marL="3657600" indent="0">
+              <a:buNone/>
+              <a:defRPr sz="1000"/>
+            </a:lvl9pPr>
+          </a:lstStyle>
+          <a:p>
+            <a:pPr lvl="0"/>
+            <a:r>
+              <a:rPr lang="ja-JP" altLang="en-US"/>
+              <a:t>マスター テキストの書式設定</a:t>
+            </a:r>
+          </a:p>
+        </p:txBody>
+      </p:sp>
+      <p:sp>
+        <p:nvSpPr>
+          <p:cNvPr id="5" name="Date Placeholder 4"/>
+          <p:cNvSpPr>
+            <a:spLocks noGrp="1"/>
+          </p:cNvSpPr>
+          <p:nvPr>
+            <p:ph type="dt" sz="half" idx="10"/>
+          </p:nvPr>
+        </p:nvSpPr>
+        <p:spPr/>
+        <p:txBody>
+          <a:bodyPr/>
+          <a:lstStyle/>
+          <a:p>
+            <a:fld id="{5F305778-E222-4C85-8E95-A8CE1D926E62}" type="datetimeFigureOut">
+              <a:rPr kumimoji="1" lang="ja-JP" altLang="en-US" smtClean="0"/>
+              <a:t>2025/10/31</a:t>
+            </a:fld>
+            <a:endParaRPr kumimoji="1" lang="ja-JP" altLang="en-US"/>
+          </a:p>
+        </p:txBody>
+      </p:sp>
+      <p:sp>
+        <p:nvSpPr>
+          <p:cNvPr id="6" name="Footer Placeholder 5"/>
+          <p:cNvSpPr>
+            <a:spLocks noGrp="1"/>
+          </p:cNvSpPr>
+          <p:nvPr>
+            <p:ph type="ftr" sz="quarter" idx="11"/>
+          </p:nvPr>
+        </p:nvSpPr>
+        <p:spPr/>
+        <p:txBody>
+          <a:bodyPr/>
+          <a:lstStyle/>
+          <a:p>
+            <a:endParaRPr kumimoji="1" lang="ja-JP" altLang="en-US"/>
+          </a:p>
+        </p:txBody>
+      </p:sp>
+      <p:sp>
+        <p:nvSpPr>
+          <p:cNvPr id="7" name="Slide Number Placeholder 6"/>
+          <p:cNvSpPr>
+            <a:spLocks noGrp="1"/>
+          </p:cNvSpPr>
+          <p:nvPr>
+            <p:ph type="sldNum" sz="quarter" idx="12"/>
+          </p:nvPr>
+        </p:nvSpPr>
+        <p:spPr/>
+        <p:txBody>
+          <a:bodyPr/>
+          <a:lstStyle/>
+          <a:p>
+            <a:fld id="{48CB8B3E-63A1-441E-8AC1-5627B169235D}" type="slidenum">
+              <a:rPr kumimoji="1" lang="ja-JP" altLang="en-US" smtClean="0"/>
+              <a:t>‹#›</a:t>
+            </a:fld>
+            <a:endParaRPr kumimoji="1" lang="ja-JP" altLang="en-US"/>
+          </a:p>
+        </p:txBody>
+      </p:sp>
+    </p:spTree>
+    <p:extLst>
+      <p:ext uri="{BB962C8B-B14F-4D97-AF65-F5344CB8AC3E}">
+        <p14:creationId xmlns:p14="http://schemas.microsoft.com/office/powerpoint/2010/main" val="2798911856"/>
+      </p:ext>
+    </p:extLst>
+  </p:cSld>
+  <p:clrMapOvr>
+    <a:masterClrMapping/>
+  </p:clrMapOvr>
+</p:sldLayout>
+</file>
+
+<file path=ppt/slideLayouts/slideLayout12.xml><?xml version="1.0" encoding="utf-8"?>
+<p:sldLayout xmlns:a="http://schemas.openxmlformats.org/drawingml/2006/main" xmlns:r="http://schemas.openxmlformats.org/officeDocument/2006/relationships" xmlns:p="http://schemas.openxmlformats.org/presentationml/2006/main" preserve="1">
+  <p:cSld name="引用 (キャプション付き)">
+    <p:spTree>
+      <p:nvGrpSpPr>
+        <p:cNvPr id="1" name=""/>
+        <p:cNvGrpSpPr/>
+        <p:nvPr/>
+      </p:nvGrpSpPr>
+      <p:grpSpPr>
+        <a:xfrm>
+          <a:off x="0" y="0"/>
+          <a:ext cx="0" cy="0"/>
+          <a:chOff x="0" y="0"/>
+          <a:chExt cx="0" cy="0"/>
+        </a:xfrm>
+      </p:grpSpPr>
+      <p:pic>
+        <p:nvPicPr>
+          <p:cNvPr id="11" name="Picture 10" descr="Droplets-HD-Content-R1d.png"/>
+          <p:cNvPicPr>
+            <a:picLocks noChangeAspect="1"/>
+          </p:cNvPicPr>
+          <p:nvPr/>
+        </p:nvPicPr>
+        <p:blipFill>
+          <a:blip r:embed="rId2">
+            <a:extLst>
+              <a:ext uri="{28A0092B-C50C-407E-A947-70E740481C1C}">
+                <a14:useLocalDpi xmlns:a14="http://schemas.microsoft.com/office/drawing/2010/main" val="0"/>
+              </a:ext>
+            </a:extLst>
+          </a:blip>
+          <a:stretch>
+            <a:fillRect/>
+          </a:stretch>
+        </p:blipFill>
+        <p:spPr>
+          <a:xfrm>
+            <a:off x="0" y="0"/>
+            <a:ext cx="12192000" cy="6858000"/>
+          </a:xfrm>
+          <a:prstGeom prst="rect">
+            <a:avLst/>
+          </a:prstGeom>
+        </p:spPr>
+      </p:pic>
+      <p:sp>
+        <p:nvSpPr>
+          <p:cNvPr id="2" name="Title 1"/>
+          <p:cNvSpPr>
+            <a:spLocks noGrp="1"/>
+          </p:cNvSpPr>
+          <p:nvPr>
+            <p:ph type="title"/>
+          </p:nvPr>
+        </p:nvSpPr>
+        <p:spPr>
+          <a:xfrm>
+            <a:off x="1446212" y="609600"/>
+            <a:ext cx="9302752" cy="2992904"/>
+          </a:xfrm>
+        </p:spPr>
+        <p:txBody>
+          <a:bodyPr anchor="ctr"/>
+          <a:lstStyle>
+            <a:lvl1pPr>
+              <a:defRPr sz="3200"/>
+            </a:lvl1pPr>
+          </a:lstStyle>
+          <a:p>
+            <a:r>
+              <a:rPr lang="ja-JP" altLang="en-US"/>
+              <a:t>マスター タイトルの書式設定</a:t>
+            </a:r>
+            <a:endParaRPr lang="en-US" dirty="0"/>
+          </a:p>
+        </p:txBody>
+      </p:sp>
+      <p:sp>
+        <p:nvSpPr>
+          <p:cNvPr id="12" name="Text Placeholder 3"/>
+          <p:cNvSpPr>
+            <a:spLocks noGrp="1"/>
+          </p:cNvSpPr>
+          <p:nvPr>
+            <p:ph type="body" sz="half" idx="13"/>
+          </p:nvPr>
+        </p:nvSpPr>
+        <p:spPr>
+          <a:xfrm>
+            <a:off x="1720644" y="3610032"/>
+            <a:ext cx="8752299" cy="594788"/>
+          </a:xfrm>
+        </p:spPr>
+        <p:txBody>
+          <a:bodyPr anchor="t">
+            <a:normAutofit/>
+          </a:bodyPr>
+          <a:lstStyle>
+            <a:lvl1pPr marL="0" indent="0">
+              <a:buNone/>
+              <a:defRPr sz="1400"/>
+            </a:lvl1pPr>
+            <a:lvl2pPr marL="457200" indent="0">
+              <a:buNone/>
+              <a:defRPr sz="1400"/>
+            </a:lvl2pPr>
+            <a:lvl3pPr marL="914400" indent="0">
+              <a:buNone/>
+              <a:defRPr sz="1200"/>
+            </a:lvl3pPr>
+            <a:lvl4pPr marL="1371600" indent="0">
+              <a:buNone/>
+              <a:defRPr sz="1000"/>
+            </a:lvl4pPr>
+            <a:lvl5pPr marL="1828800" indent="0">
+              <a:buNone/>
+              <a:defRPr sz="1000"/>
+            </a:lvl5pPr>
+            <a:lvl6pPr marL="2286000" indent="0">
+              <a:buNone/>
+              <a:defRPr sz="1000"/>
+            </a:lvl6pPr>
+            <a:lvl7pPr marL="2743200" indent="0">
+              <a:buNone/>
+              <a:defRPr sz="1000"/>
+            </a:lvl7pPr>
+            <a:lvl8pPr marL="3200400" indent="0">
+              <a:buNone/>
+              <a:defRPr sz="1000"/>
+            </a:lvl8pPr>
+            <a:lvl9pPr marL="3657600" indent="0">
+              <a:buNone/>
+              <a:defRPr sz="1000"/>
+            </a:lvl9pPr>
+          </a:lstStyle>
+          <a:p>
+            <a:pPr lvl="0"/>
+            <a:r>
+              <a:rPr lang="ja-JP" altLang="en-US"/>
+              <a:t>マスター テキストの書式設定</a:t>
+            </a:r>
+          </a:p>
+        </p:txBody>
+      </p:sp>
+      <p:sp>
+        <p:nvSpPr>
+          <p:cNvPr id="4" name="Text Placeholder 3"/>
+          <p:cNvSpPr>
+            <a:spLocks noGrp="1"/>
+          </p:cNvSpPr>
+          <p:nvPr>
+            <p:ph type="body" sz="half" idx="2"/>
+          </p:nvPr>
+        </p:nvSpPr>
+        <p:spPr>
+          <a:xfrm>
+            <a:off x="913774" y="4372796"/>
+            <a:ext cx="10364452" cy="1421053"/>
+          </a:xfrm>
+        </p:spPr>
+        <p:txBody>
+          <a:bodyPr anchor="ctr">
+            <a:normAutofit/>
+          </a:bodyPr>
+          <a:lstStyle>
+            <a:lvl1pPr marL="0" indent="0" algn="ctr">
+              <a:buNone/>
+              <a:defRPr sz="1600"/>
+            </a:lvl1pPr>
+            <a:lvl2pPr marL="457200" indent="0">
+              <a:buNone/>
+              <a:defRPr sz="1400"/>
+            </a:lvl2pPr>
+            <a:lvl3pPr marL="914400" indent="0">
+              <a:buNone/>
+              <a:defRPr sz="1200"/>
+            </a:lvl3pPr>
+            <a:lvl4pPr marL="1371600" indent="0">
+              <a:buNone/>
+              <a:defRPr sz="1000"/>
+            </a:lvl4pPr>
+            <a:lvl5pPr marL="1828800" indent="0">
+              <a:buNone/>
+              <a:defRPr sz="1000"/>
+            </a:lvl5pPr>
+            <a:lvl6pPr marL="2286000" indent="0">
+              <a:buNone/>
+              <a:defRPr sz="1000"/>
+            </a:lvl6pPr>
+            <a:lvl7pPr marL="2743200" indent="0">
+              <a:buNone/>
+              <a:defRPr sz="1000"/>
+            </a:lvl7pPr>
+            <a:lvl8pPr marL="3200400" indent="0">
+              <a:buNone/>
+              <a:defRPr sz="1000"/>
+            </a:lvl8pPr>
+            <a:lvl9pPr marL="3657600" indent="0">
+              <a:buNone/>
+              <a:defRPr sz="1000"/>
+            </a:lvl9pPr>
+          </a:lstStyle>
+          <a:p>
+            <a:pPr lvl="0"/>
+            <a:r>
+              <a:rPr lang="ja-JP" altLang="en-US"/>
+              <a:t>マスター テキストの書式設定</a:t>
+            </a:r>
+          </a:p>
+        </p:txBody>
+      </p:sp>
+      <p:sp>
+        <p:nvSpPr>
+          <p:cNvPr id="5" name="Date Placeholder 4"/>
+          <p:cNvSpPr>
+            <a:spLocks noGrp="1"/>
+          </p:cNvSpPr>
+          <p:nvPr>
+            <p:ph type="dt" sz="half" idx="10"/>
+          </p:nvPr>
+        </p:nvSpPr>
+        <p:spPr/>
+        <p:txBody>
+          <a:bodyPr/>
+          <a:lstStyle/>
+          <a:p>
+            <a:fld id="{5F305778-E222-4C85-8E95-A8CE1D926E62}" type="datetimeFigureOut">
+              <a:rPr kumimoji="1" lang="ja-JP" altLang="en-US" smtClean="0"/>
+              <a:t>2025/10/31</a:t>
+            </a:fld>
+            <a:endParaRPr kumimoji="1" lang="ja-JP" altLang="en-US"/>
+          </a:p>
+        </p:txBody>
+      </p:sp>
+      <p:sp>
+        <p:nvSpPr>
+          <p:cNvPr id="6" name="Footer Placeholder 5"/>
+          <p:cNvSpPr>
+            <a:spLocks noGrp="1"/>
+          </p:cNvSpPr>
+          <p:nvPr>
+            <p:ph type="ftr" sz="quarter" idx="11"/>
+          </p:nvPr>
+        </p:nvSpPr>
+        <p:spPr/>
+        <p:txBody>
+          <a:bodyPr/>
+          <a:lstStyle/>
+          <a:p>
+            <a:endParaRPr kumimoji="1" lang="ja-JP" altLang="en-US"/>
+          </a:p>
+        </p:txBody>
+      </p:sp>
+      <p:sp>
+        <p:nvSpPr>
+          <p:cNvPr id="7" name="Slide Number Placeholder 6"/>
+          <p:cNvSpPr>
+            <a:spLocks noGrp="1"/>
+          </p:cNvSpPr>
+          <p:nvPr>
+            <p:ph type="sldNum" sz="quarter" idx="12"/>
+          </p:nvPr>
+        </p:nvSpPr>
+        <p:spPr/>
+        <p:txBody>
+          <a:bodyPr/>
+          <a:lstStyle/>
+          <a:p>
+            <a:fld id="{48CB8B3E-63A1-441E-8AC1-5627B169235D}" type="slidenum">
+              <a:rPr kumimoji="1" lang="ja-JP" altLang="en-US" smtClean="0"/>
+              <a:t>‹#›</a:t>
+            </a:fld>
+            <a:endParaRPr kumimoji="1" lang="ja-JP" altLang="en-US"/>
+          </a:p>
+        </p:txBody>
+      </p:sp>
+      <p:sp>
+        <p:nvSpPr>
+          <p:cNvPr id="13" name="TextBox 12"/>
+          <p:cNvSpPr txBox="1"/>
+          <p:nvPr/>
+        </p:nvSpPr>
+        <p:spPr>
+          <a:xfrm>
+            <a:off x="1001488" y="754166"/>
+            <a:ext cx="609600" cy="584776"/>
+          </a:xfrm>
+          <a:prstGeom prst="rect">
+            <a:avLst/>
+          </a:prstGeom>
+        </p:spPr>
+        <p:txBody>
+          <a:bodyPr vert="horz" lIns="91440" tIns="45720" rIns="91440" bIns="45720" rtlCol="0" anchor="ctr">
+            <a:noAutofit/>
+          </a:bodyPr>
+          <a:lstStyle>
+            <a:lvl1pPr>
+              <a:spcBef>
+                <a:spcPct val="0"/>
+              </a:spcBef>
+              <a:buNone/>
+              <a:defRPr sz="3200" b="0" cap="all">
+                <a:ln w="3175" cmpd="sng">
+                  <a:noFill/>
+                </a:ln>
+                <a:effectLst>
+                  <a:glow rad="38100">
+                    <a:schemeClr val="bg1">
+                      <a:lumMod val="65000"/>
+                      <a:lumOff val="35000"/>
+                      <a:alpha val="40000"/>
+                    </a:schemeClr>
+                  </a:glow>
+                  <a:outerShdw blurRad="28575" dist="38100" dir="14040000" algn="tl" rotWithShape="0">
+                    <a:srgbClr val="000000">
+                      <a:alpha val="25000"/>
+                    </a:srgbClr>
+                  </a:outerShdw>
+                </a:effectLst>
+              </a:defRPr>
+            </a:lvl1pPr>
+            <a:lvl2pPr>
+              <a:defRPr>
+                <a:solidFill>
+                  <a:schemeClr val="tx2"/>
+                </a:solidFill>
+              </a:defRPr>
+            </a:lvl2pPr>
+            <a:lvl3pPr>
+              <a:defRPr>
+                <a:solidFill>
+                  <a:schemeClr val="tx2"/>
+                </a:solidFill>
+              </a:defRPr>
+            </a:lvl3pPr>
+            <a:lvl4pPr>
+              <a:defRPr>
+                <a:solidFill>
+                  <a:schemeClr val="tx2"/>
+                </a:solidFill>
+              </a:defRPr>
+            </a:lvl4pPr>
+            <a:lvl5pPr>
+              <a:defRPr>
+                <a:solidFill>
+                  <a:schemeClr val="tx2"/>
+                </a:solidFill>
+              </a:defRPr>
+            </a:lvl5pPr>
+            <a:lvl6pPr>
+              <a:defRPr>
+                <a:solidFill>
+                  <a:schemeClr val="tx2"/>
+                </a:solidFill>
+              </a:defRPr>
+            </a:lvl6pPr>
+            <a:lvl7pPr>
+              <a:defRPr>
+                <a:solidFill>
+                  <a:schemeClr val="tx2"/>
+                </a:solidFill>
+              </a:defRPr>
+            </a:lvl7pPr>
+            <a:lvl8pPr>
+              <a:defRPr>
+                <a:solidFill>
+                  <a:schemeClr val="tx2"/>
+                </a:solidFill>
+              </a:defRPr>
+            </a:lvl8pPr>
+            <a:lvl9pPr>
+              <a:defRPr>
+                <a:solidFill>
+                  <a:schemeClr val="tx2"/>
+                </a:solidFill>
+              </a:defRPr>
+            </a:lvl9pPr>
+          </a:lstStyle>
+          <a:p>
+            <a:pPr lvl="0"/>
+            <a:r>
+              <a:rPr lang="en-US" sz="8000" dirty="0">
+                <a:solidFill>
+                  <a:schemeClr val="tx1"/>
+                </a:solidFill>
+                <a:effectLst/>
+              </a:rPr>
+              <a:t>“</a:t>
+            </a:r>
+          </a:p>
+        </p:txBody>
+      </p:sp>
+      <p:sp>
+        <p:nvSpPr>
+          <p:cNvPr id="14" name="TextBox 13"/>
+          <p:cNvSpPr txBox="1"/>
+          <p:nvPr/>
+        </p:nvSpPr>
+        <p:spPr>
+          <a:xfrm>
+            <a:off x="10557558" y="2993578"/>
+            <a:ext cx="609600" cy="584776"/>
+          </a:xfrm>
+          <a:prstGeom prst="rect">
+            <a:avLst/>
+          </a:prstGeom>
+        </p:spPr>
+        <p:txBody>
+          <a:bodyPr vert="horz" lIns="91440" tIns="45720" rIns="91440" bIns="45720" rtlCol="0" anchor="ctr">
+            <a:noAutofit/>
+          </a:bodyPr>
+          <a:lstStyle>
+            <a:lvl1pPr>
+              <a:spcBef>
+                <a:spcPct val="0"/>
+              </a:spcBef>
+              <a:buNone/>
+              <a:defRPr sz="3200" b="0" cap="all">
+                <a:ln w="3175" cmpd="sng">
+                  <a:noFill/>
+                </a:ln>
+                <a:effectLst>
+                  <a:glow rad="38100">
+                    <a:schemeClr val="bg1">
+                      <a:lumMod val="65000"/>
+                      <a:lumOff val="35000"/>
+                      <a:alpha val="40000"/>
+                    </a:schemeClr>
+                  </a:glow>
+                  <a:outerShdw blurRad="28575" dist="38100" dir="14040000" algn="tl" rotWithShape="0">
+                    <a:srgbClr val="000000">
+                      <a:alpha val="25000"/>
+                    </a:srgbClr>
+                  </a:outerShdw>
+                </a:effectLst>
+              </a:defRPr>
+            </a:lvl1pPr>
+            <a:lvl2pPr>
+              <a:defRPr>
+                <a:solidFill>
+                  <a:schemeClr val="tx2"/>
+                </a:solidFill>
+              </a:defRPr>
+            </a:lvl2pPr>
+            <a:lvl3pPr>
+              <a:defRPr>
+                <a:solidFill>
+                  <a:schemeClr val="tx2"/>
+                </a:solidFill>
+              </a:defRPr>
+            </a:lvl3pPr>
+            <a:lvl4pPr>
+              <a:defRPr>
+                <a:solidFill>
+                  <a:schemeClr val="tx2"/>
+                </a:solidFill>
+              </a:defRPr>
+            </a:lvl4pPr>
+            <a:lvl5pPr>
+              <a:defRPr>
+                <a:solidFill>
+                  <a:schemeClr val="tx2"/>
+                </a:solidFill>
+              </a:defRPr>
+            </a:lvl5pPr>
+            <a:lvl6pPr>
+              <a:defRPr>
+                <a:solidFill>
+                  <a:schemeClr val="tx2"/>
+                </a:solidFill>
+              </a:defRPr>
+            </a:lvl6pPr>
+            <a:lvl7pPr>
+              <a:defRPr>
+                <a:solidFill>
+                  <a:schemeClr val="tx2"/>
+                </a:solidFill>
+              </a:defRPr>
+            </a:lvl7pPr>
+            <a:lvl8pPr>
+              <a:defRPr>
+                <a:solidFill>
+                  <a:schemeClr val="tx2"/>
+                </a:solidFill>
+              </a:defRPr>
+            </a:lvl8pPr>
+            <a:lvl9pPr>
+              <a:defRPr>
+                <a:solidFill>
+                  <a:schemeClr val="tx2"/>
+                </a:solidFill>
+              </a:defRPr>
+            </a:lvl9pPr>
+          </a:lstStyle>
+          <a:p>
+            <a:pPr lvl="0" algn="r"/>
+            <a:r>
+              <a:rPr lang="en-US" sz="8000" dirty="0">
+                <a:solidFill>
+                  <a:schemeClr val="tx1"/>
+                </a:solidFill>
+                <a:effectLst/>
+              </a:rPr>
+              <a:t>”</a:t>
+            </a:r>
+          </a:p>
+        </p:txBody>
+      </p:sp>
+    </p:spTree>
+    <p:extLst>
+      <p:ext uri="{BB962C8B-B14F-4D97-AF65-F5344CB8AC3E}">
+        <p14:creationId xmlns:p14="http://schemas.microsoft.com/office/powerpoint/2010/main" val="2740878234"/>
+      </p:ext>
+    </p:extLst>
+  </p:cSld>
+  <p:clrMapOvr>
+    <a:masterClrMapping/>
+  </p:clrMapOvr>
+</p:sldLayout>
+</file>
+
+<file path=ppt/slideLayouts/slideLayout13.xml><?xml version="1.0" encoding="utf-8"?>
+<p:sldLayout xmlns:a="http://schemas.openxmlformats.org/drawingml/2006/main" xmlns:r="http://schemas.openxmlformats.org/officeDocument/2006/relationships" xmlns:p="http://schemas.openxmlformats.org/presentationml/2006/main" preserve="1">
+  <p:cSld name="名札">
+    <p:spTree>
+      <p:nvGrpSpPr>
+        <p:cNvPr id="1" name=""/>
+        <p:cNvGrpSpPr/>
+        <p:nvPr/>
+      </p:nvGrpSpPr>
+      <p:grpSpPr>
+        <a:xfrm>
+          <a:off x="0" y="0"/>
+          <a:ext cx="0" cy="0"/>
+          <a:chOff x="0" y="0"/>
+          <a:chExt cx="0" cy="0"/>
+        </a:xfrm>
+      </p:grpSpPr>
+      <p:pic>
+        <p:nvPicPr>
+          <p:cNvPr id="8" name="Picture 7" descr="Droplets-HD-Content-R1d.png"/>
+          <p:cNvPicPr>
+            <a:picLocks noChangeAspect="1"/>
+          </p:cNvPicPr>
+          <p:nvPr/>
+        </p:nvPicPr>
+        <p:blipFill>
+          <a:blip r:embed="rId2">
+            <a:extLst>
+              <a:ext uri="{28A0092B-C50C-407E-A947-70E740481C1C}">
+                <a14:useLocalDpi xmlns:a14="http://schemas.microsoft.com/office/drawing/2010/main" val="0"/>
+              </a:ext>
+            </a:extLst>
+          </a:blip>
+          <a:stretch>
+            <a:fillRect/>
+          </a:stretch>
+        </p:blipFill>
+        <p:spPr>
+          <a:xfrm>
+            <a:off x="0" y="0"/>
+            <a:ext cx="12192000" cy="6858000"/>
+          </a:xfrm>
+          <a:prstGeom prst="rect">
+            <a:avLst/>
+          </a:prstGeom>
+        </p:spPr>
+      </p:pic>
+      <p:sp>
+        <p:nvSpPr>
+          <p:cNvPr id="2" name="Title 1"/>
+          <p:cNvSpPr>
+            <a:spLocks noGrp="1"/>
+          </p:cNvSpPr>
+          <p:nvPr>
+            <p:ph type="title"/>
+          </p:nvPr>
+        </p:nvSpPr>
+        <p:spPr>
+          <a:xfrm>
+            <a:off x="913775" y="2138721"/>
+            <a:ext cx="10364452" cy="2511835"/>
+          </a:xfrm>
+        </p:spPr>
+        <p:txBody>
+          <a:bodyPr anchor="b"/>
+          <a:lstStyle>
+            <a:lvl1pPr algn="ctr">
+              <a:defRPr sz="3200"/>
+            </a:lvl1pPr>
+          </a:lstStyle>
+          <a:p>
+            <a:r>
+              <a:rPr lang="ja-JP" altLang="en-US"/>
+              <a:t>マスター タイトルの書式設定</a:t>
+            </a:r>
+            <a:endParaRPr lang="en-US" dirty="0"/>
+          </a:p>
+        </p:txBody>
+      </p:sp>
+      <p:sp>
+        <p:nvSpPr>
+          <p:cNvPr id="4" name="Text Placeholder 3"/>
+          <p:cNvSpPr>
+            <a:spLocks noGrp="1"/>
+          </p:cNvSpPr>
+          <p:nvPr>
+            <p:ph type="body" sz="half" idx="2"/>
+          </p:nvPr>
+        </p:nvSpPr>
+        <p:spPr>
+          <a:xfrm>
+            <a:off x="913775" y="4662335"/>
+            <a:ext cx="10364452" cy="1140644"/>
+          </a:xfrm>
+        </p:spPr>
+        <p:txBody>
+          <a:bodyPr anchor="t"/>
+          <a:lstStyle>
+            <a:lvl1pPr marL="0" indent="0" algn="ctr">
+              <a:buNone/>
+              <a:defRPr sz="1600"/>
+            </a:lvl1pPr>
+            <a:lvl2pPr marL="457200" indent="0">
+              <a:buNone/>
+              <a:defRPr sz="1400"/>
+            </a:lvl2pPr>
+            <a:lvl3pPr marL="914400" indent="0">
+              <a:buNone/>
+              <a:defRPr sz="1200"/>
+            </a:lvl3pPr>
+            <a:lvl4pPr marL="1371600" indent="0">
+              <a:buNone/>
+              <a:defRPr sz="1000"/>
+            </a:lvl4pPr>
+            <a:lvl5pPr marL="1828800" indent="0">
+              <a:buNone/>
+              <a:defRPr sz="1000"/>
+            </a:lvl5pPr>
+            <a:lvl6pPr marL="2286000" indent="0">
+              <a:buNone/>
+              <a:defRPr sz="1000"/>
+            </a:lvl6pPr>
+            <a:lvl7pPr marL="2743200" indent="0">
+              <a:buNone/>
+              <a:defRPr sz="1000"/>
+            </a:lvl7pPr>
+            <a:lvl8pPr marL="3200400" indent="0">
+              <a:buNone/>
+              <a:defRPr sz="1000"/>
+            </a:lvl8pPr>
+            <a:lvl9pPr marL="3657600" indent="0">
+              <a:buNone/>
+              <a:defRPr sz="1000"/>
+            </a:lvl9pPr>
+          </a:lstStyle>
+          <a:p>
+            <a:pPr lvl="0"/>
+            <a:r>
+              <a:rPr lang="ja-JP" altLang="en-US"/>
+              <a:t>マスター テキストの書式設定</a:t>
+            </a:r>
+          </a:p>
+        </p:txBody>
+      </p:sp>
+      <p:sp>
+        <p:nvSpPr>
+          <p:cNvPr id="5" name="Date Placeholder 4"/>
+          <p:cNvSpPr>
+            <a:spLocks noGrp="1"/>
+          </p:cNvSpPr>
+          <p:nvPr>
+            <p:ph type="dt" sz="half" idx="10"/>
+          </p:nvPr>
+        </p:nvSpPr>
+        <p:spPr/>
+        <p:txBody>
+          <a:bodyPr/>
+          <a:lstStyle/>
+          <a:p>
+            <a:fld id="{5F305778-E222-4C85-8E95-A8CE1D926E62}" type="datetimeFigureOut">
+              <a:rPr kumimoji="1" lang="ja-JP" altLang="en-US" smtClean="0"/>
+              <a:t>2025/10/31</a:t>
+            </a:fld>
+            <a:endParaRPr kumimoji="1" lang="ja-JP" altLang="en-US"/>
+          </a:p>
+        </p:txBody>
+      </p:sp>
+      <p:sp>
+        <p:nvSpPr>
+          <p:cNvPr id="6" name="Footer Placeholder 5"/>
+          <p:cNvSpPr>
+            <a:spLocks noGrp="1"/>
+          </p:cNvSpPr>
+          <p:nvPr>
+            <p:ph type="ftr" sz="quarter" idx="11"/>
+          </p:nvPr>
+        </p:nvSpPr>
+        <p:spPr/>
+        <p:txBody>
+          <a:bodyPr/>
+          <a:lstStyle/>
+          <a:p>
+            <a:endParaRPr kumimoji="1" lang="ja-JP" altLang="en-US"/>
+          </a:p>
+        </p:txBody>
+      </p:sp>
+      <p:sp>
+        <p:nvSpPr>
+          <p:cNvPr id="7" name="Slide Number Placeholder 6"/>
+          <p:cNvSpPr>
+            <a:spLocks noGrp="1"/>
+          </p:cNvSpPr>
+          <p:nvPr>
+            <p:ph type="sldNum" sz="quarter" idx="12"/>
+          </p:nvPr>
+        </p:nvSpPr>
+        <p:spPr/>
+        <p:txBody>
+          <a:bodyPr/>
+          <a:lstStyle/>
+          <a:p>
+            <a:fld id="{48CB8B3E-63A1-441E-8AC1-5627B169235D}" type="slidenum">
+              <a:rPr kumimoji="1" lang="ja-JP" altLang="en-US" smtClean="0"/>
+              <a:t>‹#›</a:t>
+            </a:fld>
+            <a:endParaRPr kumimoji="1" lang="ja-JP" altLang="en-US"/>
+          </a:p>
+        </p:txBody>
+      </p:sp>
+    </p:spTree>
+    <p:extLst>
+      <p:ext uri="{BB962C8B-B14F-4D97-AF65-F5344CB8AC3E}">
+        <p14:creationId xmlns:p14="http://schemas.microsoft.com/office/powerpoint/2010/main" val="4244438640"/>
+      </p:ext>
+    </p:extLst>
+  </p:cSld>
+  <p:clrMapOvr>
+    <a:masterClrMapping/>
+  </p:clrMapOvr>
+</p:sldLayout>
+</file>
+
+<file path=ppt/slideLayouts/slideLayout14.xml><?xml version="1.0" encoding="utf-8"?>
+<p:sldLayout xmlns:a="http://schemas.openxmlformats.org/drawingml/2006/main" xmlns:r="http://schemas.openxmlformats.org/officeDocument/2006/relationships" xmlns:p="http://schemas.openxmlformats.org/presentationml/2006/main" preserve="1">
+  <p:cSld name="3 段">
+    <p:spTree>
+      <p:nvGrpSpPr>
+        <p:cNvPr id="1" name=""/>
+        <p:cNvGrpSpPr/>
+        <p:nvPr/>
+      </p:nvGrpSpPr>
+      <p:grpSpPr>
+        <a:xfrm>
+          <a:off x="0" y="0"/>
+          <a:ext cx="0" cy="0"/>
+          <a:chOff x="0" y="0"/>
+          <a:chExt cx="0" cy="0"/>
+        </a:xfrm>
+      </p:grpSpPr>
+      <p:pic>
+        <p:nvPicPr>
+          <p:cNvPr id="13" name="Picture 12" descr="Droplets-HD-Content-R1d.png"/>
+          <p:cNvPicPr>
+            <a:picLocks noChangeAspect="1"/>
+          </p:cNvPicPr>
+          <p:nvPr/>
+        </p:nvPicPr>
+        <p:blipFill>
+          <a:blip r:embed="rId2">
+            <a:extLst>
+              <a:ext uri="{28A0092B-C50C-407E-A947-70E740481C1C}">
+                <a14:useLocalDpi xmlns:a14="http://schemas.microsoft.com/office/drawing/2010/main" val="0"/>
+              </a:ext>
+            </a:extLst>
+          </a:blip>
+          <a:stretch>
+            <a:fillRect/>
+          </a:stretch>
+        </p:blipFill>
+        <p:spPr>
+          <a:xfrm>
+            <a:off x="0" y="0"/>
+            <a:ext cx="12192000" cy="6858000"/>
+          </a:xfrm>
+          <a:prstGeom prst="rect">
+            <a:avLst/>
+          </a:prstGeom>
+        </p:spPr>
+      </p:pic>
+      <p:sp>
+        <p:nvSpPr>
+          <p:cNvPr id="15" name="Title 1"/>
+          <p:cNvSpPr>
+            <a:spLocks noGrp="1"/>
+          </p:cNvSpPr>
+          <p:nvPr>
+            <p:ph type="title"/>
+          </p:nvPr>
+        </p:nvSpPr>
+        <p:spPr>
+          <a:xfrm>
+            <a:off x="913774" y="609600"/>
+            <a:ext cx="10364452" cy="1605094"/>
+          </a:xfrm>
+        </p:spPr>
+        <p:txBody>
+          <a:bodyPr/>
+          <a:lstStyle/>
+          <a:p>
+            <a:r>
+              <a:rPr lang="ja-JP" altLang="en-US"/>
+              <a:t>マスター タイトルの書式設定</a:t>
+            </a:r>
+            <a:endParaRPr lang="en-US" dirty="0"/>
+          </a:p>
+        </p:txBody>
+      </p:sp>
+      <p:sp>
+        <p:nvSpPr>
+          <p:cNvPr id="7" name="Text Placeholder 2"/>
+          <p:cNvSpPr>
+            <a:spLocks noGrp="1"/>
+          </p:cNvSpPr>
+          <p:nvPr>
+            <p:ph type="body" idx="1"/>
+          </p:nvPr>
+        </p:nvSpPr>
+        <p:spPr>
+          <a:xfrm>
+            <a:off x="913774" y="2367093"/>
+            <a:ext cx="3298976" cy="576262"/>
+          </a:xfrm>
+        </p:spPr>
+        <p:txBody>
+          <a:bodyPr anchor="b">
+            <a:noAutofit/>
+          </a:bodyPr>
+          <a:lstStyle>
+            <a:lvl1pPr marL="0" indent="0" algn="ctr">
+              <a:lnSpc>
+                <a:spcPct val="85000"/>
+              </a:lnSpc>
+              <a:buNone/>
+              <a:defRPr sz="2400" b="0">
+                <a:solidFill>
+                  <a:schemeClr val="tx1"/>
+                </a:solidFill>
+              </a:defRPr>
+            </a:lvl1pPr>
+            <a:lvl2pPr marL="457200" indent="0">
+              <a:buNone/>
+              <a:defRPr sz="2000" b="1"/>
+            </a:lvl2pPr>
+            <a:lvl3pPr marL="914400" indent="0">
+              <a:buNone/>
+              <a:defRPr sz="1800" b="1"/>
+            </a:lvl3pPr>
+            <a:lvl4pPr marL="1371600" indent="0">
+              <a:buNone/>
+              <a:defRPr sz="1600" b="1"/>
+            </a:lvl4pPr>
+            <a:lvl5pPr marL="1828800" indent="0">
+              <a:buNone/>
+              <a:defRPr sz="1600" b="1"/>
+            </a:lvl5pPr>
+            <a:lvl6pPr marL="2286000" indent="0">
+              <a:buNone/>
+              <a:defRPr sz="1600" b="1"/>
+            </a:lvl6pPr>
+            <a:lvl7pPr marL="2743200" indent="0">
+              <a:buNone/>
+              <a:defRPr sz="1600" b="1"/>
+            </a:lvl7pPr>
+            <a:lvl8pPr marL="3200400" indent="0">
+              <a:buNone/>
+              <a:defRPr sz="1600" b="1"/>
+            </a:lvl8pPr>
+            <a:lvl9pPr marL="3657600" indent="0">
+              <a:buNone/>
+              <a:defRPr sz="1600" b="1"/>
+            </a:lvl9pPr>
+          </a:lstStyle>
+          <a:p>
+            <a:pPr lvl="0"/>
+            <a:r>
+              <a:rPr lang="ja-JP" altLang="en-US"/>
+              <a:t>マスター テキストの書式設定</a:t>
+            </a:r>
+          </a:p>
+        </p:txBody>
+      </p:sp>
+      <p:sp>
+        <p:nvSpPr>
+          <p:cNvPr id="8" name="Text Placeholder 3"/>
+          <p:cNvSpPr>
+            <a:spLocks noGrp="1"/>
+          </p:cNvSpPr>
+          <p:nvPr>
+            <p:ph type="body" sz="half" idx="15"/>
+          </p:nvPr>
+        </p:nvSpPr>
+        <p:spPr>
+          <a:xfrm>
+            <a:off x="913774" y="2943355"/>
+            <a:ext cx="3298976" cy="2847845"/>
+          </a:xfrm>
+        </p:spPr>
+        <p:txBody>
+          <a:bodyPr anchor="t">
+            <a:normAutofit/>
+          </a:bodyPr>
+          <a:lstStyle>
+            <a:lvl1pPr marL="0" indent="0" algn="ctr">
+              <a:buNone/>
+              <a:defRPr sz="1400"/>
+            </a:lvl1pPr>
+            <a:lvl2pPr marL="457200" indent="0">
+              <a:buNone/>
+              <a:defRPr sz="1200"/>
+            </a:lvl2pPr>
+            <a:lvl3pPr marL="914400" indent="0">
+              <a:buNone/>
+              <a:defRPr sz="1000"/>
+            </a:lvl3pPr>
+            <a:lvl4pPr marL="1371600" indent="0">
+              <a:buNone/>
+              <a:defRPr sz="900"/>
+            </a:lvl4pPr>
+            <a:lvl5pPr marL="1828800" indent="0">
+              <a:buNone/>
+              <a:defRPr sz="900"/>
+            </a:lvl5pPr>
+            <a:lvl6pPr marL="2286000" indent="0">
+              <a:buNone/>
+              <a:defRPr sz="900"/>
+            </a:lvl6pPr>
+            <a:lvl7pPr marL="2743200" indent="0">
+              <a:buNone/>
+              <a:defRPr sz="900"/>
+            </a:lvl7pPr>
+            <a:lvl8pPr marL="3200400" indent="0">
+              <a:buNone/>
+              <a:defRPr sz="900"/>
+            </a:lvl8pPr>
+            <a:lvl9pPr marL="3657600" indent="0">
+              <a:buNone/>
+              <a:defRPr sz="900"/>
+            </a:lvl9pPr>
+          </a:lstStyle>
+          <a:p>
+            <a:pPr lvl="0"/>
+            <a:r>
+              <a:rPr lang="ja-JP" altLang="en-US"/>
+              <a:t>マスター テキストの書式設定</a:t>
+            </a:r>
+          </a:p>
+        </p:txBody>
+      </p:sp>
+      <p:sp>
+        <p:nvSpPr>
+          <p:cNvPr id="9" name="Text Placeholder 4"/>
+          <p:cNvSpPr>
+            <a:spLocks noGrp="1"/>
+          </p:cNvSpPr>
+          <p:nvPr>
+            <p:ph type="body" sz="quarter" idx="3"/>
+          </p:nvPr>
+        </p:nvSpPr>
+        <p:spPr>
+          <a:xfrm>
+            <a:off x="4452389" y="2367093"/>
+            <a:ext cx="3291521" cy="576262"/>
+          </a:xfrm>
+        </p:spPr>
+        <p:txBody>
+          <a:bodyPr anchor="b">
+            <a:noAutofit/>
+          </a:bodyPr>
+          <a:lstStyle>
+            <a:lvl1pPr marL="0" indent="0" algn="ctr">
+              <a:lnSpc>
+                <a:spcPct val="85000"/>
+              </a:lnSpc>
+              <a:buNone/>
+              <a:defRPr sz="2400" b="0">
+                <a:solidFill>
+                  <a:schemeClr val="tx1"/>
+                </a:solidFill>
+              </a:defRPr>
+            </a:lvl1pPr>
+            <a:lvl2pPr marL="457200" indent="0">
+              <a:buNone/>
+              <a:defRPr sz="2000" b="1"/>
+            </a:lvl2pPr>
+            <a:lvl3pPr marL="914400" indent="0">
+              <a:buNone/>
+              <a:defRPr sz="1800" b="1"/>
+            </a:lvl3pPr>
+            <a:lvl4pPr marL="1371600" indent="0">
+              <a:buNone/>
+              <a:defRPr sz="1600" b="1"/>
+            </a:lvl4pPr>
+            <a:lvl5pPr marL="1828800" indent="0">
+              <a:buNone/>
+              <a:defRPr sz="1600" b="1"/>
+            </a:lvl5pPr>
+            <a:lvl6pPr marL="2286000" indent="0">
+              <a:buNone/>
+              <a:defRPr sz="1600" b="1"/>
+            </a:lvl6pPr>
+            <a:lvl7pPr marL="2743200" indent="0">
+              <a:buNone/>
+              <a:defRPr sz="1600" b="1"/>
+            </a:lvl7pPr>
+            <a:lvl8pPr marL="3200400" indent="0">
+              <a:buNone/>
+              <a:defRPr sz="1600" b="1"/>
+            </a:lvl8pPr>
+            <a:lvl9pPr marL="3657600" indent="0">
+              <a:buNone/>
+              <a:defRPr sz="1600" b="1"/>
+            </a:lvl9pPr>
+          </a:lstStyle>
+          <a:p>
+            <a:pPr lvl="0"/>
+            <a:r>
+              <a:rPr lang="ja-JP" altLang="en-US"/>
+              <a:t>マスター テキストの書式設定</a:t>
+            </a:r>
+          </a:p>
+        </p:txBody>
+      </p:sp>
+      <p:sp>
+        <p:nvSpPr>
+          <p:cNvPr id="10" name="Text Placeholder 3"/>
+          <p:cNvSpPr>
+            <a:spLocks noGrp="1"/>
+          </p:cNvSpPr>
+          <p:nvPr>
+            <p:ph type="body" sz="half" idx="16"/>
+          </p:nvPr>
+        </p:nvSpPr>
+        <p:spPr>
+          <a:xfrm>
+            <a:off x="4441348" y="2943355"/>
+            <a:ext cx="3303351" cy="2847845"/>
+          </a:xfrm>
+        </p:spPr>
+        <p:txBody>
+          <a:bodyPr anchor="t">
+            <a:normAutofit/>
+          </a:bodyPr>
+          <a:lstStyle>
+            <a:lvl1pPr marL="0" indent="0" algn="ctr">
+              <a:buNone/>
+              <a:defRPr sz="1400"/>
+            </a:lvl1pPr>
+            <a:lvl2pPr marL="457200" indent="0">
+              <a:buNone/>
+              <a:defRPr sz="1200"/>
+            </a:lvl2pPr>
+            <a:lvl3pPr marL="914400" indent="0">
+              <a:buNone/>
+              <a:defRPr sz="1000"/>
+            </a:lvl3pPr>
+            <a:lvl4pPr marL="1371600" indent="0">
+              <a:buNone/>
+              <a:defRPr sz="900"/>
+            </a:lvl4pPr>
+            <a:lvl5pPr marL="1828800" indent="0">
+              <a:buNone/>
+              <a:defRPr sz="900"/>
+            </a:lvl5pPr>
+            <a:lvl6pPr marL="2286000" indent="0">
+              <a:buNone/>
+              <a:defRPr sz="900"/>
+            </a:lvl6pPr>
+            <a:lvl7pPr marL="2743200" indent="0">
+              <a:buNone/>
+              <a:defRPr sz="900"/>
+            </a:lvl7pPr>
+            <a:lvl8pPr marL="3200400" indent="0">
+              <a:buNone/>
+              <a:defRPr sz="900"/>
+            </a:lvl8pPr>
+            <a:lvl9pPr marL="3657600" indent="0">
+              <a:buNone/>
+              <a:defRPr sz="900"/>
+            </a:lvl9pPr>
+          </a:lstStyle>
+          <a:p>
+            <a:pPr lvl="0"/>
+            <a:r>
+              <a:rPr lang="ja-JP" altLang="en-US"/>
+              <a:t>マスター テキストの書式設定</a:t>
+            </a:r>
+          </a:p>
+        </p:txBody>
+      </p:sp>
+      <p:sp>
+        <p:nvSpPr>
+          <p:cNvPr id="11" name="Text Placeholder 4"/>
+          <p:cNvSpPr>
+            <a:spLocks noGrp="1"/>
+          </p:cNvSpPr>
+          <p:nvPr>
+            <p:ph type="body" sz="quarter" idx="13"/>
+          </p:nvPr>
+        </p:nvSpPr>
+        <p:spPr>
+          <a:xfrm>
+            <a:off x="7973298" y="2367093"/>
+            <a:ext cx="3304928" cy="576262"/>
+          </a:xfrm>
+        </p:spPr>
+        <p:txBody>
+          <a:bodyPr anchor="b">
+            <a:noAutofit/>
+          </a:bodyPr>
+          <a:lstStyle>
+            <a:lvl1pPr marL="0" indent="0" algn="ctr">
+              <a:lnSpc>
+                <a:spcPct val="85000"/>
+              </a:lnSpc>
+              <a:buNone/>
+              <a:defRPr sz="2400" b="0">
+                <a:solidFill>
+                  <a:schemeClr val="tx1"/>
+                </a:solidFill>
+              </a:defRPr>
+            </a:lvl1pPr>
+            <a:lvl2pPr marL="457200" indent="0">
+              <a:buNone/>
+              <a:defRPr sz="2000" b="1"/>
+            </a:lvl2pPr>
+            <a:lvl3pPr marL="914400" indent="0">
+              <a:buNone/>
+              <a:defRPr sz="1800" b="1"/>
+            </a:lvl3pPr>
+            <a:lvl4pPr marL="1371600" indent="0">
+              <a:buNone/>
+              <a:defRPr sz="1600" b="1"/>
+            </a:lvl4pPr>
+            <a:lvl5pPr marL="1828800" indent="0">
+              <a:buNone/>
+              <a:defRPr sz="1600" b="1"/>
+            </a:lvl5pPr>
+            <a:lvl6pPr marL="2286000" indent="0">
+              <a:buNone/>
+              <a:defRPr sz="1600" b="1"/>
+            </a:lvl6pPr>
+            <a:lvl7pPr marL="2743200" indent="0">
+              <a:buNone/>
+              <a:defRPr sz="1600" b="1"/>
+            </a:lvl7pPr>
+            <a:lvl8pPr marL="3200400" indent="0">
+              <a:buNone/>
+              <a:defRPr sz="1600" b="1"/>
+            </a:lvl8pPr>
+            <a:lvl9pPr marL="3657600" indent="0">
+              <a:buNone/>
+              <a:defRPr sz="1600" b="1"/>
+            </a:lvl9pPr>
+          </a:lstStyle>
+          <a:p>
+            <a:pPr lvl="0"/>
+            <a:r>
+              <a:rPr lang="ja-JP" altLang="en-US"/>
+              <a:t>マスター テキストの書式設定</a:t>
+            </a:r>
+          </a:p>
+        </p:txBody>
+      </p:sp>
+      <p:sp>
+        <p:nvSpPr>
+          <p:cNvPr id="12" name="Text Placeholder 3"/>
+          <p:cNvSpPr>
+            <a:spLocks noGrp="1"/>
+          </p:cNvSpPr>
+          <p:nvPr>
+            <p:ph type="body" sz="half" idx="17"/>
+          </p:nvPr>
+        </p:nvSpPr>
+        <p:spPr>
+          <a:xfrm>
+            <a:off x="7973298" y="2943355"/>
+            <a:ext cx="3304928" cy="2847845"/>
+          </a:xfrm>
+        </p:spPr>
+        <p:txBody>
+          <a:bodyPr anchor="t">
+            <a:normAutofit/>
+          </a:bodyPr>
+          <a:lstStyle>
+            <a:lvl1pPr marL="0" indent="0" algn="ctr">
+              <a:buNone/>
+              <a:defRPr sz="1400"/>
+            </a:lvl1pPr>
+            <a:lvl2pPr marL="457200" indent="0">
+              <a:buNone/>
+              <a:defRPr sz="1200"/>
+            </a:lvl2pPr>
+            <a:lvl3pPr marL="914400" indent="0">
+              <a:buNone/>
+              <a:defRPr sz="1000"/>
+            </a:lvl3pPr>
+            <a:lvl4pPr marL="1371600" indent="0">
+              <a:buNone/>
+              <a:defRPr sz="900"/>
+            </a:lvl4pPr>
+            <a:lvl5pPr marL="1828800" indent="0">
+              <a:buNone/>
+              <a:defRPr sz="900"/>
+            </a:lvl5pPr>
+            <a:lvl6pPr marL="2286000" indent="0">
+              <a:buNone/>
+              <a:defRPr sz="900"/>
+            </a:lvl6pPr>
+            <a:lvl7pPr marL="2743200" indent="0">
+              <a:buNone/>
+              <a:defRPr sz="900"/>
+            </a:lvl7pPr>
+            <a:lvl8pPr marL="3200400" indent="0">
+              <a:buNone/>
+              <a:defRPr sz="900"/>
+            </a:lvl8pPr>
+            <a:lvl9pPr marL="3657600" indent="0">
+              <a:buNone/>
+              <a:defRPr sz="900"/>
+            </a:lvl9pPr>
+          </a:lstStyle>
+          <a:p>
+            <a:pPr lvl="0"/>
+            <a:r>
+              <a:rPr lang="ja-JP" altLang="en-US"/>
+              <a:t>マスター テキストの書式設定</a:t>
+            </a:r>
+          </a:p>
+        </p:txBody>
+      </p:sp>
+      <p:sp>
+        <p:nvSpPr>
+          <p:cNvPr id="3" name="Date Placeholder 2"/>
+          <p:cNvSpPr>
+            <a:spLocks noGrp="1"/>
+          </p:cNvSpPr>
+          <p:nvPr>
+            <p:ph type="dt" sz="half" idx="10"/>
+          </p:nvPr>
+        </p:nvSpPr>
+        <p:spPr/>
+        <p:txBody>
+          <a:bodyPr/>
+          <a:lstStyle/>
+          <a:p>
+            <a:fld id="{5F305778-E222-4C85-8E95-A8CE1D926E62}" type="datetimeFigureOut">
+              <a:rPr kumimoji="1" lang="ja-JP" altLang="en-US" smtClean="0"/>
+              <a:t>2025/10/31</a:t>
+            </a:fld>
+            <a:endParaRPr kumimoji="1" lang="ja-JP" altLang="en-US"/>
+          </a:p>
+        </p:txBody>
+      </p:sp>
+      <p:sp>
+        <p:nvSpPr>
+          <p:cNvPr id="4" name="Footer Placeholder 3"/>
+          <p:cNvSpPr>
+            <a:spLocks noGrp="1"/>
+          </p:cNvSpPr>
+          <p:nvPr>
+            <p:ph type="ftr" sz="quarter" idx="11"/>
+          </p:nvPr>
+        </p:nvSpPr>
+        <p:spPr/>
+        <p:txBody>
+          <a:bodyPr/>
+          <a:lstStyle/>
+          <a:p>
+            <a:endParaRPr kumimoji="1" lang="ja-JP" altLang="en-US"/>
+          </a:p>
+        </p:txBody>
+      </p:sp>
+      <p:sp>
+        <p:nvSpPr>
+          <p:cNvPr id="5" name="Slide Number Placeholder 4"/>
+          <p:cNvSpPr>
+            <a:spLocks noGrp="1"/>
+          </p:cNvSpPr>
+          <p:nvPr>
+            <p:ph type="sldNum" sz="quarter" idx="12"/>
+          </p:nvPr>
+        </p:nvSpPr>
+        <p:spPr/>
+        <p:txBody>
+          <a:bodyPr/>
+          <a:lstStyle/>
+          <a:p>
+            <a:fld id="{48CB8B3E-63A1-441E-8AC1-5627B169235D}" type="slidenum">
+              <a:rPr kumimoji="1" lang="ja-JP" altLang="en-US" smtClean="0"/>
+              <a:t>‹#›</a:t>
+            </a:fld>
+            <a:endParaRPr kumimoji="1" lang="ja-JP" altLang="en-US"/>
+          </a:p>
+        </p:txBody>
+      </p:sp>
+    </p:spTree>
+    <p:extLst>
+      <p:ext uri="{BB962C8B-B14F-4D97-AF65-F5344CB8AC3E}">
+        <p14:creationId xmlns:p14="http://schemas.microsoft.com/office/powerpoint/2010/main" val="22214759"/>
+      </p:ext>
+    </p:extLst>
+  </p:cSld>
+  <p:clrMapOvr>
+    <a:masterClrMapping/>
+  </p:clrMapOvr>
+</p:sldLayout>
+</file>
+
+<file path=ppt/slideLayouts/slideLayout15.xml><?xml version="1.0" encoding="utf-8"?>
+<p:sldLayout xmlns:a="http://schemas.openxmlformats.org/drawingml/2006/main" xmlns:r="http://schemas.openxmlformats.org/officeDocument/2006/relationships" xmlns:p="http://schemas.openxmlformats.org/presentationml/2006/main" preserve="1">
+  <p:cSld name="3 つの画像列">
+    <p:spTree>
+      <p:nvGrpSpPr>
+        <p:cNvPr id="1" name=""/>
+        <p:cNvGrpSpPr/>
+        <p:nvPr/>
+      </p:nvGrpSpPr>
+      <p:grpSpPr>
+        <a:xfrm>
+          <a:off x="0" y="0"/>
+          <a:ext cx="0" cy="0"/>
+          <a:chOff x="0" y="0"/>
+          <a:chExt cx="0" cy="0"/>
+        </a:xfrm>
+      </p:grpSpPr>
+      <p:pic>
+        <p:nvPicPr>
+          <p:cNvPr id="16" name="Picture 15" descr="Droplets-HD-Content-R1d.png"/>
+          <p:cNvPicPr>
+            <a:picLocks noChangeAspect="1"/>
+          </p:cNvPicPr>
+          <p:nvPr/>
+        </p:nvPicPr>
+        <p:blipFill>
+          <a:blip r:embed="rId2">
+            <a:extLst>
+              <a:ext uri="{28A0092B-C50C-407E-A947-70E740481C1C}">
+                <a14:useLocalDpi xmlns:a14="http://schemas.microsoft.com/office/drawing/2010/main" val="0"/>
+              </a:ext>
+            </a:extLst>
+          </a:blip>
+          <a:stretch>
+            <a:fillRect/>
+          </a:stretch>
+        </p:blipFill>
+        <p:spPr>
+          <a:xfrm>
+            <a:off x="0" y="0"/>
+            <a:ext cx="12192000" cy="6858000"/>
+          </a:xfrm>
+          <a:prstGeom prst="rect">
+            <a:avLst/>
+          </a:prstGeom>
+        </p:spPr>
+      </p:pic>
+      <p:sp>
+        <p:nvSpPr>
+          <p:cNvPr id="30" name="Title 1"/>
+          <p:cNvSpPr>
+            <a:spLocks noGrp="1"/>
+          </p:cNvSpPr>
+          <p:nvPr>
+            <p:ph type="title"/>
+          </p:nvPr>
+        </p:nvSpPr>
+        <p:spPr>
+          <a:xfrm>
+            <a:off x="913774" y="610772"/>
+            <a:ext cx="10364452" cy="1603922"/>
+          </a:xfrm>
+        </p:spPr>
+        <p:txBody>
+          <a:bodyPr/>
+          <a:lstStyle/>
+          <a:p>
+            <a:r>
+              <a:rPr lang="ja-JP" altLang="en-US"/>
+              <a:t>マスター タイトルの書式設定</a:t>
+            </a:r>
+            <a:endParaRPr lang="en-US" dirty="0"/>
+          </a:p>
+        </p:txBody>
+      </p:sp>
+      <p:sp>
+        <p:nvSpPr>
+          <p:cNvPr id="19" name="Text Placeholder 2"/>
+          <p:cNvSpPr>
+            <a:spLocks noGrp="1"/>
+          </p:cNvSpPr>
+          <p:nvPr>
+            <p:ph type="body" idx="1"/>
+          </p:nvPr>
+        </p:nvSpPr>
+        <p:spPr>
+          <a:xfrm>
+            <a:off x="913774" y="4204820"/>
+            <a:ext cx="3296409" cy="576262"/>
+          </a:xfrm>
+        </p:spPr>
+        <p:txBody>
+          <a:bodyPr anchor="b">
+            <a:noAutofit/>
+          </a:bodyPr>
+          <a:lstStyle>
+            <a:lvl1pPr marL="0" indent="0" algn="ctr">
+              <a:lnSpc>
+                <a:spcPct val="85000"/>
+              </a:lnSpc>
+              <a:buNone/>
+              <a:defRPr sz="2200" b="0">
+                <a:solidFill>
+                  <a:schemeClr val="tx1"/>
+                </a:solidFill>
+              </a:defRPr>
+            </a:lvl1pPr>
+            <a:lvl2pPr marL="457200" indent="0">
+              <a:buNone/>
+              <a:defRPr sz="2000" b="1"/>
+            </a:lvl2pPr>
+            <a:lvl3pPr marL="914400" indent="0">
+              <a:buNone/>
+              <a:defRPr sz="1800" b="1"/>
+            </a:lvl3pPr>
+            <a:lvl4pPr marL="1371600" indent="0">
+              <a:buNone/>
+              <a:defRPr sz="1600" b="1"/>
+            </a:lvl4pPr>
+            <a:lvl5pPr marL="1828800" indent="0">
+              <a:buNone/>
+              <a:defRPr sz="1600" b="1"/>
+            </a:lvl5pPr>
+            <a:lvl6pPr marL="2286000" indent="0">
+              <a:buNone/>
+              <a:defRPr sz="1600" b="1"/>
+            </a:lvl6pPr>
+            <a:lvl7pPr marL="2743200" indent="0">
+              <a:buNone/>
+              <a:defRPr sz="1600" b="1"/>
+            </a:lvl7pPr>
+            <a:lvl8pPr marL="3200400" indent="0">
+              <a:buNone/>
+              <a:defRPr sz="1600" b="1"/>
+            </a:lvl8pPr>
+            <a:lvl9pPr marL="3657600" indent="0">
+              <a:buNone/>
+              <a:defRPr sz="1600" b="1"/>
+            </a:lvl9pPr>
+          </a:lstStyle>
+          <a:p>
+            <a:pPr lvl="0"/>
+            <a:r>
+              <a:rPr lang="ja-JP" altLang="en-US"/>
+              <a:t>マスター テキストの書式設定</a:t>
+            </a:r>
+          </a:p>
+        </p:txBody>
+      </p:sp>
+      <p:sp>
+        <p:nvSpPr>
+          <p:cNvPr id="20" name="Picture Placeholder 2"/>
+          <p:cNvSpPr>
+            <a:spLocks noGrp="1" noChangeAspect="1"/>
+          </p:cNvSpPr>
+          <p:nvPr>
+            <p:ph type="pic" idx="15"/>
+          </p:nvPr>
+        </p:nvSpPr>
+        <p:spPr>
+          <a:xfrm>
+            <a:off x="913774" y="2367093"/>
+            <a:ext cx="3296409" cy="1524000"/>
+          </a:xfrm>
+          <a:prstGeom prst="roundRect">
+            <a:avLst>
+              <a:gd name="adj" fmla="val 9363"/>
+            </a:avLst>
+          </a:prstGeom>
+          <a:noFill/>
+          <a:ln w="82550" cap="sq">
+            <a:solidFill>
+              <a:srgbClr val="EAEAEA"/>
+            </a:solidFill>
+            <a:miter lim="800000"/>
+          </a:ln>
+          <a:effectLst/>
+          <a:scene3d>
+            <a:camera prst="orthographicFront"/>
+            <a:lightRig rig="threePt" dir="t">
+              <a:rot lat="0" lon="0" rev="2700000"/>
+            </a:lightRig>
+          </a:scene3d>
+          <a:sp3d contourW="6350">
+            <a:bevelT h="38100"/>
+            <a:contourClr>
+              <a:srgbClr val="C0C0C0"/>
+            </a:contourClr>
+          </a:sp3d>
+        </p:spPr>
+        <p:txBody>
+          <a:bodyPr anchor="t">
+            <a:normAutofit/>
+          </a:bodyPr>
+          <a:lstStyle>
+            <a:lvl1pPr marL="0" indent="0" algn="ctr">
+              <a:buNone/>
+              <a:defRPr sz="1600"/>
+            </a:lvl1pPr>
+            <a:lvl2pPr marL="457200" indent="0">
+              <a:buNone/>
+              <a:defRPr sz="1600"/>
+            </a:lvl2pPr>
+            <a:lvl3pPr marL="914400" indent="0">
+              <a:buNone/>
+              <a:defRPr sz="1600"/>
+            </a:lvl3pPr>
+            <a:lvl4pPr marL="1371600" indent="0">
+              <a:buNone/>
+              <a:defRPr sz="1600"/>
+            </a:lvl4pPr>
+            <a:lvl5pPr marL="1828800" indent="0">
+              <a:buNone/>
+              <a:defRPr sz="1600"/>
+            </a:lvl5pPr>
+            <a:lvl6pPr marL="2286000" indent="0">
+              <a:buNone/>
+              <a:defRPr sz="1600"/>
+            </a:lvl6pPr>
+            <a:lvl7pPr marL="2743200" indent="0">
+              <a:buNone/>
+              <a:defRPr sz="1600"/>
+            </a:lvl7pPr>
+            <a:lvl8pPr marL="3200400" indent="0">
+              <a:buNone/>
+              <a:defRPr sz="1600"/>
+            </a:lvl8pPr>
+            <a:lvl9pPr marL="3657600" indent="0">
+              <a:buNone/>
+              <a:defRPr sz="1600"/>
+            </a:lvl9pPr>
+          </a:lstStyle>
+          <a:p>
+            <a:r>
+              <a:rPr lang="ja-JP" altLang="en-US"/>
+              <a:t>アイコンをクリックして図を追加</a:t>
+            </a:r>
+            <a:endParaRPr lang="en-US" dirty="0"/>
+          </a:p>
+        </p:txBody>
+      </p:sp>
+      <p:sp>
+        <p:nvSpPr>
+          <p:cNvPr id="21" name="Text Placeholder 3"/>
+          <p:cNvSpPr>
+            <a:spLocks noGrp="1"/>
+          </p:cNvSpPr>
+          <p:nvPr>
+            <p:ph type="body" sz="half" idx="18"/>
+          </p:nvPr>
+        </p:nvSpPr>
+        <p:spPr>
+          <a:xfrm>
+            <a:off x="913774" y="4781082"/>
+            <a:ext cx="3296409" cy="1010118"/>
+          </a:xfrm>
+        </p:spPr>
+        <p:txBody>
+          <a:bodyPr anchor="t">
+            <a:normAutofit/>
+          </a:bodyPr>
+          <a:lstStyle>
+            <a:lvl1pPr marL="0" indent="0" algn="ctr">
+              <a:buNone/>
+              <a:defRPr sz="1400"/>
+            </a:lvl1pPr>
+            <a:lvl2pPr marL="457200" indent="0">
+              <a:buNone/>
+              <a:defRPr sz="1200"/>
+            </a:lvl2pPr>
+            <a:lvl3pPr marL="914400" indent="0">
+              <a:buNone/>
+              <a:defRPr sz="1000"/>
+            </a:lvl3pPr>
+            <a:lvl4pPr marL="1371600" indent="0">
+              <a:buNone/>
+              <a:defRPr sz="900"/>
+            </a:lvl4pPr>
+            <a:lvl5pPr marL="1828800" indent="0">
+              <a:buNone/>
+              <a:defRPr sz="900"/>
+            </a:lvl5pPr>
+            <a:lvl6pPr marL="2286000" indent="0">
+              <a:buNone/>
+              <a:defRPr sz="900"/>
+            </a:lvl6pPr>
+            <a:lvl7pPr marL="2743200" indent="0">
+              <a:buNone/>
+              <a:defRPr sz="900"/>
+            </a:lvl7pPr>
+            <a:lvl8pPr marL="3200400" indent="0">
+              <a:buNone/>
+              <a:defRPr sz="900"/>
+            </a:lvl8pPr>
+            <a:lvl9pPr marL="3657600" indent="0">
+              <a:buNone/>
+              <a:defRPr sz="900"/>
+            </a:lvl9pPr>
+          </a:lstStyle>
+          <a:p>
+            <a:pPr lvl="0"/>
+            <a:r>
+              <a:rPr lang="ja-JP" altLang="en-US"/>
+              <a:t>マスター テキストの書式設定</a:t>
+            </a:r>
+          </a:p>
+        </p:txBody>
+      </p:sp>
+      <p:sp>
+        <p:nvSpPr>
+          <p:cNvPr id="22" name="Text Placeholder 4"/>
+          <p:cNvSpPr>
+            <a:spLocks noGrp="1"/>
+          </p:cNvSpPr>
+          <p:nvPr>
+            <p:ph type="body" sz="quarter" idx="3"/>
+          </p:nvPr>
+        </p:nvSpPr>
+        <p:spPr>
+          <a:xfrm>
+            <a:off x="4442759" y="4204820"/>
+            <a:ext cx="3301828" cy="576262"/>
+          </a:xfrm>
+        </p:spPr>
+        <p:txBody>
+          <a:bodyPr anchor="b">
+            <a:noAutofit/>
+          </a:bodyPr>
+          <a:lstStyle>
+            <a:lvl1pPr marL="0" indent="0" algn="ctr">
+              <a:lnSpc>
+                <a:spcPct val="85000"/>
+              </a:lnSpc>
+              <a:buNone/>
+              <a:defRPr sz="2200" b="0">
+                <a:solidFill>
+                  <a:schemeClr val="tx1"/>
+                </a:solidFill>
+              </a:defRPr>
+            </a:lvl1pPr>
+            <a:lvl2pPr marL="457200" indent="0">
+              <a:buNone/>
+              <a:defRPr sz="2000" b="1"/>
+            </a:lvl2pPr>
+            <a:lvl3pPr marL="914400" indent="0">
+              <a:buNone/>
+              <a:defRPr sz="1800" b="1"/>
+            </a:lvl3pPr>
+            <a:lvl4pPr marL="1371600" indent="0">
+              <a:buNone/>
+              <a:defRPr sz="1600" b="1"/>
+            </a:lvl4pPr>
+            <a:lvl5pPr marL="1828800" indent="0">
+              <a:buNone/>
+              <a:defRPr sz="1600" b="1"/>
+            </a:lvl5pPr>
+            <a:lvl6pPr marL="2286000" indent="0">
+              <a:buNone/>
+              <a:defRPr sz="1600" b="1"/>
+            </a:lvl6pPr>
+            <a:lvl7pPr marL="2743200" indent="0">
+              <a:buNone/>
+              <a:defRPr sz="1600" b="1"/>
+            </a:lvl7pPr>
+            <a:lvl8pPr marL="3200400" indent="0">
+              <a:buNone/>
+              <a:defRPr sz="1600" b="1"/>
+            </a:lvl8pPr>
+            <a:lvl9pPr marL="3657600" indent="0">
+              <a:buNone/>
+              <a:defRPr sz="1600" b="1"/>
+            </a:lvl9pPr>
+          </a:lstStyle>
+          <a:p>
+            <a:pPr lvl="0"/>
+            <a:r>
+              <a:rPr lang="ja-JP" altLang="en-US"/>
+              <a:t>マスター テキストの書式設定</a:t>
+            </a:r>
+          </a:p>
+        </p:txBody>
+      </p:sp>
+      <p:sp>
+        <p:nvSpPr>
+          <p:cNvPr id="23" name="Picture Placeholder 2"/>
+          <p:cNvSpPr>
+            <a:spLocks noGrp="1" noChangeAspect="1"/>
+          </p:cNvSpPr>
+          <p:nvPr>
+            <p:ph type="pic" idx="21"/>
+          </p:nvPr>
+        </p:nvSpPr>
+        <p:spPr>
+          <a:xfrm>
+            <a:off x="4441348" y="2367093"/>
+            <a:ext cx="3303352" cy="1524000"/>
+          </a:xfrm>
+          <a:prstGeom prst="roundRect">
+            <a:avLst>
+              <a:gd name="adj" fmla="val 8841"/>
+            </a:avLst>
+          </a:prstGeom>
+          <a:noFill/>
+          <a:ln w="82550" cap="sq">
+            <a:solidFill>
+              <a:srgbClr val="EAEAEA"/>
+            </a:solidFill>
+            <a:miter lim="800000"/>
+          </a:ln>
+          <a:effectLst/>
+          <a:scene3d>
+            <a:camera prst="orthographicFront"/>
+            <a:lightRig rig="threePt" dir="t">
+              <a:rot lat="0" lon="0" rev="2700000"/>
+            </a:lightRig>
+          </a:scene3d>
+          <a:sp3d contourW="6350">
+            <a:bevelT h="38100"/>
+            <a:contourClr>
+              <a:srgbClr val="C0C0C0"/>
+            </a:contourClr>
+          </a:sp3d>
+        </p:spPr>
+        <p:txBody>
+          <a:bodyPr anchor="t">
+            <a:normAutofit/>
+          </a:bodyPr>
+          <a:lstStyle>
+            <a:lvl1pPr marL="0" indent="0" algn="ctr">
+              <a:buNone/>
+              <a:defRPr sz="1600"/>
+            </a:lvl1pPr>
+            <a:lvl2pPr marL="457200" indent="0">
+              <a:buNone/>
+              <a:defRPr sz="1600"/>
+            </a:lvl2pPr>
+            <a:lvl3pPr marL="914400" indent="0">
+              <a:buNone/>
+              <a:defRPr sz="1600"/>
+            </a:lvl3pPr>
+            <a:lvl4pPr marL="1371600" indent="0">
+              <a:buNone/>
+              <a:defRPr sz="1600"/>
+            </a:lvl4pPr>
+            <a:lvl5pPr marL="1828800" indent="0">
+              <a:buNone/>
+              <a:defRPr sz="1600"/>
+            </a:lvl5pPr>
+            <a:lvl6pPr marL="2286000" indent="0">
+              <a:buNone/>
+              <a:defRPr sz="1600"/>
+            </a:lvl6pPr>
+            <a:lvl7pPr marL="2743200" indent="0">
+              <a:buNone/>
+              <a:defRPr sz="1600"/>
+            </a:lvl7pPr>
+            <a:lvl8pPr marL="3200400" indent="0">
+              <a:buNone/>
+              <a:defRPr sz="1600"/>
+            </a:lvl8pPr>
+            <a:lvl9pPr marL="3657600" indent="0">
+              <a:buNone/>
+              <a:defRPr sz="1600"/>
+            </a:lvl9pPr>
+          </a:lstStyle>
+          <a:p>
+            <a:r>
+              <a:rPr lang="ja-JP" altLang="en-US"/>
+              <a:t>アイコンをクリックして図を追加</a:t>
+            </a:r>
+            <a:endParaRPr lang="en-US" dirty="0"/>
+          </a:p>
+        </p:txBody>
+      </p:sp>
+      <p:sp>
+        <p:nvSpPr>
+          <p:cNvPr id="24" name="Text Placeholder 3"/>
+          <p:cNvSpPr>
+            <a:spLocks noGrp="1"/>
+          </p:cNvSpPr>
+          <p:nvPr>
+            <p:ph type="body" sz="half" idx="19"/>
+          </p:nvPr>
+        </p:nvSpPr>
+        <p:spPr>
+          <a:xfrm>
+            <a:off x="4441348" y="4781080"/>
+            <a:ext cx="3303352" cy="1010119"/>
+          </a:xfrm>
+        </p:spPr>
+        <p:txBody>
+          <a:bodyPr anchor="t">
+            <a:normAutofit/>
+          </a:bodyPr>
+          <a:lstStyle>
+            <a:lvl1pPr marL="0" indent="0" algn="ctr">
+              <a:buNone/>
+              <a:defRPr sz="1400"/>
+            </a:lvl1pPr>
+            <a:lvl2pPr marL="457200" indent="0">
+              <a:buNone/>
+              <a:defRPr sz="1200"/>
+            </a:lvl2pPr>
+            <a:lvl3pPr marL="914400" indent="0">
+              <a:buNone/>
+              <a:defRPr sz="1000"/>
+            </a:lvl3pPr>
+            <a:lvl4pPr marL="1371600" indent="0">
+              <a:buNone/>
+              <a:defRPr sz="900"/>
+            </a:lvl4pPr>
+            <a:lvl5pPr marL="1828800" indent="0">
+              <a:buNone/>
+              <a:defRPr sz="900"/>
+            </a:lvl5pPr>
+            <a:lvl6pPr marL="2286000" indent="0">
+              <a:buNone/>
+              <a:defRPr sz="900"/>
+            </a:lvl6pPr>
+            <a:lvl7pPr marL="2743200" indent="0">
+              <a:buNone/>
+              <a:defRPr sz="900"/>
+            </a:lvl7pPr>
+            <a:lvl8pPr marL="3200400" indent="0">
+              <a:buNone/>
+              <a:defRPr sz="900"/>
+            </a:lvl8pPr>
+            <a:lvl9pPr marL="3657600" indent="0">
+              <a:buNone/>
+              <a:defRPr sz="900"/>
+            </a:lvl9pPr>
+          </a:lstStyle>
+          <a:p>
+            <a:pPr lvl="0"/>
+            <a:r>
+              <a:rPr lang="ja-JP" altLang="en-US"/>
+              <a:t>マスター テキストの書式設定</a:t>
+            </a:r>
+          </a:p>
+        </p:txBody>
+      </p:sp>
+      <p:sp>
+        <p:nvSpPr>
+          <p:cNvPr id="25" name="Text Placeholder 4"/>
+          <p:cNvSpPr>
+            <a:spLocks noGrp="1"/>
+          </p:cNvSpPr>
+          <p:nvPr>
+            <p:ph type="body" sz="quarter" idx="13"/>
+          </p:nvPr>
+        </p:nvSpPr>
+        <p:spPr>
+          <a:xfrm>
+            <a:off x="7973298" y="4204820"/>
+            <a:ext cx="3300681" cy="576262"/>
+          </a:xfrm>
+        </p:spPr>
+        <p:txBody>
+          <a:bodyPr anchor="b">
+            <a:noAutofit/>
+          </a:bodyPr>
+          <a:lstStyle>
+            <a:lvl1pPr marL="0" indent="0" algn="ctr">
+              <a:lnSpc>
+                <a:spcPct val="85000"/>
+              </a:lnSpc>
+              <a:buNone/>
+              <a:defRPr sz="2200" b="0">
+                <a:solidFill>
+                  <a:schemeClr val="tx1"/>
+                </a:solidFill>
+              </a:defRPr>
+            </a:lvl1pPr>
+            <a:lvl2pPr marL="457200" indent="0">
+              <a:buNone/>
+              <a:defRPr sz="2000" b="1"/>
+            </a:lvl2pPr>
+            <a:lvl3pPr marL="914400" indent="0">
+              <a:buNone/>
+              <a:defRPr sz="1800" b="1"/>
+            </a:lvl3pPr>
+            <a:lvl4pPr marL="1371600" indent="0">
+              <a:buNone/>
+              <a:defRPr sz="1600" b="1"/>
+            </a:lvl4pPr>
+            <a:lvl5pPr marL="1828800" indent="0">
+              <a:buNone/>
+              <a:defRPr sz="1600" b="1"/>
+            </a:lvl5pPr>
+            <a:lvl6pPr marL="2286000" indent="0">
+              <a:buNone/>
+              <a:defRPr sz="1600" b="1"/>
+            </a:lvl6pPr>
+            <a:lvl7pPr marL="2743200" indent="0">
+              <a:buNone/>
+              <a:defRPr sz="1600" b="1"/>
+            </a:lvl7pPr>
+            <a:lvl8pPr marL="3200400" indent="0">
+              <a:buNone/>
+              <a:defRPr sz="1600" b="1"/>
+            </a:lvl8pPr>
+            <a:lvl9pPr marL="3657600" indent="0">
+              <a:buNone/>
+              <a:defRPr sz="1600" b="1"/>
+            </a:lvl9pPr>
+          </a:lstStyle>
+          <a:p>
+            <a:pPr lvl="0"/>
+            <a:r>
+              <a:rPr lang="ja-JP" altLang="en-US"/>
+              <a:t>マスター テキストの書式設定</a:t>
+            </a:r>
+          </a:p>
+        </p:txBody>
+      </p:sp>
+      <p:sp>
+        <p:nvSpPr>
+          <p:cNvPr id="26" name="Picture Placeholder 2"/>
+          <p:cNvSpPr>
+            <a:spLocks noGrp="1" noChangeAspect="1"/>
+          </p:cNvSpPr>
+          <p:nvPr>
+            <p:ph type="pic" idx="22"/>
+          </p:nvPr>
+        </p:nvSpPr>
+        <p:spPr>
+          <a:xfrm>
+            <a:off x="7973298" y="2367093"/>
+            <a:ext cx="3304928" cy="1524000"/>
+          </a:xfrm>
+          <a:prstGeom prst="roundRect">
+            <a:avLst>
+              <a:gd name="adj" fmla="val 8841"/>
+            </a:avLst>
+          </a:prstGeom>
+          <a:noFill/>
+          <a:ln w="82550" cap="sq">
+            <a:solidFill>
+              <a:srgbClr val="EAEAEA"/>
+            </a:solidFill>
+            <a:miter lim="800000"/>
+          </a:ln>
+          <a:effectLst/>
+          <a:scene3d>
+            <a:camera prst="orthographicFront"/>
+            <a:lightRig rig="threePt" dir="t">
+              <a:rot lat="0" lon="0" rev="2700000"/>
+            </a:lightRig>
+          </a:scene3d>
+          <a:sp3d contourW="6350">
+            <a:bevelT h="38100"/>
+            <a:contourClr>
+              <a:srgbClr val="C0C0C0"/>
+            </a:contourClr>
+          </a:sp3d>
+        </p:spPr>
+        <p:txBody>
+          <a:bodyPr anchor="t">
+            <a:normAutofit/>
+          </a:bodyPr>
+          <a:lstStyle>
+            <a:lvl1pPr marL="0" indent="0" algn="ctr">
+              <a:buNone/>
+              <a:defRPr sz="1600"/>
+            </a:lvl1pPr>
+            <a:lvl2pPr marL="457200" indent="0">
+              <a:buNone/>
+              <a:defRPr sz="1600"/>
+            </a:lvl2pPr>
+            <a:lvl3pPr marL="914400" indent="0">
+              <a:buNone/>
+              <a:defRPr sz="1600"/>
+            </a:lvl3pPr>
+            <a:lvl4pPr marL="1371600" indent="0">
+              <a:buNone/>
+              <a:defRPr sz="1600"/>
+            </a:lvl4pPr>
+            <a:lvl5pPr marL="1828800" indent="0">
+              <a:buNone/>
+              <a:defRPr sz="1600"/>
+            </a:lvl5pPr>
+            <a:lvl6pPr marL="2286000" indent="0">
+              <a:buNone/>
+              <a:defRPr sz="1600"/>
+            </a:lvl6pPr>
+            <a:lvl7pPr marL="2743200" indent="0">
+              <a:buNone/>
+              <a:defRPr sz="1600"/>
+            </a:lvl7pPr>
+            <a:lvl8pPr marL="3200400" indent="0">
+              <a:buNone/>
+              <a:defRPr sz="1600"/>
+            </a:lvl8pPr>
+            <a:lvl9pPr marL="3657600" indent="0">
+              <a:buNone/>
+              <a:defRPr sz="1600"/>
+            </a:lvl9pPr>
+          </a:lstStyle>
+          <a:p>
+            <a:r>
+              <a:rPr lang="ja-JP" altLang="en-US"/>
+              <a:t>アイコンをクリックして図を追加</a:t>
+            </a:r>
+            <a:endParaRPr lang="en-US" dirty="0"/>
+          </a:p>
+        </p:txBody>
+      </p:sp>
+      <p:sp>
+        <p:nvSpPr>
+          <p:cNvPr id="27" name="Text Placeholder 3"/>
+          <p:cNvSpPr>
+            <a:spLocks noGrp="1"/>
+          </p:cNvSpPr>
+          <p:nvPr>
+            <p:ph type="body" sz="half" idx="20"/>
+          </p:nvPr>
+        </p:nvSpPr>
+        <p:spPr>
+          <a:xfrm>
+            <a:off x="7973173" y="4781078"/>
+            <a:ext cx="3305053" cy="1010121"/>
+          </a:xfrm>
+        </p:spPr>
+        <p:txBody>
+          <a:bodyPr anchor="t">
+            <a:normAutofit/>
+          </a:bodyPr>
+          <a:lstStyle>
+            <a:lvl1pPr marL="0" indent="0" algn="ctr">
+              <a:buNone/>
+              <a:defRPr sz="1400"/>
+            </a:lvl1pPr>
+            <a:lvl2pPr marL="457200" indent="0">
+              <a:buNone/>
+              <a:defRPr sz="1200"/>
+            </a:lvl2pPr>
+            <a:lvl3pPr marL="914400" indent="0">
+              <a:buNone/>
+              <a:defRPr sz="1000"/>
+            </a:lvl3pPr>
+            <a:lvl4pPr marL="1371600" indent="0">
+              <a:buNone/>
+              <a:defRPr sz="900"/>
+            </a:lvl4pPr>
+            <a:lvl5pPr marL="1828800" indent="0">
+              <a:buNone/>
+              <a:defRPr sz="900"/>
+            </a:lvl5pPr>
+            <a:lvl6pPr marL="2286000" indent="0">
+              <a:buNone/>
+              <a:defRPr sz="900"/>
+            </a:lvl6pPr>
+            <a:lvl7pPr marL="2743200" indent="0">
+              <a:buNone/>
+              <a:defRPr sz="900"/>
+            </a:lvl7pPr>
+            <a:lvl8pPr marL="3200400" indent="0">
+              <a:buNone/>
+              <a:defRPr sz="900"/>
+            </a:lvl8pPr>
+            <a:lvl9pPr marL="3657600" indent="0">
+              <a:buNone/>
+              <a:defRPr sz="900"/>
+            </a:lvl9pPr>
+          </a:lstStyle>
+          <a:p>
+            <a:pPr lvl="0"/>
+            <a:r>
+              <a:rPr lang="ja-JP" altLang="en-US"/>
+              <a:t>マスター テキストの書式設定</a:t>
+            </a:r>
+          </a:p>
+        </p:txBody>
+      </p:sp>
+      <p:sp>
+        <p:nvSpPr>
+          <p:cNvPr id="3" name="Date Placeholder 2"/>
+          <p:cNvSpPr>
+            <a:spLocks noGrp="1"/>
+          </p:cNvSpPr>
+          <p:nvPr>
+            <p:ph type="dt" sz="half" idx="10"/>
+          </p:nvPr>
+        </p:nvSpPr>
+        <p:spPr/>
+        <p:txBody>
+          <a:bodyPr/>
+          <a:lstStyle/>
+          <a:p>
+            <a:fld id="{5F305778-E222-4C85-8E95-A8CE1D926E62}" type="datetimeFigureOut">
+              <a:rPr kumimoji="1" lang="ja-JP" altLang="en-US" smtClean="0"/>
+              <a:t>2025/10/31</a:t>
+            </a:fld>
+            <a:endParaRPr kumimoji="1" lang="ja-JP" altLang="en-US"/>
+          </a:p>
+        </p:txBody>
+      </p:sp>
+      <p:sp>
+        <p:nvSpPr>
+          <p:cNvPr id="4" name="Footer Placeholder 3"/>
+          <p:cNvSpPr>
+            <a:spLocks noGrp="1"/>
+          </p:cNvSpPr>
+          <p:nvPr>
+            <p:ph type="ftr" sz="quarter" idx="11"/>
+          </p:nvPr>
+        </p:nvSpPr>
+        <p:spPr/>
+        <p:txBody>
+          <a:bodyPr/>
+          <a:lstStyle/>
+          <a:p>
+            <a:endParaRPr kumimoji="1" lang="ja-JP" altLang="en-US"/>
+          </a:p>
+        </p:txBody>
+      </p:sp>
+      <p:sp>
+        <p:nvSpPr>
+          <p:cNvPr id="5" name="Slide Number Placeholder 4"/>
+          <p:cNvSpPr>
+            <a:spLocks noGrp="1"/>
+          </p:cNvSpPr>
+          <p:nvPr>
+            <p:ph type="sldNum" sz="quarter" idx="12"/>
+          </p:nvPr>
+        </p:nvSpPr>
+        <p:spPr/>
+        <p:txBody>
+          <a:bodyPr/>
+          <a:lstStyle/>
+          <a:p>
+            <a:fld id="{48CB8B3E-63A1-441E-8AC1-5627B169235D}" type="slidenum">
+              <a:rPr kumimoji="1" lang="ja-JP" altLang="en-US" smtClean="0"/>
+              <a:t>‹#›</a:t>
+            </a:fld>
+            <a:endParaRPr kumimoji="1" lang="ja-JP" altLang="en-US"/>
+          </a:p>
+        </p:txBody>
+      </p:sp>
+    </p:spTree>
+    <p:extLst>
+      <p:ext uri="{BB962C8B-B14F-4D97-AF65-F5344CB8AC3E}">
+        <p14:creationId xmlns:p14="http://schemas.microsoft.com/office/powerpoint/2010/main" val="2481379428"/>
+      </p:ext>
+    </p:extLst>
+  </p:cSld>
+  <p:clrMapOvr>
+    <a:masterClrMapping/>
+  </p:clrMapOvr>
+</p:sldLayout>
+</file>
+
+<file path=ppt/slideLayouts/slideLayout16.xml><?xml version="1.0" encoding="utf-8"?>
 <p:sldLayout xmlns:a="http://schemas.openxmlformats.org/drawingml/2006/main" xmlns:r="http://schemas.openxmlformats.org/officeDocument/2006/relationships" xmlns:p="http://schemas.openxmlformats.org/presentationml/2006/main" type="vertTx" preserve="1">
   <p:cSld name="タイトルと縦書きテキスト">
     <p:spTree>
@@ -351,15 +3070,39 @@
           <a:chExt cx="0" cy="0"/>
         </a:xfrm>
       </p:grpSpPr>
-      <p:sp>
-        <p:nvSpPr>
-          <p:cNvPr id="2" name="タイトル 1">
+      <p:pic>
+        <p:nvPicPr>
+          <p:cNvPr id="8" name="Picture 7" descr="Droplets-HD-Content-R1d.png"/>
+          <p:cNvPicPr>
+            <a:picLocks noChangeAspect="1"/>
+          </p:cNvPicPr>
+          <p:nvPr/>
+        </p:nvPicPr>
+        <p:blipFill>
+          <a:blip r:embed="rId2">
             <a:extLst>
-              <a:ext uri="{FF2B5EF4-FFF2-40B4-BE49-F238E27FC236}">
-                <a16:creationId xmlns:a16="http://schemas.microsoft.com/office/drawing/2014/main" id="{3DEB1F59-1B0B-4207-B0C8-A9EE3137D934}"/>
+              <a:ext uri="{28A0092B-C50C-407E-A947-70E740481C1C}">
+                <a14:useLocalDpi xmlns:a14="http://schemas.microsoft.com/office/drawing/2010/main" val="0"/>
               </a:ext>
             </a:extLst>
-          </p:cNvPr>
+          </a:blip>
+          <a:stretch>
+            <a:fillRect/>
+          </a:stretch>
+        </p:blipFill>
+        <p:spPr>
+          <a:xfrm>
+            <a:off x="0" y="0"/>
+            <a:ext cx="12192000" cy="6858000"/>
+          </a:xfrm>
+          <a:prstGeom prst="rect">
+            <a:avLst/>
+          </a:prstGeom>
+        </p:spPr>
+      </p:pic>
+      <p:sp>
+        <p:nvSpPr>
+          <p:cNvPr id="2" name="Title 1"/>
           <p:cNvSpPr>
             <a:spLocks noGrp="1"/>
           </p:cNvSpPr>
@@ -373,110 +3116,105 @@
           <a:lstStyle/>
           <a:p>
             <a:r>
-              <a:rPr kumimoji="1" lang="ja-JP" altLang="en-US"/>
+              <a:rPr lang="ja-JP" altLang="en-US"/>
               <a:t>マスター タイトルの書式設定</a:t>
             </a:r>
-          </a:p>
-        </p:txBody>
-      </p:sp>
-      <p:sp>
-        <p:nvSpPr>
-          <p:cNvPr id="3" name="縦書きテキスト プレースホルダー 2">
-            <a:extLst>
-              <a:ext uri="{FF2B5EF4-FFF2-40B4-BE49-F238E27FC236}">
-                <a16:creationId xmlns:a16="http://schemas.microsoft.com/office/drawing/2014/main" id="{11D55656-168A-4F1E-92B8-DE4EF4FB652F}"/>
-              </a:ext>
-            </a:extLst>
-          </p:cNvPr>
-          <p:cNvSpPr>
-            <a:spLocks noGrp="1"/>
-          </p:cNvSpPr>
-          <p:nvPr>
-            <p:ph type="body" orient="vert" idx="1"/>
-          </p:nvPr>
-        </p:nvSpPr>
-        <p:spPr/>
+            <a:endParaRPr lang="en-US" dirty="0"/>
+          </a:p>
+        </p:txBody>
+      </p:sp>
+      <p:sp>
+        <p:nvSpPr>
+          <p:cNvPr id="11" name="Vertical Text Placeholder 2"/>
+          <p:cNvSpPr>
+            <a:spLocks noGrp="1"/>
+          </p:cNvSpPr>
+          <p:nvPr>
+            <p:ph type="body" orient="vert" sz="quarter" idx="13"/>
+          </p:nvPr>
+        </p:nvSpPr>
+        <p:spPr>
+          <a:xfrm>
+            <a:off x="913775" y="2367093"/>
+            <a:ext cx="10364452" cy="3424107"/>
+          </a:xfrm>
+        </p:spPr>
         <p:txBody>
           <a:bodyPr vert="eaVert"/>
           <a:lstStyle/>
           <a:p>
             <a:pPr lvl="0"/>
             <a:r>
-              <a:rPr kumimoji="1" lang="ja-JP" altLang="en-US"/>
+              <a:rPr lang="ja-JP" altLang="en-US"/>
               <a:t>マスター テキストの書式設定</a:t>
             </a:r>
           </a:p>
           <a:p>
             <a:pPr lvl="1"/>
             <a:r>
-              <a:rPr kumimoji="1" lang="ja-JP" altLang="en-US"/>
+              <a:rPr lang="ja-JP" altLang="en-US"/>
               <a:t>第 </a:t>
             </a:r>
             <a:r>
-              <a:rPr kumimoji="1" lang="en-US" altLang="ja-JP"/>
+              <a:rPr lang="en-US" altLang="ja-JP"/>
               <a:t>2 </a:t>
             </a:r>
             <a:r>
-              <a:rPr kumimoji="1" lang="ja-JP" altLang="en-US"/>
+              <a:rPr lang="ja-JP" altLang="en-US"/>
               <a:t>レベル</a:t>
             </a:r>
           </a:p>
           <a:p>
             <a:pPr lvl="2"/>
             <a:r>
-              <a:rPr kumimoji="1" lang="ja-JP" altLang="en-US"/>
+              <a:rPr lang="ja-JP" altLang="en-US"/>
               <a:t>第 </a:t>
             </a:r>
             <a:r>
-              <a:rPr kumimoji="1" lang="en-US" altLang="ja-JP"/>
+              <a:rPr lang="en-US" altLang="ja-JP"/>
               <a:t>3 </a:t>
             </a:r>
             <a:r>
-              <a:rPr kumimoji="1" lang="ja-JP" altLang="en-US"/>
+              <a:rPr lang="ja-JP" altLang="en-US"/>
               <a:t>レベル</a:t>
             </a:r>
           </a:p>
           <a:p>
             <a:pPr lvl="3"/>
             <a:r>
-              <a:rPr kumimoji="1" lang="ja-JP" altLang="en-US"/>
+              <a:rPr lang="ja-JP" altLang="en-US"/>
               <a:t>第 </a:t>
             </a:r>
             <a:r>
-              <a:rPr kumimoji="1" lang="en-US" altLang="ja-JP"/>
+              <a:rPr lang="en-US" altLang="ja-JP"/>
               <a:t>4 </a:t>
             </a:r>
             <a:r>
-              <a:rPr kumimoji="1" lang="ja-JP" altLang="en-US"/>
+              <a:rPr lang="ja-JP" altLang="en-US"/>
               <a:t>レベル</a:t>
             </a:r>
           </a:p>
           <a:p>
             <a:pPr lvl="4"/>
             <a:r>
-              <a:rPr kumimoji="1" lang="ja-JP" altLang="en-US"/>
+              <a:rPr lang="ja-JP" altLang="en-US"/>
               <a:t>第 </a:t>
             </a:r>
             <a:r>
-              <a:rPr kumimoji="1" lang="en-US" altLang="ja-JP"/>
+              <a:rPr lang="en-US" altLang="ja-JP"/>
               <a:t>5 </a:t>
             </a:r>
             <a:r>
-              <a:rPr kumimoji="1" lang="ja-JP" altLang="en-US"/>
+              <a:rPr lang="ja-JP" altLang="en-US"/>
               <a:t>レベル</a:t>
             </a:r>
-          </a:p>
-        </p:txBody>
-      </p:sp>
-      <p:sp>
-        <p:nvSpPr>
-          <p:cNvPr id="4" name="日付プレースホルダー 3">
-            <a:extLst>
-              <a:ext uri="{FF2B5EF4-FFF2-40B4-BE49-F238E27FC236}">
-                <a16:creationId xmlns:a16="http://schemas.microsoft.com/office/drawing/2014/main" id="{6801A665-C851-49B5-9079-F650AB9DA194}"/>
-              </a:ext>
-            </a:extLst>
-          </p:cNvPr>
+            <a:endParaRPr lang="en-US" dirty="0"/>
+          </a:p>
+        </p:txBody>
+      </p:sp>
+      <p:sp>
+        <p:nvSpPr>
+          <p:cNvPr id="4" name="Date Placeholder 3"/>
           <p:cNvSpPr>
             <a:spLocks noGrp="1"/>
           </p:cNvSpPr>
@@ -491,7 +3229,7 @@
           <a:p>
             <a:fld id="{5F305778-E222-4C85-8E95-A8CE1D926E62}" type="datetimeFigureOut">
               <a:rPr kumimoji="1" lang="ja-JP" altLang="en-US" smtClean="0"/>
-              <a:t>2025/10/29</a:t>
+              <a:t>2025/10/31</a:t>
             </a:fld>
             <a:endParaRPr kumimoji="1" lang="ja-JP" altLang="en-US"/>
           </a:p>
@@ -499,13 +3237,7 @@
       </p:sp>
       <p:sp>
         <p:nvSpPr>
-          <p:cNvPr id="5" name="フッター プレースホルダー 4">
-            <a:extLst>
-              <a:ext uri="{FF2B5EF4-FFF2-40B4-BE49-F238E27FC236}">
-                <a16:creationId xmlns:a16="http://schemas.microsoft.com/office/drawing/2014/main" id="{0B2112A2-6CC3-4C49-AC07-CFC563DD2B33}"/>
-              </a:ext>
-            </a:extLst>
-          </p:cNvPr>
+          <p:cNvPr id="5" name="Footer Placeholder 4"/>
           <p:cNvSpPr>
             <a:spLocks noGrp="1"/>
           </p:cNvSpPr>
@@ -524,13 +3256,7 @@
       </p:sp>
       <p:sp>
         <p:nvSpPr>
-          <p:cNvPr id="6" name="スライド番号プレースホルダー 5">
-            <a:extLst>
-              <a:ext uri="{FF2B5EF4-FFF2-40B4-BE49-F238E27FC236}">
-                <a16:creationId xmlns:a16="http://schemas.microsoft.com/office/drawing/2014/main" id="{C52062C0-46E3-4AC4-A729-A2595E6ABB0F}"/>
-              </a:ext>
-            </a:extLst>
-          </p:cNvPr>
+          <p:cNvPr id="6" name="Slide Number Placeholder 5"/>
           <p:cNvSpPr>
             <a:spLocks noGrp="1"/>
           </p:cNvSpPr>
@@ -554,7 +3280,7 @@
     </p:spTree>
     <p:extLst>
       <p:ext uri="{BB962C8B-B14F-4D97-AF65-F5344CB8AC3E}">
-        <p14:creationId xmlns:p14="http://schemas.microsoft.com/office/powerpoint/2010/main" val="253061174"/>
+        <p14:creationId xmlns:p14="http://schemas.microsoft.com/office/powerpoint/2010/main" val="415348104"/>
       </p:ext>
     </p:extLst>
   </p:cSld>
@@ -564,7 +3290,7 @@
 </p:sldLayout>
 </file>
 
-<file path=ppt/slideLayouts/slideLayout11.xml><?xml version="1.0" encoding="utf-8"?>
+<file path=ppt/slideLayouts/slideLayout17.xml><?xml version="1.0" encoding="utf-8"?>
 <p:sldLayout xmlns:a="http://schemas.openxmlformats.org/drawingml/2006/main" xmlns:r="http://schemas.openxmlformats.org/officeDocument/2006/relationships" xmlns:p="http://schemas.openxmlformats.org/presentationml/2006/main" type="vertTitleAndTx" preserve="1">
   <p:cSld name="縦書きタイトルと&#10;縦書きテキスト">
     <p:spTree>
@@ -581,15 +3307,39 @@
           <a:chExt cx="0" cy="0"/>
         </a:xfrm>
       </p:grpSpPr>
-      <p:sp>
-        <p:nvSpPr>
-          <p:cNvPr id="2" name="縦書きタイトル 1">
+      <p:pic>
+        <p:nvPicPr>
+          <p:cNvPr id="9" name="Picture 8" descr="Droplets-HD-Content-R1d.png"/>
+          <p:cNvPicPr>
+            <a:picLocks noChangeAspect="1"/>
+          </p:cNvPicPr>
+          <p:nvPr/>
+        </p:nvPicPr>
+        <p:blipFill>
+          <a:blip r:embed="rId2">
             <a:extLst>
-              <a:ext uri="{FF2B5EF4-FFF2-40B4-BE49-F238E27FC236}">
-                <a16:creationId xmlns:a16="http://schemas.microsoft.com/office/drawing/2014/main" id="{A78A89BC-1F57-4B06-B880-9F11FC2B25F0}"/>
+              <a:ext uri="{28A0092B-C50C-407E-A947-70E740481C1C}">
+                <a14:useLocalDpi xmlns:a14="http://schemas.microsoft.com/office/drawing/2010/main" val="0"/>
               </a:ext>
             </a:extLst>
-          </p:cNvPr>
+          </a:blip>
+          <a:stretch>
+            <a:fillRect/>
+          </a:stretch>
+        </p:blipFill>
+        <p:spPr>
+          <a:xfrm>
+            <a:off x="0" y="0"/>
+            <a:ext cx="12192000" cy="6858000"/>
+          </a:xfrm>
+          <a:prstGeom prst="rect">
+            <a:avLst/>
+          </a:prstGeom>
+        </p:spPr>
+      </p:pic>
+      <p:sp>
+        <p:nvSpPr>
+          <p:cNvPr id="2" name="Vertical Title 1"/>
           <p:cNvSpPr>
             <a:spLocks noGrp="1"/>
           </p:cNvSpPr>
@@ -599,41 +3349,40 @@
         </p:nvSpPr>
         <p:spPr>
           <a:xfrm>
-            <a:off x="8724900" y="365125"/>
-            <a:ext cx="2628900" cy="5811838"/>
+            <a:off x="8724900" y="609601"/>
+            <a:ext cx="2553326" cy="5181599"/>
           </a:xfrm>
         </p:spPr>
         <p:txBody>
           <a:bodyPr vert="eaVert"/>
-          <a:lstStyle/>
-          <a:p>
-            <a:r>
-              <a:rPr kumimoji="1" lang="ja-JP" altLang="en-US"/>
+          <a:lstStyle>
+            <a:lvl1pPr algn="l">
+              <a:defRPr/>
+            </a:lvl1pPr>
+          </a:lstStyle>
+          <a:p>
+            <a:r>
+              <a:rPr lang="ja-JP" altLang="en-US"/>
               <a:t>マスター タイトルの書式設定</a:t>
             </a:r>
-          </a:p>
-        </p:txBody>
-      </p:sp>
-      <p:sp>
-        <p:nvSpPr>
-          <p:cNvPr id="3" name="縦書きテキスト プレースホルダー 2">
-            <a:extLst>
-              <a:ext uri="{FF2B5EF4-FFF2-40B4-BE49-F238E27FC236}">
-                <a16:creationId xmlns:a16="http://schemas.microsoft.com/office/drawing/2014/main" id="{7114754B-7B79-47C9-B0C9-C0E9B4AE8A3F}"/>
-              </a:ext>
-            </a:extLst>
-          </p:cNvPr>
-          <p:cNvSpPr>
-            <a:spLocks noGrp="1"/>
-          </p:cNvSpPr>
-          <p:nvPr>
-            <p:ph type="body" orient="vert" idx="1"/>
-          </p:nvPr>
-        </p:nvSpPr>
-        <p:spPr>
-          <a:xfrm>
-            <a:off x="838200" y="365125"/>
-            <a:ext cx="7734300" cy="5811838"/>
+            <a:endParaRPr lang="en-US" dirty="0"/>
+          </a:p>
+        </p:txBody>
+      </p:sp>
+      <p:sp>
+        <p:nvSpPr>
+          <p:cNvPr id="8" name="Vertical Text Placeholder 2"/>
+          <p:cNvSpPr>
+            <a:spLocks noGrp="1"/>
+          </p:cNvSpPr>
+          <p:nvPr>
+            <p:ph type="body" orient="vert" sz="quarter" idx="13"/>
+          </p:nvPr>
+        </p:nvSpPr>
+        <p:spPr>
+          <a:xfrm>
+            <a:off x="913775" y="609601"/>
+            <a:ext cx="7658724" cy="5181599"/>
           </a:xfrm>
         </p:spPr>
         <p:txBody>
@@ -642,81 +3391,76 @@
           <a:p>
             <a:pPr lvl="0"/>
             <a:r>
-              <a:rPr kumimoji="1" lang="ja-JP" altLang="en-US"/>
+              <a:rPr lang="ja-JP" altLang="en-US"/>
               <a:t>マスター テキストの書式設定</a:t>
             </a:r>
           </a:p>
           <a:p>
             <a:pPr lvl="1"/>
             <a:r>
-              <a:rPr kumimoji="1" lang="ja-JP" altLang="en-US"/>
+              <a:rPr lang="ja-JP" altLang="en-US"/>
               <a:t>第 </a:t>
             </a:r>
             <a:r>
-              <a:rPr kumimoji="1" lang="en-US" altLang="ja-JP"/>
+              <a:rPr lang="en-US" altLang="ja-JP"/>
               <a:t>2 </a:t>
             </a:r>
             <a:r>
-              <a:rPr kumimoji="1" lang="ja-JP" altLang="en-US"/>
+              <a:rPr lang="ja-JP" altLang="en-US"/>
               <a:t>レベル</a:t>
             </a:r>
           </a:p>
           <a:p>
             <a:pPr lvl="2"/>
             <a:r>
-              <a:rPr kumimoji="1" lang="ja-JP" altLang="en-US"/>
+              <a:rPr lang="ja-JP" altLang="en-US"/>
               <a:t>第 </a:t>
             </a:r>
             <a:r>
-              <a:rPr kumimoji="1" lang="en-US" altLang="ja-JP"/>
+              <a:rPr lang="en-US" altLang="ja-JP"/>
               <a:t>3 </a:t>
             </a:r>
             <a:r>
-              <a:rPr kumimoji="1" lang="ja-JP" altLang="en-US"/>
+              <a:rPr lang="ja-JP" altLang="en-US"/>
               <a:t>レベル</a:t>
             </a:r>
           </a:p>
           <a:p>
             <a:pPr lvl="3"/>
             <a:r>
-              <a:rPr kumimoji="1" lang="ja-JP" altLang="en-US"/>
+              <a:rPr lang="ja-JP" altLang="en-US"/>
               <a:t>第 </a:t>
             </a:r>
             <a:r>
-              <a:rPr kumimoji="1" lang="en-US" altLang="ja-JP"/>
+              <a:rPr lang="en-US" altLang="ja-JP"/>
               <a:t>4 </a:t>
             </a:r>
             <a:r>
-              <a:rPr kumimoji="1" lang="ja-JP" altLang="en-US"/>
+              <a:rPr lang="ja-JP" altLang="en-US"/>
               <a:t>レベル</a:t>
             </a:r>
           </a:p>
           <a:p>
             <a:pPr lvl="4"/>
             <a:r>
-              <a:rPr kumimoji="1" lang="ja-JP" altLang="en-US"/>
+              <a:rPr lang="ja-JP" altLang="en-US"/>
               <a:t>第 </a:t>
             </a:r>
             <a:r>
-              <a:rPr kumimoji="1" lang="en-US" altLang="ja-JP"/>
+              <a:rPr lang="en-US" altLang="ja-JP"/>
               <a:t>5 </a:t>
             </a:r>
             <a:r>
-              <a:rPr kumimoji="1" lang="ja-JP" altLang="en-US"/>
+              <a:rPr lang="ja-JP" altLang="en-US"/>
               <a:t>レベル</a:t>
             </a:r>
-          </a:p>
-        </p:txBody>
-      </p:sp>
-      <p:sp>
-        <p:nvSpPr>
-          <p:cNvPr id="4" name="日付プレースホルダー 3">
-            <a:extLst>
-              <a:ext uri="{FF2B5EF4-FFF2-40B4-BE49-F238E27FC236}">
-                <a16:creationId xmlns:a16="http://schemas.microsoft.com/office/drawing/2014/main" id="{3B9BC3EA-B815-4F39-903E-E779BE081137}"/>
-              </a:ext>
-            </a:extLst>
-          </p:cNvPr>
+            <a:endParaRPr lang="en-US" dirty="0"/>
+          </a:p>
+        </p:txBody>
+      </p:sp>
+      <p:sp>
+        <p:nvSpPr>
+          <p:cNvPr id="4" name="Date Placeholder 3"/>
           <p:cNvSpPr>
             <a:spLocks noGrp="1"/>
           </p:cNvSpPr>
@@ -731,7 +3475,7 @@
           <a:p>
             <a:fld id="{5F305778-E222-4C85-8E95-A8CE1D926E62}" type="datetimeFigureOut">
               <a:rPr kumimoji="1" lang="ja-JP" altLang="en-US" smtClean="0"/>
-              <a:t>2025/10/29</a:t>
+              <a:t>2025/10/31</a:t>
             </a:fld>
             <a:endParaRPr kumimoji="1" lang="ja-JP" altLang="en-US"/>
           </a:p>
@@ -739,13 +3483,7 @@
       </p:sp>
       <p:sp>
         <p:nvSpPr>
-          <p:cNvPr id="5" name="フッター プレースホルダー 4">
-            <a:extLst>
-              <a:ext uri="{FF2B5EF4-FFF2-40B4-BE49-F238E27FC236}">
-                <a16:creationId xmlns:a16="http://schemas.microsoft.com/office/drawing/2014/main" id="{0DCED52C-36A7-4D14-B9E9-3D7B5D6DB007}"/>
-              </a:ext>
-            </a:extLst>
-          </p:cNvPr>
+          <p:cNvPr id="5" name="Footer Placeholder 4"/>
           <p:cNvSpPr>
             <a:spLocks noGrp="1"/>
           </p:cNvSpPr>
@@ -764,13 +3502,7 @@
       </p:sp>
       <p:sp>
         <p:nvSpPr>
-          <p:cNvPr id="6" name="スライド番号プレースホルダー 5">
-            <a:extLst>
-              <a:ext uri="{FF2B5EF4-FFF2-40B4-BE49-F238E27FC236}">
-                <a16:creationId xmlns:a16="http://schemas.microsoft.com/office/drawing/2014/main" id="{A6A5ED81-28E9-42DF-8396-8A738A7A13F8}"/>
-              </a:ext>
-            </a:extLst>
-          </p:cNvPr>
+          <p:cNvPr id="6" name="Slide Number Placeholder 5"/>
           <p:cNvSpPr>
             <a:spLocks noGrp="1"/>
           </p:cNvSpPr>
@@ -794,7 +3526,209 @@
     </p:spTree>
     <p:extLst>
       <p:ext uri="{BB962C8B-B14F-4D97-AF65-F5344CB8AC3E}">
-        <p14:creationId xmlns:p14="http://schemas.microsoft.com/office/powerpoint/2010/main" val="2227752841"/>
+        <p14:creationId xmlns:p14="http://schemas.microsoft.com/office/powerpoint/2010/main" val="2630191778"/>
+      </p:ext>
+    </p:extLst>
+  </p:cSld>
+  <p:clrMapOvr>
+    <a:masterClrMapping/>
+  </p:clrMapOvr>
+</p:sldLayout>
+</file>
+
+<file path=ppt/slideLayouts/slideLayout18.xml><?xml version="1.0" encoding="utf-8"?>
+<p:sldLayout xmlns:a="http://schemas.openxmlformats.org/drawingml/2006/main" xmlns:r="http://schemas.openxmlformats.org/officeDocument/2006/relationships" xmlns:p="http://schemas.openxmlformats.org/presentationml/2006/main" type="obj">
+  <p:cSld name="1_タイトルとコンテンツ">
+    <p:spTree>
+      <p:nvGrpSpPr>
+        <p:cNvPr id="1" name=""/>
+        <p:cNvGrpSpPr/>
+        <p:nvPr/>
+      </p:nvGrpSpPr>
+      <p:grpSpPr>
+        <a:xfrm>
+          <a:off x="0" y="0"/>
+          <a:ext cx="0" cy="0"/>
+          <a:chOff x="0" y="0"/>
+          <a:chExt cx="0" cy="0"/>
+        </a:xfrm>
+      </p:grpSpPr>
+      <p:sp>
+        <p:nvSpPr>
+          <p:cNvPr id="2" name="Title 1"/>
+          <p:cNvSpPr>
+            <a:spLocks noGrp="1"/>
+          </p:cNvSpPr>
+          <p:nvPr>
+            <p:ph type="title"/>
+          </p:nvPr>
+        </p:nvSpPr>
+        <p:spPr/>
+        <p:txBody>
+          <a:bodyPr/>
+          <a:lstStyle/>
+          <a:p>
+            <a:r>
+              <a:rPr lang="ja-JP" altLang="en-US"/>
+              <a:t>マスター タイトルの書式設定</a:t>
+            </a:r>
+            <a:endParaRPr lang="en-US" dirty="0"/>
+          </a:p>
+        </p:txBody>
+      </p:sp>
+      <p:sp>
+        <p:nvSpPr>
+          <p:cNvPr id="3" name="Content Placeholder 2"/>
+          <p:cNvSpPr>
+            <a:spLocks noGrp="1"/>
+          </p:cNvSpPr>
+          <p:nvPr>
+            <p:ph idx="1"/>
+          </p:nvPr>
+        </p:nvSpPr>
+        <p:spPr/>
+        <p:txBody>
+          <a:bodyPr/>
+          <a:lstStyle/>
+          <a:p>
+            <a:pPr lvl="0"/>
+            <a:r>
+              <a:rPr lang="ja-JP" altLang="en-US"/>
+              <a:t>マスター テキストの書式設定</a:t>
+            </a:r>
+          </a:p>
+          <a:p>
+            <a:pPr lvl="1"/>
+            <a:r>
+              <a:rPr lang="ja-JP" altLang="en-US"/>
+              <a:t>第 </a:t>
+            </a:r>
+            <a:r>
+              <a:rPr lang="en-US" altLang="ja-JP"/>
+              <a:t>2 </a:t>
+            </a:r>
+            <a:r>
+              <a:rPr lang="ja-JP" altLang="en-US"/>
+              <a:t>レベル</a:t>
+            </a:r>
+          </a:p>
+          <a:p>
+            <a:pPr lvl="2"/>
+            <a:r>
+              <a:rPr lang="ja-JP" altLang="en-US"/>
+              <a:t>第 </a:t>
+            </a:r>
+            <a:r>
+              <a:rPr lang="en-US" altLang="ja-JP"/>
+              <a:t>3 </a:t>
+            </a:r>
+            <a:r>
+              <a:rPr lang="ja-JP" altLang="en-US"/>
+              <a:t>レベル</a:t>
+            </a:r>
+          </a:p>
+          <a:p>
+            <a:pPr lvl="3"/>
+            <a:r>
+              <a:rPr lang="ja-JP" altLang="en-US"/>
+              <a:t>第 </a:t>
+            </a:r>
+            <a:r>
+              <a:rPr lang="en-US" altLang="ja-JP"/>
+              <a:t>4 </a:t>
+            </a:r>
+            <a:r>
+              <a:rPr lang="ja-JP" altLang="en-US"/>
+              <a:t>レベル</a:t>
+            </a:r>
+          </a:p>
+          <a:p>
+            <a:pPr lvl="4"/>
+            <a:r>
+              <a:rPr lang="ja-JP" altLang="en-US"/>
+              <a:t>第 </a:t>
+            </a:r>
+            <a:r>
+              <a:rPr lang="en-US" altLang="ja-JP"/>
+              <a:t>5 </a:t>
+            </a:r>
+            <a:r>
+              <a:rPr lang="ja-JP" altLang="en-US"/>
+              <a:t>レベル</a:t>
+            </a:r>
+            <a:endParaRPr lang="en-US" dirty="0"/>
+          </a:p>
+        </p:txBody>
+      </p:sp>
+      <p:sp>
+        <p:nvSpPr>
+          <p:cNvPr id="4" name="Date Placeholder 3"/>
+          <p:cNvSpPr>
+            <a:spLocks noGrp="1"/>
+          </p:cNvSpPr>
+          <p:nvPr>
+            <p:ph type="dt" sz="half" idx="10"/>
+          </p:nvPr>
+        </p:nvSpPr>
+        <p:spPr/>
+        <p:txBody>
+          <a:bodyPr/>
+          <a:lstStyle/>
+          <a:p>
+            <a:fld id="{5F305778-E222-4C85-8E95-A8CE1D926E62}" type="datetimeFigureOut">
+              <a:rPr kumimoji="1" lang="ja-JP" altLang="en-US" smtClean="0"/>
+              <a:t>2025/10/31</a:t>
+            </a:fld>
+            <a:endParaRPr kumimoji="1" lang="ja-JP" altLang="en-US"/>
+          </a:p>
+        </p:txBody>
+      </p:sp>
+      <p:sp>
+        <p:nvSpPr>
+          <p:cNvPr id="5" name="Footer Placeholder 4"/>
+          <p:cNvSpPr>
+            <a:spLocks noGrp="1"/>
+          </p:cNvSpPr>
+          <p:nvPr>
+            <p:ph type="ftr" sz="quarter" idx="11"/>
+          </p:nvPr>
+        </p:nvSpPr>
+        <p:spPr/>
+        <p:txBody>
+          <a:bodyPr/>
+          <a:lstStyle/>
+          <a:p>
+            <a:endParaRPr kumimoji="1" lang="ja-JP" altLang="en-US"/>
+          </a:p>
+        </p:txBody>
+      </p:sp>
+      <p:sp>
+        <p:nvSpPr>
+          <p:cNvPr id="6" name="Slide Number Placeholder 5"/>
+          <p:cNvSpPr>
+            <a:spLocks noGrp="1"/>
+          </p:cNvSpPr>
+          <p:nvPr>
+            <p:ph type="sldNum" sz="quarter" idx="12"/>
+          </p:nvPr>
+        </p:nvSpPr>
+        <p:spPr/>
+        <p:txBody>
+          <a:bodyPr/>
+          <a:lstStyle/>
+          <a:p>
+            <a:fld id="{48CB8B3E-63A1-441E-8AC1-5627B169235D}" type="slidenum">
+              <a:rPr kumimoji="1" lang="ja-JP" altLang="en-US" smtClean="0"/>
+              <a:t>‹#›</a:t>
+            </a:fld>
+            <a:endParaRPr kumimoji="1" lang="ja-JP" altLang="en-US"/>
+          </a:p>
+        </p:txBody>
+      </p:sp>
+    </p:spTree>
+    <p:extLst>
+      <p:ext uri="{BB962C8B-B14F-4D97-AF65-F5344CB8AC3E}">
+        <p14:creationId xmlns:p14="http://schemas.microsoft.com/office/powerpoint/2010/main" val="20193998"/>
       </p:ext>
     </p:extLst>
   </p:cSld>
@@ -821,15 +3755,39 @@
           <a:chExt cx="0" cy="0"/>
         </a:xfrm>
       </p:grpSpPr>
-      <p:sp>
-        <p:nvSpPr>
-          <p:cNvPr id="2" name="タイトル 1">
+      <p:pic>
+        <p:nvPicPr>
+          <p:cNvPr id="3" name="Picture 2" descr="Droplets-HD-Content-R1d.png"/>
+          <p:cNvPicPr>
+            <a:picLocks noChangeAspect="1"/>
+          </p:cNvPicPr>
+          <p:nvPr/>
+        </p:nvPicPr>
+        <p:blipFill>
+          <a:blip r:embed="rId2">
             <a:extLst>
-              <a:ext uri="{FF2B5EF4-FFF2-40B4-BE49-F238E27FC236}">
-                <a16:creationId xmlns:a16="http://schemas.microsoft.com/office/drawing/2014/main" id="{6B9C64FC-08AD-40C2-A599-9956EED47141}"/>
+              <a:ext uri="{28A0092B-C50C-407E-A947-70E740481C1C}">
+                <a14:useLocalDpi xmlns:a14="http://schemas.microsoft.com/office/drawing/2010/main" val="0"/>
               </a:ext>
             </a:extLst>
-          </p:cNvPr>
+          </a:blip>
+          <a:stretch>
+            <a:fillRect/>
+          </a:stretch>
+        </p:blipFill>
+        <p:spPr>
+          <a:xfrm>
+            <a:off x="0" y="0"/>
+            <a:ext cx="12192000" cy="6858000"/>
+          </a:xfrm>
+          <a:prstGeom prst="rect">
+            <a:avLst/>
+          </a:prstGeom>
+        </p:spPr>
+      </p:pic>
+      <p:sp>
+        <p:nvSpPr>
+          <p:cNvPr id="2" name="Title 1"/>
           <p:cNvSpPr>
             <a:spLocks noGrp="1"/>
           </p:cNvSpPr>
@@ -843,110 +3801,105 @@
           <a:lstStyle/>
           <a:p>
             <a:r>
-              <a:rPr kumimoji="1" lang="ja-JP" altLang="en-US"/>
+              <a:rPr lang="ja-JP" altLang="en-US"/>
               <a:t>マスター タイトルの書式設定</a:t>
             </a:r>
-          </a:p>
-        </p:txBody>
-      </p:sp>
-      <p:sp>
-        <p:nvSpPr>
-          <p:cNvPr id="3" name="コンテンツ プレースホルダー 2">
-            <a:extLst>
-              <a:ext uri="{FF2B5EF4-FFF2-40B4-BE49-F238E27FC236}">
-                <a16:creationId xmlns:a16="http://schemas.microsoft.com/office/drawing/2014/main" id="{D1D27B08-EB90-42BF-B553-1CF1EE0B1552}"/>
-              </a:ext>
-            </a:extLst>
-          </p:cNvPr>
-          <p:cNvSpPr>
-            <a:spLocks noGrp="1"/>
-          </p:cNvSpPr>
-          <p:nvPr>
-            <p:ph idx="1"/>
-          </p:nvPr>
-        </p:nvSpPr>
-        <p:spPr/>
+            <a:endParaRPr lang="en-US" dirty="0"/>
+          </a:p>
+        </p:txBody>
+      </p:sp>
+      <p:sp>
+        <p:nvSpPr>
+          <p:cNvPr id="12" name="Content Placeholder 2"/>
+          <p:cNvSpPr>
+            <a:spLocks noGrp="1"/>
+          </p:cNvSpPr>
+          <p:nvPr>
+            <p:ph sz="quarter" idx="13"/>
+          </p:nvPr>
+        </p:nvSpPr>
+        <p:spPr>
+          <a:xfrm>
+            <a:off x="913774" y="2367092"/>
+            <a:ext cx="10363826" cy="3424107"/>
+          </a:xfrm>
+        </p:spPr>
         <p:txBody>
           <a:bodyPr/>
           <a:lstStyle/>
           <a:p>
             <a:pPr lvl="0"/>
             <a:r>
-              <a:rPr kumimoji="1" lang="ja-JP" altLang="en-US"/>
+              <a:rPr lang="ja-JP" altLang="en-US"/>
               <a:t>マスター テキストの書式設定</a:t>
             </a:r>
           </a:p>
           <a:p>
             <a:pPr lvl="1"/>
             <a:r>
-              <a:rPr kumimoji="1" lang="ja-JP" altLang="en-US"/>
+              <a:rPr lang="ja-JP" altLang="en-US"/>
               <a:t>第 </a:t>
             </a:r>
             <a:r>
-              <a:rPr kumimoji="1" lang="en-US" altLang="ja-JP"/>
+              <a:rPr lang="en-US" altLang="ja-JP"/>
               <a:t>2 </a:t>
             </a:r>
             <a:r>
-              <a:rPr kumimoji="1" lang="ja-JP" altLang="en-US"/>
+              <a:rPr lang="ja-JP" altLang="en-US"/>
               <a:t>レベル</a:t>
             </a:r>
           </a:p>
           <a:p>
             <a:pPr lvl="2"/>
             <a:r>
-              <a:rPr kumimoji="1" lang="ja-JP" altLang="en-US"/>
+              <a:rPr lang="ja-JP" altLang="en-US"/>
               <a:t>第 </a:t>
             </a:r>
             <a:r>
-              <a:rPr kumimoji="1" lang="en-US" altLang="ja-JP"/>
+              <a:rPr lang="en-US" altLang="ja-JP"/>
               <a:t>3 </a:t>
             </a:r>
             <a:r>
-              <a:rPr kumimoji="1" lang="ja-JP" altLang="en-US"/>
+              <a:rPr lang="ja-JP" altLang="en-US"/>
               <a:t>レベル</a:t>
             </a:r>
           </a:p>
           <a:p>
             <a:pPr lvl="3"/>
             <a:r>
-              <a:rPr kumimoji="1" lang="ja-JP" altLang="en-US"/>
+              <a:rPr lang="ja-JP" altLang="en-US"/>
               <a:t>第 </a:t>
             </a:r>
             <a:r>
-              <a:rPr kumimoji="1" lang="en-US" altLang="ja-JP"/>
+              <a:rPr lang="en-US" altLang="ja-JP"/>
               <a:t>4 </a:t>
             </a:r>
             <a:r>
-              <a:rPr kumimoji="1" lang="ja-JP" altLang="en-US"/>
+              <a:rPr lang="ja-JP" altLang="en-US"/>
               <a:t>レベル</a:t>
             </a:r>
           </a:p>
           <a:p>
             <a:pPr lvl="4"/>
             <a:r>
-              <a:rPr kumimoji="1" lang="ja-JP" altLang="en-US"/>
+              <a:rPr lang="ja-JP" altLang="en-US"/>
               <a:t>第 </a:t>
             </a:r>
             <a:r>
-              <a:rPr kumimoji="1" lang="en-US" altLang="ja-JP"/>
+              <a:rPr lang="en-US" altLang="ja-JP"/>
               <a:t>5 </a:t>
             </a:r>
             <a:r>
-              <a:rPr kumimoji="1" lang="ja-JP" altLang="en-US"/>
+              <a:rPr lang="ja-JP" altLang="en-US"/>
               <a:t>レベル</a:t>
             </a:r>
-          </a:p>
-        </p:txBody>
-      </p:sp>
-      <p:sp>
-        <p:nvSpPr>
-          <p:cNvPr id="4" name="日付プレースホルダー 3">
-            <a:extLst>
-              <a:ext uri="{FF2B5EF4-FFF2-40B4-BE49-F238E27FC236}">
-                <a16:creationId xmlns:a16="http://schemas.microsoft.com/office/drawing/2014/main" id="{09C62E75-7803-4EC3-982A-E40B197D45B8}"/>
-              </a:ext>
-            </a:extLst>
-          </p:cNvPr>
+            <a:endParaRPr lang="en-US" dirty="0"/>
+          </a:p>
+        </p:txBody>
+      </p:sp>
+      <p:sp>
+        <p:nvSpPr>
+          <p:cNvPr id="4" name="Date Placeholder 3"/>
           <p:cNvSpPr>
             <a:spLocks noGrp="1"/>
           </p:cNvSpPr>
@@ -961,7 +3914,7 @@
           <a:p>
             <a:fld id="{5F305778-E222-4C85-8E95-A8CE1D926E62}" type="datetimeFigureOut">
               <a:rPr kumimoji="1" lang="ja-JP" altLang="en-US" smtClean="0"/>
-              <a:t>2025/10/29</a:t>
+              <a:t>2025/10/31</a:t>
             </a:fld>
             <a:endParaRPr kumimoji="1" lang="ja-JP" altLang="en-US"/>
           </a:p>
@@ -969,13 +3922,7 @@
       </p:sp>
       <p:sp>
         <p:nvSpPr>
-          <p:cNvPr id="5" name="フッター プレースホルダー 4">
-            <a:extLst>
-              <a:ext uri="{FF2B5EF4-FFF2-40B4-BE49-F238E27FC236}">
-                <a16:creationId xmlns:a16="http://schemas.microsoft.com/office/drawing/2014/main" id="{06C53525-525C-4A53-9C8B-A6AA8FD1D56B}"/>
-              </a:ext>
-            </a:extLst>
-          </p:cNvPr>
+          <p:cNvPr id="5" name="Footer Placeholder 4"/>
           <p:cNvSpPr>
             <a:spLocks noGrp="1"/>
           </p:cNvSpPr>
@@ -994,13 +3941,7 @@
       </p:sp>
       <p:sp>
         <p:nvSpPr>
-          <p:cNvPr id="6" name="スライド番号プレースホルダー 5">
-            <a:extLst>
-              <a:ext uri="{FF2B5EF4-FFF2-40B4-BE49-F238E27FC236}">
-                <a16:creationId xmlns:a16="http://schemas.microsoft.com/office/drawing/2014/main" id="{80BE2BE1-B29B-4283-BAF6-F96B3BEC7F1D}"/>
-              </a:ext>
-            </a:extLst>
-          </p:cNvPr>
+          <p:cNvPr id="6" name="Slide Number Placeholder 5"/>
           <p:cNvSpPr>
             <a:spLocks noGrp="1"/>
           </p:cNvSpPr>
@@ -1024,7 +3965,7 @@
     </p:spTree>
     <p:extLst>
       <p:ext uri="{BB962C8B-B14F-4D97-AF65-F5344CB8AC3E}">
-        <p14:creationId xmlns:p14="http://schemas.microsoft.com/office/powerpoint/2010/main" val="3870960988"/>
+        <p14:creationId xmlns:p14="http://schemas.microsoft.com/office/powerpoint/2010/main" val="2750368004"/>
       </p:ext>
     </p:extLst>
   </p:cSld>
@@ -1051,15 +3992,39 @@
           <a:chExt cx="0" cy="0"/>
         </a:xfrm>
       </p:grpSpPr>
-      <p:sp>
-        <p:nvSpPr>
-          <p:cNvPr id="2" name="タイトル 1">
+      <p:pic>
+        <p:nvPicPr>
+          <p:cNvPr id="9" name="Picture 8" descr="Droplets-HD-Content-R1d.png"/>
+          <p:cNvPicPr>
+            <a:picLocks noChangeAspect="1"/>
+          </p:cNvPicPr>
+          <p:nvPr/>
+        </p:nvPicPr>
+        <p:blipFill>
+          <a:blip r:embed="rId2">
             <a:extLst>
-              <a:ext uri="{FF2B5EF4-FFF2-40B4-BE49-F238E27FC236}">
-                <a16:creationId xmlns:a16="http://schemas.microsoft.com/office/drawing/2014/main" id="{419A2EA4-FCE1-4D21-9B9D-1C20D5667105}"/>
+              <a:ext uri="{28A0092B-C50C-407E-A947-70E740481C1C}">
+                <a14:useLocalDpi xmlns:a14="http://schemas.microsoft.com/office/drawing/2010/main" val="0"/>
               </a:ext>
             </a:extLst>
-          </p:cNvPr>
+          </a:blip>
+          <a:stretch>
+            <a:fillRect/>
+          </a:stretch>
+        </p:blipFill>
+        <p:spPr>
+          <a:xfrm>
+            <a:off x="0" y="0"/>
+            <a:ext cx="12192000" cy="6858000"/>
+          </a:xfrm>
+          <a:prstGeom prst="rect">
+            <a:avLst/>
+          </a:prstGeom>
+        </p:spPr>
+      </p:pic>
+      <p:sp>
+        <p:nvSpPr>
+          <p:cNvPr id="2" name="Title 1"/>
           <p:cNvSpPr>
             <a:spLocks noGrp="1"/>
           </p:cNvSpPr>
@@ -1069,34 +4034,31 @@
         </p:nvSpPr>
         <p:spPr>
           <a:xfrm>
-            <a:off x="831850" y="1709738"/>
-            <a:ext cx="10515600" cy="2852737"/>
-          </a:xfrm>
-        </p:spPr>
-        <p:txBody>
-          <a:bodyPr anchor="b"/>
+            <a:off x="913774" y="828563"/>
+            <a:ext cx="10351752" cy="2736819"/>
+          </a:xfrm>
+        </p:spPr>
+        <p:txBody>
+          <a:bodyPr anchor="b">
+            <a:normAutofit/>
+          </a:bodyPr>
           <a:lstStyle>
             <a:lvl1pPr>
-              <a:defRPr sz="6000"/>
+              <a:defRPr sz="4000"/>
             </a:lvl1pPr>
           </a:lstStyle>
           <a:p>
             <a:r>
-              <a:rPr kumimoji="1" lang="ja-JP" altLang="en-US"/>
+              <a:rPr lang="ja-JP" altLang="en-US"/>
               <a:t>マスター タイトルの書式設定</a:t>
             </a:r>
-          </a:p>
-        </p:txBody>
-      </p:sp>
-      <p:sp>
-        <p:nvSpPr>
-          <p:cNvPr id="3" name="テキスト プレースホルダー 2">
-            <a:extLst>
-              <a:ext uri="{FF2B5EF4-FFF2-40B4-BE49-F238E27FC236}">
-                <a16:creationId xmlns:a16="http://schemas.microsoft.com/office/drawing/2014/main" id="{9348B0C3-53AA-4508-82C2-33E7BA3EFE80}"/>
-              </a:ext>
-            </a:extLst>
-          </p:cNvPr>
+            <a:endParaRPr lang="en-US" dirty="0"/>
+          </a:p>
+        </p:txBody>
+      </p:sp>
+      <p:sp>
+        <p:nvSpPr>
+          <p:cNvPr id="3" name="Text Placeholder 2"/>
           <p:cNvSpPr>
             <a:spLocks noGrp="1"/>
           </p:cNvSpPr>
@@ -1106,19 +4068,21 @@
         </p:nvSpPr>
         <p:spPr>
           <a:xfrm>
-            <a:off x="831850" y="4589463"/>
-            <a:ext cx="10515600" cy="1500187"/>
-          </a:xfrm>
-        </p:spPr>
-        <p:txBody>
-          <a:bodyPr/>
+            <a:off x="913774" y="3657457"/>
+            <a:ext cx="10351752" cy="1368183"/>
+          </a:xfrm>
+        </p:spPr>
+        <p:txBody>
+          <a:bodyPr>
+            <a:normAutofit/>
+          </a:bodyPr>
           <a:lstStyle>
-            <a:lvl1pPr marL="0" indent="0">
-              <a:buNone/>
-              <a:defRPr sz="2400">
+            <a:lvl1pPr marL="0" indent="0" algn="ctr">
+              <a:buNone/>
+              <a:defRPr sz="2000">
                 <a:solidFill>
-                  <a:schemeClr val="tx1">
-                    <a:tint val="75000"/>
+                  <a:schemeClr val="bg1">
+                    <a:lumMod val="50000"/>
                   </a:schemeClr>
                 </a:solidFill>
               </a:defRPr>
@@ -1207,7 +4171,7 @@
           <a:p>
             <a:pPr lvl="0"/>
             <a:r>
-              <a:rPr kumimoji="1" lang="ja-JP" altLang="en-US"/>
+              <a:rPr lang="ja-JP" altLang="en-US"/>
               <a:t>マスター テキストの書式設定</a:t>
             </a:r>
           </a:p>
@@ -1215,13 +4179,7 @@
       </p:sp>
       <p:sp>
         <p:nvSpPr>
-          <p:cNvPr id="4" name="日付プレースホルダー 3">
-            <a:extLst>
-              <a:ext uri="{FF2B5EF4-FFF2-40B4-BE49-F238E27FC236}">
-                <a16:creationId xmlns:a16="http://schemas.microsoft.com/office/drawing/2014/main" id="{3C76BF17-99EB-4F08-8F40-72C61D12B4D9}"/>
-              </a:ext>
-            </a:extLst>
-          </p:cNvPr>
+          <p:cNvPr id="4" name="Date Placeholder 3"/>
           <p:cNvSpPr>
             <a:spLocks noGrp="1"/>
           </p:cNvSpPr>
@@ -1236,7 +4194,7 @@
           <a:p>
             <a:fld id="{5F305778-E222-4C85-8E95-A8CE1D926E62}" type="datetimeFigureOut">
               <a:rPr kumimoji="1" lang="ja-JP" altLang="en-US" smtClean="0"/>
-              <a:t>2025/10/29</a:t>
+              <a:t>2025/10/31</a:t>
             </a:fld>
             <a:endParaRPr kumimoji="1" lang="ja-JP" altLang="en-US"/>
           </a:p>
@@ -1244,13 +4202,7 @@
       </p:sp>
       <p:sp>
         <p:nvSpPr>
-          <p:cNvPr id="5" name="フッター プレースホルダー 4">
-            <a:extLst>
-              <a:ext uri="{FF2B5EF4-FFF2-40B4-BE49-F238E27FC236}">
-                <a16:creationId xmlns:a16="http://schemas.microsoft.com/office/drawing/2014/main" id="{58413000-3329-43AE-AD2F-9B347BA0965A}"/>
-              </a:ext>
-            </a:extLst>
-          </p:cNvPr>
+          <p:cNvPr id="5" name="Footer Placeholder 4"/>
           <p:cNvSpPr>
             <a:spLocks noGrp="1"/>
           </p:cNvSpPr>
@@ -1269,13 +4221,7 @@
       </p:sp>
       <p:sp>
         <p:nvSpPr>
-          <p:cNvPr id="6" name="スライド番号プレースホルダー 5">
-            <a:extLst>
-              <a:ext uri="{FF2B5EF4-FFF2-40B4-BE49-F238E27FC236}">
-                <a16:creationId xmlns:a16="http://schemas.microsoft.com/office/drawing/2014/main" id="{E49AD8D9-ADFD-487E-BC32-4F72CFA1C817}"/>
-              </a:ext>
-            </a:extLst>
-          </p:cNvPr>
+          <p:cNvPr id="6" name="Slide Number Placeholder 5"/>
           <p:cNvSpPr>
             <a:spLocks noGrp="1"/>
           </p:cNvSpPr>
@@ -1299,7 +4245,7 @@
     </p:spTree>
     <p:extLst>
       <p:ext uri="{BB962C8B-B14F-4D97-AF65-F5344CB8AC3E}">
-        <p14:creationId xmlns:p14="http://schemas.microsoft.com/office/powerpoint/2010/main" val="70514410"/>
+        <p14:creationId xmlns:p14="http://schemas.microsoft.com/office/powerpoint/2010/main" val="3672562242"/>
       </p:ext>
     </p:extLst>
   </p:cSld>
@@ -1326,15 +4272,39 @@
           <a:chExt cx="0" cy="0"/>
         </a:xfrm>
       </p:grpSpPr>
-      <p:sp>
-        <p:nvSpPr>
-          <p:cNvPr id="2" name="タイトル 1">
+      <p:pic>
+        <p:nvPicPr>
+          <p:cNvPr id="10" name="Picture 9" descr="Droplets-HD-Content-R1d.png"/>
+          <p:cNvPicPr>
+            <a:picLocks noChangeAspect="1"/>
+          </p:cNvPicPr>
+          <p:nvPr/>
+        </p:nvPicPr>
+        <p:blipFill>
+          <a:blip r:embed="rId2">
             <a:extLst>
-              <a:ext uri="{FF2B5EF4-FFF2-40B4-BE49-F238E27FC236}">
-                <a16:creationId xmlns:a16="http://schemas.microsoft.com/office/drawing/2014/main" id="{835B25DE-1ECE-4666-8380-FDC368EBC690}"/>
+              <a:ext uri="{28A0092B-C50C-407E-A947-70E740481C1C}">
+                <a14:useLocalDpi xmlns:a14="http://schemas.microsoft.com/office/drawing/2010/main" val="0"/>
               </a:ext>
             </a:extLst>
-          </p:cNvPr>
+          </a:blip>
+          <a:stretch>
+            <a:fillRect/>
+          </a:stretch>
+        </p:blipFill>
+        <p:spPr>
+          <a:xfrm>
+            <a:off x="0" y="0"/>
+            <a:ext cx="12192000" cy="6858000"/>
+          </a:xfrm>
+          <a:prstGeom prst="rect">
+            <a:avLst/>
+          </a:prstGeom>
+        </p:spPr>
+      </p:pic>
+      <p:sp>
+        <p:nvSpPr>
+          <p:cNvPr id="14" name="Title 1"/>
           <p:cNvSpPr>
             <a:spLocks noGrp="1"/>
           </p:cNvSpPr>
@@ -1342,38 +4312,38 @@
             <p:ph type="title"/>
           </p:nvPr>
         </p:nvSpPr>
-        <p:spPr/>
+        <p:spPr>
+          <a:xfrm>
+            <a:off x="913775" y="618517"/>
+            <a:ext cx="10364451" cy="1596177"/>
+          </a:xfrm>
+        </p:spPr>
         <p:txBody>
           <a:bodyPr/>
           <a:lstStyle/>
           <a:p>
             <a:r>
-              <a:rPr kumimoji="1" lang="ja-JP" altLang="en-US"/>
+              <a:rPr lang="ja-JP" altLang="en-US"/>
               <a:t>マスター タイトルの書式設定</a:t>
             </a:r>
-          </a:p>
-        </p:txBody>
-      </p:sp>
-      <p:sp>
-        <p:nvSpPr>
-          <p:cNvPr id="3" name="コンテンツ プレースホルダー 2">
-            <a:extLst>
-              <a:ext uri="{FF2B5EF4-FFF2-40B4-BE49-F238E27FC236}">
-                <a16:creationId xmlns:a16="http://schemas.microsoft.com/office/drawing/2014/main" id="{D5D2C8C9-B393-4BBA-8FF6-7D537ED0FC0F}"/>
-              </a:ext>
-            </a:extLst>
-          </p:cNvPr>
-          <p:cNvSpPr>
-            <a:spLocks noGrp="1"/>
-          </p:cNvSpPr>
-          <p:nvPr>
-            <p:ph sz="half" idx="1"/>
-          </p:nvPr>
-        </p:nvSpPr>
-        <p:spPr>
-          <a:xfrm>
-            <a:off x="838200" y="1825625"/>
-            <a:ext cx="5181600" cy="4351338"/>
+            <a:endParaRPr lang="en-US" dirty="0"/>
+          </a:p>
+        </p:txBody>
+      </p:sp>
+      <p:sp>
+        <p:nvSpPr>
+          <p:cNvPr id="12" name="Content Placeholder 2"/>
+          <p:cNvSpPr>
+            <a:spLocks noGrp="1"/>
+          </p:cNvSpPr>
+          <p:nvPr>
+            <p:ph sz="quarter" idx="13"/>
+          </p:nvPr>
+        </p:nvSpPr>
+        <p:spPr>
+          <a:xfrm>
+            <a:off x="913774" y="2367092"/>
+            <a:ext cx="5106026" cy="3424107"/>
           </a:xfrm>
         </p:spPr>
         <p:txBody>
@@ -1382,92 +4352,87 @@
           <a:p>
             <a:pPr lvl="0"/>
             <a:r>
-              <a:rPr kumimoji="1" lang="ja-JP" altLang="en-US"/>
+              <a:rPr lang="ja-JP" altLang="en-US"/>
               <a:t>マスター テキストの書式設定</a:t>
             </a:r>
           </a:p>
           <a:p>
             <a:pPr lvl="1"/>
             <a:r>
-              <a:rPr kumimoji="1" lang="ja-JP" altLang="en-US"/>
+              <a:rPr lang="ja-JP" altLang="en-US"/>
               <a:t>第 </a:t>
             </a:r>
             <a:r>
-              <a:rPr kumimoji="1" lang="en-US" altLang="ja-JP"/>
+              <a:rPr lang="en-US" altLang="ja-JP"/>
               <a:t>2 </a:t>
             </a:r>
             <a:r>
-              <a:rPr kumimoji="1" lang="ja-JP" altLang="en-US"/>
+              <a:rPr lang="ja-JP" altLang="en-US"/>
               <a:t>レベル</a:t>
             </a:r>
           </a:p>
           <a:p>
             <a:pPr lvl="2"/>
             <a:r>
-              <a:rPr kumimoji="1" lang="ja-JP" altLang="en-US"/>
+              <a:rPr lang="ja-JP" altLang="en-US"/>
               <a:t>第 </a:t>
             </a:r>
             <a:r>
-              <a:rPr kumimoji="1" lang="en-US" altLang="ja-JP"/>
+              <a:rPr lang="en-US" altLang="ja-JP"/>
               <a:t>3 </a:t>
             </a:r>
             <a:r>
-              <a:rPr kumimoji="1" lang="ja-JP" altLang="en-US"/>
+              <a:rPr lang="ja-JP" altLang="en-US"/>
               <a:t>レベル</a:t>
             </a:r>
           </a:p>
           <a:p>
             <a:pPr lvl="3"/>
             <a:r>
-              <a:rPr kumimoji="1" lang="ja-JP" altLang="en-US"/>
+              <a:rPr lang="ja-JP" altLang="en-US"/>
               <a:t>第 </a:t>
             </a:r>
             <a:r>
-              <a:rPr kumimoji="1" lang="en-US" altLang="ja-JP"/>
+              <a:rPr lang="en-US" altLang="ja-JP"/>
               <a:t>4 </a:t>
             </a:r>
             <a:r>
-              <a:rPr kumimoji="1" lang="ja-JP" altLang="en-US"/>
+              <a:rPr lang="ja-JP" altLang="en-US"/>
               <a:t>レベル</a:t>
             </a:r>
           </a:p>
           <a:p>
             <a:pPr lvl="4"/>
             <a:r>
-              <a:rPr kumimoji="1" lang="ja-JP" altLang="en-US"/>
+              <a:rPr lang="ja-JP" altLang="en-US"/>
               <a:t>第 </a:t>
             </a:r>
             <a:r>
-              <a:rPr kumimoji="1" lang="en-US" altLang="ja-JP"/>
+              <a:rPr lang="en-US" altLang="ja-JP"/>
               <a:t>5 </a:t>
             </a:r>
             <a:r>
-              <a:rPr kumimoji="1" lang="ja-JP" altLang="en-US"/>
+              <a:rPr lang="ja-JP" altLang="en-US"/>
               <a:t>レベル</a:t>
             </a:r>
-          </a:p>
-        </p:txBody>
-      </p:sp>
-      <p:sp>
-        <p:nvSpPr>
-          <p:cNvPr id="4" name="コンテンツ プレースホルダー 3">
-            <a:extLst>
-              <a:ext uri="{FF2B5EF4-FFF2-40B4-BE49-F238E27FC236}">
-                <a16:creationId xmlns:a16="http://schemas.microsoft.com/office/drawing/2014/main" id="{831D4DDB-CE11-42CA-A401-3961B5727E53}"/>
-              </a:ext>
-            </a:extLst>
-          </p:cNvPr>
-          <p:cNvSpPr>
-            <a:spLocks noGrp="1"/>
-          </p:cNvSpPr>
-          <p:nvPr>
-            <p:ph sz="half" idx="2"/>
-          </p:nvPr>
-        </p:nvSpPr>
-        <p:spPr>
-          <a:xfrm>
-            <a:off x="6172200" y="1825625"/>
-            <a:ext cx="5181600" cy="4351338"/>
+            <a:endParaRPr lang="en-US" dirty="0"/>
+          </a:p>
+        </p:txBody>
+      </p:sp>
+      <p:sp>
+        <p:nvSpPr>
+          <p:cNvPr id="13" name="Content Placeholder 3"/>
+          <p:cNvSpPr>
+            <a:spLocks noGrp="1"/>
+          </p:cNvSpPr>
+          <p:nvPr>
+            <p:ph sz="quarter" idx="14"/>
+          </p:nvPr>
+        </p:nvSpPr>
+        <p:spPr>
+          <a:xfrm>
+            <a:off x="6172200" y="2367092"/>
+            <a:ext cx="5105400" cy="3424107"/>
           </a:xfrm>
         </p:spPr>
         <p:txBody>
@@ -1476,81 +4441,76 @@
           <a:p>
             <a:pPr lvl="0"/>
             <a:r>
-              <a:rPr kumimoji="1" lang="ja-JP" altLang="en-US"/>
+              <a:rPr lang="ja-JP" altLang="en-US"/>
               <a:t>マスター テキストの書式設定</a:t>
             </a:r>
           </a:p>
           <a:p>
             <a:pPr lvl="1"/>
             <a:r>
-              <a:rPr kumimoji="1" lang="ja-JP" altLang="en-US"/>
+              <a:rPr lang="ja-JP" altLang="en-US"/>
               <a:t>第 </a:t>
             </a:r>
             <a:r>
-              <a:rPr kumimoji="1" lang="en-US" altLang="ja-JP"/>
+              <a:rPr lang="en-US" altLang="ja-JP"/>
               <a:t>2 </a:t>
             </a:r>
             <a:r>
-              <a:rPr kumimoji="1" lang="ja-JP" altLang="en-US"/>
+              <a:rPr lang="ja-JP" altLang="en-US"/>
               <a:t>レベル</a:t>
             </a:r>
           </a:p>
           <a:p>
             <a:pPr lvl="2"/>
             <a:r>
-              <a:rPr kumimoji="1" lang="ja-JP" altLang="en-US"/>
+              <a:rPr lang="ja-JP" altLang="en-US"/>
               <a:t>第 </a:t>
             </a:r>
             <a:r>
-              <a:rPr kumimoji="1" lang="en-US" altLang="ja-JP"/>
+              <a:rPr lang="en-US" altLang="ja-JP"/>
               <a:t>3 </a:t>
             </a:r>
             <a:r>
-              <a:rPr kumimoji="1" lang="ja-JP" altLang="en-US"/>
+              <a:rPr lang="ja-JP" altLang="en-US"/>
               <a:t>レベル</a:t>
             </a:r>
           </a:p>
           <a:p>
             <a:pPr lvl="3"/>
             <a:r>
-              <a:rPr kumimoji="1" lang="ja-JP" altLang="en-US"/>
+              <a:rPr lang="ja-JP" altLang="en-US"/>
               <a:t>第 </a:t>
             </a:r>
             <a:r>
-              <a:rPr kumimoji="1" lang="en-US" altLang="ja-JP"/>
+              <a:rPr lang="en-US" altLang="ja-JP"/>
               <a:t>4 </a:t>
             </a:r>
             <a:r>
-              <a:rPr kumimoji="1" lang="ja-JP" altLang="en-US"/>
+              <a:rPr lang="ja-JP" altLang="en-US"/>
               <a:t>レベル</a:t>
             </a:r>
           </a:p>
           <a:p>
             <a:pPr lvl="4"/>
             <a:r>
-              <a:rPr kumimoji="1" lang="ja-JP" altLang="en-US"/>
+              <a:rPr lang="ja-JP" altLang="en-US"/>
               <a:t>第 </a:t>
             </a:r>
             <a:r>
-              <a:rPr kumimoji="1" lang="en-US" altLang="ja-JP"/>
+              <a:rPr lang="en-US" altLang="ja-JP"/>
               <a:t>5 </a:t>
             </a:r>
             <a:r>
-              <a:rPr kumimoji="1" lang="ja-JP" altLang="en-US"/>
+              <a:rPr lang="ja-JP" altLang="en-US"/>
               <a:t>レベル</a:t>
             </a:r>
-          </a:p>
-        </p:txBody>
-      </p:sp>
-      <p:sp>
-        <p:nvSpPr>
-          <p:cNvPr id="5" name="日付プレースホルダー 4">
-            <a:extLst>
-              <a:ext uri="{FF2B5EF4-FFF2-40B4-BE49-F238E27FC236}">
-                <a16:creationId xmlns:a16="http://schemas.microsoft.com/office/drawing/2014/main" id="{508B970B-B47E-4B0B-BB46-6C3D5B065E00}"/>
-              </a:ext>
-            </a:extLst>
-          </p:cNvPr>
+            <a:endParaRPr lang="en-US" dirty="0"/>
+          </a:p>
+        </p:txBody>
+      </p:sp>
+      <p:sp>
+        <p:nvSpPr>
+          <p:cNvPr id="5" name="Date Placeholder 4"/>
           <p:cNvSpPr>
             <a:spLocks noGrp="1"/>
           </p:cNvSpPr>
@@ -1565,7 +4525,7 @@
           <a:p>
             <a:fld id="{5F305778-E222-4C85-8E95-A8CE1D926E62}" type="datetimeFigureOut">
               <a:rPr kumimoji="1" lang="ja-JP" altLang="en-US" smtClean="0"/>
-              <a:t>2025/10/29</a:t>
+              <a:t>2025/10/31</a:t>
             </a:fld>
             <a:endParaRPr kumimoji="1" lang="ja-JP" altLang="en-US"/>
           </a:p>
@@ -1573,13 +4533,7 @@
       </p:sp>
       <p:sp>
         <p:nvSpPr>
-          <p:cNvPr id="6" name="フッター プレースホルダー 5">
-            <a:extLst>
-              <a:ext uri="{FF2B5EF4-FFF2-40B4-BE49-F238E27FC236}">
-                <a16:creationId xmlns:a16="http://schemas.microsoft.com/office/drawing/2014/main" id="{A00FC175-BA54-404B-9E1C-BD32DC7FC534}"/>
-              </a:ext>
-            </a:extLst>
-          </p:cNvPr>
+          <p:cNvPr id="6" name="Footer Placeholder 5"/>
           <p:cNvSpPr>
             <a:spLocks noGrp="1"/>
           </p:cNvSpPr>
@@ -1598,13 +4552,7 @@
       </p:sp>
       <p:sp>
         <p:nvSpPr>
-          <p:cNvPr id="7" name="スライド番号プレースホルダー 6">
-            <a:extLst>
-              <a:ext uri="{FF2B5EF4-FFF2-40B4-BE49-F238E27FC236}">
-                <a16:creationId xmlns:a16="http://schemas.microsoft.com/office/drawing/2014/main" id="{851ADC7B-2C55-4948-95BA-BE1C037051C9}"/>
-              </a:ext>
-            </a:extLst>
-          </p:cNvPr>
+          <p:cNvPr id="7" name="Slide Number Placeholder 6"/>
           <p:cNvSpPr>
             <a:spLocks noGrp="1"/>
           </p:cNvSpPr>
@@ -1628,7 +4576,7 @@
     </p:spTree>
     <p:extLst>
       <p:ext uri="{BB962C8B-B14F-4D97-AF65-F5344CB8AC3E}">
-        <p14:creationId xmlns:p14="http://schemas.microsoft.com/office/powerpoint/2010/main" val="3377516712"/>
+        <p14:creationId xmlns:p14="http://schemas.microsoft.com/office/powerpoint/2010/main" val="3004305373"/>
       </p:ext>
     </p:extLst>
   </p:cSld>
@@ -1655,15 +4603,39 @@
           <a:chExt cx="0" cy="0"/>
         </a:xfrm>
       </p:grpSpPr>
-      <p:sp>
-        <p:nvSpPr>
-          <p:cNvPr id="2" name="タイトル 1">
+      <p:pic>
+        <p:nvPicPr>
+          <p:cNvPr id="15" name="Picture 14" descr="Droplets-HD-Content-R1d.png"/>
+          <p:cNvPicPr>
+            <a:picLocks noChangeAspect="1"/>
+          </p:cNvPicPr>
+          <p:nvPr/>
+        </p:nvPicPr>
+        <p:blipFill>
+          <a:blip r:embed="rId2">
             <a:extLst>
-              <a:ext uri="{FF2B5EF4-FFF2-40B4-BE49-F238E27FC236}">
-                <a16:creationId xmlns:a16="http://schemas.microsoft.com/office/drawing/2014/main" id="{ABE3F653-E6ED-4B14-9E98-25D086EBD43D}"/>
+              <a:ext uri="{28A0092B-C50C-407E-A947-70E740481C1C}">
+                <a14:useLocalDpi xmlns:a14="http://schemas.microsoft.com/office/drawing/2010/main" val="0"/>
               </a:ext>
             </a:extLst>
-          </p:cNvPr>
+          </a:blip>
+          <a:stretch>
+            <a:fillRect/>
+          </a:stretch>
+        </p:blipFill>
+        <p:spPr>
+          <a:xfrm>
+            <a:off x="0" y="0"/>
+            <a:ext cx="12192000" cy="6858000"/>
+          </a:xfrm>
+          <a:prstGeom prst="rect">
+            <a:avLst/>
+          </a:prstGeom>
+        </p:spPr>
+      </p:pic>
+      <p:sp>
+        <p:nvSpPr>
+          <p:cNvPr id="14" name="Title 1"/>
           <p:cNvSpPr>
             <a:spLocks noGrp="1"/>
           </p:cNvSpPr>
@@ -1673,8 +4645,8 @@
         </p:nvSpPr>
         <p:spPr>
           <a:xfrm>
-            <a:off x="839788" y="365125"/>
-            <a:ext cx="10515600" cy="1325563"/>
+            <a:off x="913775" y="618517"/>
+            <a:ext cx="10364451" cy="1596177"/>
           </a:xfrm>
         </p:spPr>
         <p:txBody>
@@ -1682,21 +4654,16 @@
           <a:lstStyle/>
           <a:p>
             <a:r>
-              <a:rPr kumimoji="1" lang="ja-JP" altLang="en-US"/>
+              <a:rPr lang="ja-JP" altLang="en-US"/>
               <a:t>マスター タイトルの書式設定</a:t>
             </a:r>
-          </a:p>
-        </p:txBody>
-      </p:sp>
-      <p:sp>
-        <p:nvSpPr>
-          <p:cNvPr id="3" name="テキスト プレースホルダー 2">
-            <a:extLst>
-              <a:ext uri="{FF2B5EF4-FFF2-40B4-BE49-F238E27FC236}">
-                <a16:creationId xmlns:a16="http://schemas.microsoft.com/office/drawing/2014/main" id="{F046B49A-6B27-47BF-9A27-D60032D99F31}"/>
-              </a:ext>
-            </a:extLst>
-          </p:cNvPr>
+            <a:endParaRPr lang="en-US" dirty="0"/>
+          </a:p>
+        </p:txBody>
+      </p:sp>
+      <p:sp>
+        <p:nvSpPr>
+          <p:cNvPr id="3" name="Text Placeholder 2"/>
           <p:cNvSpPr>
             <a:spLocks noGrp="1"/>
           </p:cNvSpPr>
@@ -1706,16 +4673,25 @@
         </p:nvSpPr>
         <p:spPr>
           <a:xfrm>
-            <a:off x="839788" y="1681163"/>
-            <a:ext cx="5157787" cy="823912"/>
-          </a:xfrm>
-        </p:spPr>
-        <p:txBody>
-          <a:bodyPr anchor="b"/>
+            <a:off x="1146328" y="2371018"/>
+            <a:ext cx="4873474" cy="679994"/>
+          </a:xfrm>
+        </p:spPr>
+        <p:txBody>
+          <a:bodyPr anchor="b">
+            <a:noAutofit/>
+          </a:bodyPr>
           <a:lstStyle>
             <a:lvl1pPr marL="0" indent="0">
-              <a:buNone/>
-              <a:defRPr sz="2400" b="1"/>
+              <a:lnSpc>
+                <a:spcPct val="85000"/>
+              </a:lnSpc>
+              <a:buNone/>
+              <a:defRPr sz="2600" b="0">
+                <a:solidFill>
+                  <a:schemeClr val="tx1"/>
+                </a:solidFill>
+              </a:defRPr>
             </a:lvl1pPr>
             <a:lvl2pPr marL="457200" indent="0">
               <a:buNone/>
@@ -1753,7 +4729,7 @@
           <a:p>
             <a:pPr lvl="0"/>
             <a:r>
-              <a:rPr kumimoji="1" lang="ja-JP" altLang="en-US"/>
+              <a:rPr lang="ja-JP" altLang="en-US"/>
               <a:t>マスター テキストの書式設定</a:t>
             </a:r>
           </a:p>
@@ -1761,24 +4737,18 @@
       </p:sp>
       <p:sp>
         <p:nvSpPr>
-          <p:cNvPr id="4" name="コンテンツ プレースホルダー 3">
-            <a:extLst>
-              <a:ext uri="{FF2B5EF4-FFF2-40B4-BE49-F238E27FC236}">
-                <a16:creationId xmlns:a16="http://schemas.microsoft.com/office/drawing/2014/main" id="{5EF249FE-D760-4706-87BC-D19625676320}"/>
-              </a:ext>
-            </a:extLst>
-          </p:cNvPr>
-          <p:cNvSpPr>
-            <a:spLocks noGrp="1"/>
-          </p:cNvSpPr>
-          <p:nvPr>
-            <p:ph sz="half" idx="2"/>
-          </p:nvPr>
-        </p:nvSpPr>
-        <p:spPr>
-          <a:xfrm>
-            <a:off x="839788" y="2505075"/>
-            <a:ext cx="5157787" cy="3684588"/>
+          <p:cNvPr id="12" name="Content Placeholder 3"/>
+          <p:cNvSpPr>
+            <a:spLocks noGrp="1"/>
+          </p:cNvSpPr>
+          <p:nvPr>
+            <p:ph sz="quarter" idx="13"/>
+          </p:nvPr>
+        </p:nvSpPr>
+        <p:spPr>
+          <a:xfrm>
+            <a:off x="913774" y="3051012"/>
+            <a:ext cx="5106027" cy="2740187"/>
           </a:xfrm>
         </p:spPr>
         <p:txBody>
@@ -1787,81 +4757,76 @@
           <a:p>
             <a:pPr lvl="0"/>
             <a:r>
-              <a:rPr kumimoji="1" lang="ja-JP" altLang="en-US"/>
+              <a:rPr lang="ja-JP" altLang="en-US"/>
               <a:t>マスター テキストの書式設定</a:t>
             </a:r>
           </a:p>
           <a:p>
             <a:pPr lvl="1"/>
             <a:r>
-              <a:rPr kumimoji="1" lang="ja-JP" altLang="en-US"/>
+              <a:rPr lang="ja-JP" altLang="en-US"/>
               <a:t>第 </a:t>
             </a:r>
             <a:r>
-              <a:rPr kumimoji="1" lang="en-US" altLang="ja-JP"/>
+              <a:rPr lang="en-US" altLang="ja-JP"/>
               <a:t>2 </a:t>
             </a:r>
             <a:r>
-              <a:rPr kumimoji="1" lang="ja-JP" altLang="en-US"/>
+              <a:rPr lang="ja-JP" altLang="en-US"/>
               <a:t>レベル</a:t>
             </a:r>
           </a:p>
           <a:p>
             <a:pPr lvl="2"/>
             <a:r>
-              <a:rPr kumimoji="1" lang="ja-JP" altLang="en-US"/>
+              <a:rPr lang="ja-JP" altLang="en-US"/>
               <a:t>第 </a:t>
             </a:r>
             <a:r>
-              <a:rPr kumimoji="1" lang="en-US" altLang="ja-JP"/>
+              <a:rPr lang="en-US" altLang="ja-JP"/>
               <a:t>3 </a:t>
             </a:r>
             <a:r>
-              <a:rPr kumimoji="1" lang="ja-JP" altLang="en-US"/>
+              <a:rPr lang="ja-JP" altLang="en-US"/>
               <a:t>レベル</a:t>
             </a:r>
           </a:p>
           <a:p>
             <a:pPr lvl="3"/>
             <a:r>
-              <a:rPr kumimoji="1" lang="ja-JP" altLang="en-US"/>
+              <a:rPr lang="ja-JP" altLang="en-US"/>
               <a:t>第 </a:t>
             </a:r>
             <a:r>
-              <a:rPr kumimoji="1" lang="en-US" altLang="ja-JP"/>
+              <a:rPr lang="en-US" altLang="ja-JP"/>
               <a:t>4 </a:t>
             </a:r>
             <a:r>
-              <a:rPr kumimoji="1" lang="ja-JP" altLang="en-US"/>
+              <a:rPr lang="ja-JP" altLang="en-US"/>
               <a:t>レベル</a:t>
             </a:r>
           </a:p>
           <a:p>
             <a:pPr lvl="4"/>
             <a:r>
-              <a:rPr kumimoji="1" lang="ja-JP" altLang="en-US"/>
+              <a:rPr lang="ja-JP" altLang="en-US"/>
               <a:t>第 </a:t>
             </a:r>
             <a:r>
-              <a:rPr kumimoji="1" lang="en-US" altLang="ja-JP"/>
+              <a:rPr lang="en-US" altLang="ja-JP"/>
               <a:t>5 </a:t>
             </a:r>
             <a:r>
-              <a:rPr kumimoji="1" lang="ja-JP" altLang="en-US"/>
+              <a:rPr lang="ja-JP" altLang="en-US"/>
               <a:t>レベル</a:t>
             </a:r>
-          </a:p>
-        </p:txBody>
-      </p:sp>
-      <p:sp>
-        <p:nvSpPr>
-          <p:cNvPr id="5" name="テキスト プレースホルダー 4">
-            <a:extLst>
-              <a:ext uri="{FF2B5EF4-FFF2-40B4-BE49-F238E27FC236}">
-                <a16:creationId xmlns:a16="http://schemas.microsoft.com/office/drawing/2014/main" id="{C4AB6CC9-654D-46FF-BB12-63F0A06D5614}"/>
-              </a:ext>
-            </a:extLst>
-          </p:cNvPr>
+            <a:endParaRPr lang="en-US" dirty="0"/>
+          </a:p>
+        </p:txBody>
+      </p:sp>
+      <p:sp>
+        <p:nvSpPr>
+          <p:cNvPr id="5" name="Text Placeholder 4"/>
           <p:cNvSpPr>
             <a:spLocks noGrp="1"/>
           </p:cNvSpPr>
@@ -1871,16 +4836,25 @@
         </p:nvSpPr>
         <p:spPr>
           <a:xfrm>
-            <a:off x="6172200" y="1681163"/>
-            <a:ext cx="5183188" cy="823912"/>
-          </a:xfrm>
-        </p:spPr>
-        <p:txBody>
-          <a:bodyPr anchor="b"/>
+            <a:off x="6396423" y="2371018"/>
+            <a:ext cx="4881804" cy="679994"/>
+          </a:xfrm>
+        </p:spPr>
+        <p:txBody>
+          <a:bodyPr anchor="b">
+            <a:noAutofit/>
+          </a:bodyPr>
           <a:lstStyle>
             <a:lvl1pPr marL="0" indent="0">
-              <a:buNone/>
-              <a:defRPr sz="2400" b="1"/>
+              <a:lnSpc>
+                <a:spcPct val="85000"/>
+              </a:lnSpc>
+              <a:buNone/>
+              <a:defRPr sz="2600" b="0">
+                <a:solidFill>
+                  <a:schemeClr val="tx1"/>
+                </a:solidFill>
+              </a:defRPr>
             </a:lvl1pPr>
             <a:lvl2pPr marL="457200" indent="0">
               <a:buNone/>
@@ -1918,7 +4892,7 @@
           <a:p>
             <a:pPr lvl="0"/>
             <a:r>
-              <a:rPr kumimoji="1" lang="ja-JP" altLang="en-US"/>
+              <a:rPr lang="ja-JP" altLang="en-US"/>
               <a:t>マスター テキストの書式設定</a:t>
             </a:r>
           </a:p>
@@ -1926,24 +4900,18 @@
       </p:sp>
       <p:sp>
         <p:nvSpPr>
-          <p:cNvPr id="6" name="コンテンツ プレースホルダー 5">
-            <a:extLst>
-              <a:ext uri="{FF2B5EF4-FFF2-40B4-BE49-F238E27FC236}">
-                <a16:creationId xmlns:a16="http://schemas.microsoft.com/office/drawing/2014/main" id="{ED7DB6A7-F4FB-4117-BB95-BE168E842676}"/>
-              </a:ext>
-            </a:extLst>
-          </p:cNvPr>
-          <p:cNvSpPr>
-            <a:spLocks noGrp="1"/>
-          </p:cNvSpPr>
-          <p:nvPr>
-            <p:ph sz="quarter" idx="4"/>
-          </p:nvPr>
-        </p:nvSpPr>
-        <p:spPr>
-          <a:xfrm>
-            <a:off x="6172200" y="2505075"/>
-            <a:ext cx="5183188" cy="3684588"/>
+          <p:cNvPr id="13" name="Content Placeholder 5"/>
+          <p:cNvSpPr>
+            <a:spLocks noGrp="1"/>
+          </p:cNvSpPr>
+          <p:nvPr>
+            <p:ph sz="quarter" idx="14"/>
+          </p:nvPr>
+        </p:nvSpPr>
+        <p:spPr>
+          <a:xfrm>
+            <a:off x="6172200" y="3051012"/>
+            <a:ext cx="5105401" cy="2740187"/>
           </a:xfrm>
         </p:spPr>
         <p:txBody>
@@ -1952,81 +4920,76 @@
           <a:p>
             <a:pPr lvl="0"/>
             <a:r>
-              <a:rPr kumimoji="1" lang="ja-JP" altLang="en-US"/>
+              <a:rPr lang="ja-JP" altLang="en-US"/>
               <a:t>マスター テキストの書式設定</a:t>
             </a:r>
           </a:p>
           <a:p>
             <a:pPr lvl="1"/>
             <a:r>
-              <a:rPr kumimoji="1" lang="ja-JP" altLang="en-US"/>
+              <a:rPr lang="ja-JP" altLang="en-US"/>
               <a:t>第 </a:t>
             </a:r>
             <a:r>
-              <a:rPr kumimoji="1" lang="en-US" altLang="ja-JP"/>
+              <a:rPr lang="en-US" altLang="ja-JP"/>
               <a:t>2 </a:t>
             </a:r>
             <a:r>
-              <a:rPr kumimoji="1" lang="ja-JP" altLang="en-US"/>
+              <a:rPr lang="ja-JP" altLang="en-US"/>
               <a:t>レベル</a:t>
             </a:r>
           </a:p>
           <a:p>
             <a:pPr lvl="2"/>
             <a:r>
-              <a:rPr kumimoji="1" lang="ja-JP" altLang="en-US"/>
+              <a:rPr lang="ja-JP" altLang="en-US"/>
               <a:t>第 </a:t>
             </a:r>
             <a:r>
-              <a:rPr kumimoji="1" lang="en-US" altLang="ja-JP"/>
+              <a:rPr lang="en-US" altLang="ja-JP"/>
               <a:t>3 </a:t>
             </a:r>
             <a:r>
-              <a:rPr kumimoji="1" lang="ja-JP" altLang="en-US"/>
+              <a:rPr lang="ja-JP" altLang="en-US"/>
               <a:t>レベル</a:t>
             </a:r>
           </a:p>
           <a:p>
             <a:pPr lvl="3"/>
             <a:r>
-              <a:rPr kumimoji="1" lang="ja-JP" altLang="en-US"/>
+              <a:rPr lang="ja-JP" altLang="en-US"/>
               <a:t>第 </a:t>
             </a:r>
             <a:r>
-              <a:rPr kumimoji="1" lang="en-US" altLang="ja-JP"/>
+              <a:rPr lang="en-US" altLang="ja-JP"/>
               <a:t>4 </a:t>
             </a:r>
             <a:r>
-              <a:rPr kumimoji="1" lang="ja-JP" altLang="en-US"/>
+              <a:rPr lang="ja-JP" altLang="en-US"/>
               <a:t>レベル</a:t>
             </a:r>
           </a:p>
           <a:p>
             <a:pPr lvl="4"/>
             <a:r>
-              <a:rPr kumimoji="1" lang="ja-JP" altLang="en-US"/>
+              <a:rPr lang="ja-JP" altLang="en-US"/>
               <a:t>第 </a:t>
             </a:r>
             <a:r>
-              <a:rPr kumimoji="1" lang="en-US" altLang="ja-JP"/>
+              <a:rPr lang="en-US" altLang="ja-JP"/>
               <a:t>5 </a:t>
             </a:r>
             <a:r>
-              <a:rPr kumimoji="1" lang="ja-JP" altLang="en-US"/>
+              <a:rPr lang="ja-JP" altLang="en-US"/>
               <a:t>レベル</a:t>
             </a:r>
-          </a:p>
-        </p:txBody>
-      </p:sp>
-      <p:sp>
-        <p:nvSpPr>
-          <p:cNvPr id="7" name="日付プレースホルダー 6">
-            <a:extLst>
-              <a:ext uri="{FF2B5EF4-FFF2-40B4-BE49-F238E27FC236}">
-                <a16:creationId xmlns:a16="http://schemas.microsoft.com/office/drawing/2014/main" id="{32C3C2C7-2219-4BA2-BB43-9FF6FB0E254D}"/>
-              </a:ext>
-            </a:extLst>
-          </p:cNvPr>
+            <a:endParaRPr lang="en-US" dirty="0"/>
+          </a:p>
+        </p:txBody>
+      </p:sp>
+      <p:sp>
+        <p:nvSpPr>
+          <p:cNvPr id="7" name="Date Placeholder 6"/>
           <p:cNvSpPr>
             <a:spLocks noGrp="1"/>
           </p:cNvSpPr>
@@ -2041,7 +5004,7 @@
           <a:p>
             <a:fld id="{5F305778-E222-4C85-8E95-A8CE1D926E62}" type="datetimeFigureOut">
               <a:rPr kumimoji="1" lang="ja-JP" altLang="en-US" smtClean="0"/>
-              <a:t>2025/10/29</a:t>
+              <a:t>2025/10/31</a:t>
             </a:fld>
             <a:endParaRPr kumimoji="1" lang="ja-JP" altLang="en-US"/>
           </a:p>
@@ -2049,13 +5012,7 @@
       </p:sp>
       <p:sp>
         <p:nvSpPr>
-          <p:cNvPr id="8" name="フッター プレースホルダー 7">
-            <a:extLst>
-              <a:ext uri="{FF2B5EF4-FFF2-40B4-BE49-F238E27FC236}">
-                <a16:creationId xmlns:a16="http://schemas.microsoft.com/office/drawing/2014/main" id="{CF2AA706-B886-4851-972D-D21B0C878826}"/>
-              </a:ext>
-            </a:extLst>
-          </p:cNvPr>
+          <p:cNvPr id="8" name="Footer Placeholder 7"/>
           <p:cNvSpPr>
             <a:spLocks noGrp="1"/>
           </p:cNvSpPr>
@@ -2074,13 +5031,7 @@
       </p:sp>
       <p:sp>
         <p:nvSpPr>
-          <p:cNvPr id="9" name="スライド番号プレースホルダー 8">
-            <a:extLst>
-              <a:ext uri="{FF2B5EF4-FFF2-40B4-BE49-F238E27FC236}">
-                <a16:creationId xmlns:a16="http://schemas.microsoft.com/office/drawing/2014/main" id="{CEF43C4D-5E09-4535-BFB0-B15FC05D3C2B}"/>
-              </a:ext>
-            </a:extLst>
-          </p:cNvPr>
+          <p:cNvPr id="9" name="Slide Number Placeholder 8"/>
           <p:cNvSpPr>
             <a:spLocks noGrp="1"/>
           </p:cNvSpPr>
@@ -2104,7 +5055,7 @@
     </p:spTree>
     <p:extLst>
       <p:ext uri="{BB962C8B-B14F-4D97-AF65-F5344CB8AC3E}">
-        <p14:creationId xmlns:p14="http://schemas.microsoft.com/office/powerpoint/2010/main" val="807524235"/>
+        <p14:creationId xmlns:p14="http://schemas.microsoft.com/office/powerpoint/2010/main" val="2531057874"/>
       </p:ext>
     </p:extLst>
   </p:cSld>
@@ -2131,15 +5082,39 @@
           <a:chExt cx="0" cy="0"/>
         </a:xfrm>
       </p:grpSpPr>
-      <p:sp>
-        <p:nvSpPr>
-          <p:cNvPr id="2" name="タイトル 1">
+      <p:pic>
+        <p:nvPicPr>
+          <p:cNvPr id="8" name="Picture 7" descr="Droplets-HD-Content-R1d.png"/>
+          <p:cNvPicPr>
+            <a:picLocks noChangeAspect="1"/>
+          </p:cNvPicPr>
+          <p:nvPr/>
+        </p:nvPicPr>
+        <p:blipFill>
+          <a:blip r:embed="rId2">
             <a:extLst>
-              <a:ext uri="{FF2B5EF4-FFF2-40B4-BE49-F238E27FC236}">
-                <a16:creationId xmlns:a16="http://schemas.microsoft.com/office/drawing/2014/main" id="{7D545CE4-0E1F-460E-82DE-DEF8050D074F}"/>
+              <a:ext uri="{28A0092B-C50C-407E-A947-70E740481C1C}">
+                <a14:useLocalDpi xmlns:a14="http://schemas.microsoft.com/office/drawing/2010/main" val="0"/>
               </a:ext>
             </a:extLst>
-          </p:cNvPr>
+          </a:blip>
+          <a:stretch>
+            <a:fillRect/>
+          </a:stretch>
+        </p:blipFill>
+        <p:spPr>
+          <a:xfrm>
+            <a:off x="0" y="0"/>
+            <a:ext cx="12192000" cy="6858000"/>
+          </a:xfrm>
+          <a:prstGeom prst="rect">
+            <a:avLst/>
+          </a:prstGeom>
+        </p:spPr>
+      </p:pic>
+      <p:sp>
+        <p:nvSpPr>
+          <p:cNvPr id="2" name="Title 1"/>
           <p:cNvSpPr>
             <a:spLocks noGrp="1"/>
           </p:cNvSpPr>
@@ -2153,21 +5128,16 @@
           <a:lstStyle/>
           <a:p>
             <a:r>
-              <a:rPr kumimoji="1" lang="ja-JP" altLang="en-US"/>
+              <a:rPr lang="ja-JP" altLang="en-US"/>
               <a:t>マスター タイトルの書式設定</a:t>
             </a:r>
-          </a:p>
-        </p:txBody>
-      </p:sp>
-      <p:sp>
-        <p:nvSpPr>
-          <p:cNvPr id="3" name="日付プレースホルダー 2">
-            <a:extLst>
-              <a:ext uri="{FF2B5EF4-FFF2-40B4-BE49-F238E27FC236}">
-                <a16:creationId xmlns:a16="http://schemas.microsoft.com/office/drawing/2014/main" id="{C9691A55-ED78-4BD7-BB97-31E763C98D2A}"/>
-              </a:ext>
-            </a:extLst>
-          </p:cNvPr>
+            <a:endParaRPr lang="en-US" dirty="0"/>
+          </a:p>
+        </p:txBody>
+      </p:sp>
+      <p:sp>
+        <p:nvSpPr>
+          <p:cNvPr id="3" name="Date Placeholder 2"/>
           <p:cNvSpPr>
             <a:spLocks noGrp="1"/>
           </p:cNvSpPr>
@@ -2182,7 +5152,7 @@
           <a:p>
             <a:fld id="{5F305778-E222-4C85-8E95-A8CE1D926E62}" type="datetimeFigureOut">
               <a:rPr kumimoji="1" lang="ja-JP" altLang="en-US" smtClean="0"/>
-              <a:t>2025/10/29</a:t>
+              <a:t>2025/10/31</a:t>
             </a:fld>
             <a:endParaRPr kumimoji="1" lang="ja-JP" altLang="en-US"/>
           </a:p>
@@ -2190,13 +5160,7 @@
       </p:sp>
       <p:sp>
         <p:nvSpPr>
-          <p:cNvPr id="4" name="フッター プレースホルダー 3">
-            <a:extLst>
-              <a:ext uri="{FF2B5EF4-FFF2-40B4-BE49-F238E27FC236}">
-                <a16:creationId xmlns:a16="http://schemas.microsoft.com/office/drawing/2014/main" id="{46E0151B-8468-4662-BAE0-02E2886D2D14}"/>
-              </a:ext>
-            </a:extLst>
-          </p:cNvPr>
+          <p:cNvPr id="4" name="Footer Placeholder 3"/>
           <p:cNvSpPr>
             <a:spLocks noGrp="1"/>
           </p:cNvSpPr>
@@ -2215,13 +5179,7 @@
       </p:sp>
       <p:sp>
         <p:nvSpPr>
-          <p:cNvPr id="5" name="スライド番号プレースホルダー 4">
-            <a:extLst>
-              <a:ext uri="{FF2B5EF4-FFF2-40B4-BE49-F238E27FC236}">
-                <a16:creationId xmlns:a16="http://schemas.microsoft.com/office/drawing/2014/main" id="{F946111D-EDC8-4A9F-93CD-9F0271DF1AD9}"/>
-              </a:ext>
-            </a:extLst>
-          </p:cNvPr>
+          <p:cNvPr id="5" name="Slide Number Placeholder 4"/>
           <p:cNvSpPr>
             <a:spLocks noGrp="1"/>
           </p:cNvSpPr>
@@ -2245,7 +5203,7 @@
     </p:spTree>
     <p:extLst>
       <p:ext uri="{BB962C8B-B14F-4D97-AF65-F5344CB8AC3E}">
-        <p14:creationId xmlns:p14="http://schemas.microsoft.com/office/powerpoint/2010/main" val="3977112130"/>
+        <p14:creationId xmlns:p14="http://schemas.microsoft.com/office/powerpoint/2010/main" val="1932509090"/>
       </p:ext>
     </p:extLst>
   </p:cSld>
@@ -2272,15 +5230,39 @@
           <a:chExt cx="0" cy="0"/>
         </a:xfrm>
       </p:grpSpPr>
-      <p:sp>
-        <p:nvSpPr>
-          <p:cNvPr id="2" name="日付プレースホルダー 1">
+      <p:pic>
+        <p:nvPicPr>
+          <p:cNvPr id="7" name="Picture 6" descr="Droplets-HD-Content-R1d.png"/>
+          <p:cNvPicPr>
+            <a:picLocks noChangeAspect="1"/>
+          </p:cNvPicPr>
+          <p:nvPr/>
+        </p:nvPicPr>
+        <p:blipFill>
+          <a:blip r:embed="rId2">
             <a:extLst>
-              <a:ext uri="{FF2B5EF4-FFF2-40B4-BE49-F238E27FC236}">
-                <a16:creationId xmlns:a16="http://schemas.microsoft.com/office/drawing/2014/main" id="{2EA7CFEE-200C-4238-91C0-275AD8A6C9CC}"/>
+              <a:ext uri="{28A0092B-C50C-407E-A947-70E740481C1C}">
+                <a14:useLocalDpi xmlns:a14="http://schemas.microsoft.com/office/drawing/2010/main" val="0"/>
               </a:ext>
             </a:extLst>
-          </p:cNvPr>
+          </a:blip>
+          <a:stretch>
+            <a:fillRect/>
+          </a:stretch>
+        </p:blipFill>
+        <p:spPr>
+          <a:xfrm>
+            <a:off x="0" y="0"/>
+            <a:ext cx="12192000" cy="6858000"/>
+          </a:xfrm>
+          <a:prstGeom prst="rect">
+            <a:avLst/>
+          </a:prstGeom>
+        </p:spPr>
+      </p:pic>
+      <p:sp>
+        <p:nvSpPr>
+          <p:cNvPr id="2" name="Date Placeholder 1"/>
           <p:cNvSpPr>
             <a:spLocks noGrp="1"/>
           </p:cNvSpPr>
@@ -2295,7 +5277,7 @@
           <a:p>
             <a:fld id="{5F305778-E222-4C85-8E95-A8CE1D926E62}" type="datetimeFigureOut">
               <a:rPr kumimoji="1" lang="ja-JP" altLang="en-US" smtClean="0"/>
-              <a:t>2025/10/29</a:t>
+              <a:t>2025/10/31</a:t>
             </a:fld>
             <a:endParaRPr kumimoji="1" lang="ja-JP" altLang="en-US"/>
           </a:p>
@@ -2303,13 +5285,7 @@
       </p:sp>
       <p:sp>
         <p:nvSpPr>
-          <p:cNvPr id="3" name="フッター プレースホルダー 2">
-            <a:extLst>
-              <a:ext uri="{FF2B5EF4-FFF2-40B4-BE49-F238E27FC236}">
-                <a16:creationId xmlns:a16="http://schemas.microsoft.com/office/drawing/2014/main" id="{C067423B-4B6E-4792-B867-CD4F482C59A4}"/>
-              </a:ext>
-            </a:extLst>
-          </p:cNvPr>
+          <p:cNvPr id="3" name="Footer Placeholder 2"/>
           <p:cNvSpPr>
             <a:spLocks noGrp="1"/>
           </p:cNvSpPr>
@@ -2328,13 +5304,7 @@
       </p:sp>
       <p:sp>
         <p:nvSpPr>
-          <p:cNvPr id="4" name="スライド番号プレースホルダー 3">
-            <a:extLst>
-              <a:ext uri="{FF2B5EF4-FFF2-40B4-BE49-F238E27FC236}">
-                <a16:creationId xmlns:a16="http://schemas.microsoft.com/office/drawing/2014/main" id="{FE9E63E8-388C-4CF3-8426-A48435F4E678}"/>
-              </a:ext>
-            </a:extLst>
-          </p:cNvPr>
+          <p:cNvPr id="4" name="Slide Number Placeholder 3"/>
           <p:cNvSpPr>
             <a:spLocks noGrp="1"/>
           </p:cNvSpPr>
@@ -2358,7 +5328,7 @@
     </p:spTree>
     <p:extLst>
       <p:ext uri="{BB962C8B-B14F-4D97-AF65-F5344CB8AC3E}">
-        <p14:creationId xmlns:p14="http://schemas.microsoft.com/office/powerpoint/2010/main" val="940952450"/>
+        <p14:creationId xmlns:p14="http://schemas.microsoft.com/office/powerpoint/2010/main" val="3352814623"/>
       </p:ext>
     </p:extLst>
   </p:cSld>
@@ -2385,15 +5355,39 @@
           <a:chExt cx="0" cy="0"/>
         </a:xfrm>
       </p:grpSpPr>
-      <p:sp>
-        <p:nvSpPr>
-          <p:cNvPr id="2" name="タイトル 1">
+      <p:pic>
+        <p:nvPicPr>
+          <p:cNvPr id="11" name="Picture 10" descr="Droplets-HD-Content-R1d.png"/>
+          <p:cNvPicPr>
+            <a:picLocks noChangeAspect="1"/>
+          </p:cNvPicPr>
+          <p:nvPr/>
+        </p:nvPicPr>
+        <p:blipFill>
+          <a:blip r:embed="rId2">
             <a:extLst>
-              <a:ext uri="{FF2B5EF4-FFF2-40B4-BE49-F238E27FC236}">
-                <a16:creationId xmlns:a16="http://schemas.microsoft.com/office/drawing/2014/main" id="{2D54EF35-BAA4-4939-A07B-4B71D7BA476F}"/>
+              <a:ext uri="{28A0092B-C50C-407E-A947-70E740481C1C}">
+                <a14:useLocalDpi xmlns:a14="http://schemas.microsoft.com/office/drawing/2010/main" val="0"/>
               </a:ext>
             </a:extLst>
-          </p:cNvPr>
+          </a:blip>
+          <a:stretch>
+            <a:fillRect/>
+          </a:stretch>
+        </p:blipFill>
+        <p:spPr>
+          <a:xfrm>
+            <a:off x="0" y="0"/>
+            <a:ext cx="12192000" cy="6858000"/>
+          </a:xfrm>
+          <a:prstGeom prst="rect">
+            <a:avLst/>
+          </a:prstGeom>
+        </p:spPr>
+      </p:pic>
+      <p:sp>
+        <p:nvSpPr>
+          <p:cNvPr id="2" name="Title 1"/>
           <p:cNvSpPr>
             <a:spLocks noGrp="1"/>
           </p:cNvSpPr>
@@ -2403,173 +5397,135 @@
         </p:nvSpPr>
         <p:spPr>
           <a:xfrm>
-            <a:off x="839788" y="457200"/>
-            <a:ext cx="3932237" cy="1600200"/>
+            <a:off x="913775" y="609600"/>
+            <a:ext cx="3935688" cy="2023252"/>
           </a:xfrm>
         </p:spPr>
         <p:txBody>
           <a:bodyPr anchor="b"/>
           <a:lstStyle>
-            <a:lvl1pPr>
+            <a:lvl1pPr algn="ctr">
               <a:defRPr sz="3200"/>
             </a:lvl1pPr>
           </a:lstStyle>
           <a:p>
             <a:r>
-              <a:rPr kumimoji="1" lang="ja-JP" altLang="en-US"/>
+              <a:rPr lang="ja-JP" altLang="en-US"/>
               <a:t>マスター タイトルの書式設定</a:t>
             </a:r>
-          </a:p>
-        </p:txBody>
-      </p:sp>
-      <p:sp>
-        <p:nvSpPr>
-          <p:cNvPr id="3" name="コンテンツ プレースホルダー 2">
-            <a:extLst>
-              <a:ext uri="{FF2B5EF4-FFF2-40B4-BE49-F238E27FC236}">
-                <a16:creationId xmlns:a16="http://schemas.microsoft.com/office/drawing/2014/main" id="{D6FB3C25-1506-44F4-BC36-4148D7E26D8E}"/>
-              </a:ext>
-            </a:extLst>
-          </p:cNvPr>
-          <p:cNvSpPr>
-            <a:spLocks noGrp="1"/>
-          </p:cNvSpPr>
-          <p:nvPr>
-            <p:ph idx="1"/>
-          </p:nvPr>
-        </p:nvSpPr>
-        <p:spPr>
-          <a:xfrm>
-            <a:off x="5183188" y="987425"/>
-            <a:ext cx="6172200" cy="4873625"/>
+            <a:endParaRPr lang="en-US" dirty="0"/>
+          </a:p>
+        </p:txBody>
+      </p:sp>
+      <p:sp>
+        <p:nvSpPr>
+          <p:cNvPr id="10" name="Content Placeholder 2"/>
+          <p:cNvSpPr>
+            <a:spLocks noGrp="1"/>
+          </p:cNvSpPr>
+          <p:nvPr>
+            <p:ph sz="quarter" idx="13"/>
+          </p:nvPr>
+        </p:nvSpPr>
+        <p:spPr>
+          <a:xfrm>
+            <a:off x="5078062" y="609600"/>
+            <a:ext cx="6200163" cy="5181599"/>
+          </a:xfrm>
+        </p:spPr>
+        <p:txBody>
+          <a:bodyPr/>
+          <a:lstStyle/>
+          <a:p>
+            <a:pPr lvl="0"/>
+            <a:r>
+              <a:rPr lang="ja-JP" altLang="en-US"/>
+              <a:t>マスター テキストの書式設定</a:t>
+            </a:r>
+          </a:p>
+          <a:p>
+            <a:pPr lvl="1"/>
+            <a:r>
+              <a:rPr lang="ja-JP" altLang="en-US"/>
+              <a:t>第 </a:t>
+            </a:r>
+            <a:r>
+              <a:rPr lang="en-US" altLang="ja-JP"/>
+              <a:t>2 </a:t>
+            </a:r>
+            <a:r>
+              <a:rPr lang="ja-JP" altLang="en-US"/>
+              <a:t>レベル</a:t>
+            </a:r>
+          </a:p>
+          <a:p>
+            <a:pPr lvl="2"/>
+            <a:r>
+              <a:rPr lang="ja-JP" altLang="en-US"/>
+              <a:t>第 </a:t>
+            </a:r>
+            <a:r>
+              <a:rPr lang="en-US" altLang="ja-JP"/>
+              <a:t>3 </a:t>
+            </a:r>
+            <a:r>
+              <a:rPr lang="ja-JP" altLang="en-US"/>
+              <a:t>レベル</a:t>
+            </a:r>
+          </a:p>
+          <a:p>
+            <a:pPr lvl="3"/>
+            <a:r>
+              <a:rPr lang="ja-JP" altLang="en-US"/>
+              <a:t>第 </a:t>
+            </a:r>
+            <a:r>
+              <a:rPr lang="en-US" altLang="ja-JP"/>
+              <a:t>4 </a:t>
+            </a:r>
+            <a:r>
+              <a:rPr lang="ja-JP" altLang="en-US"/>
+              <a:t>レベル</a:t>
+            </a:r>
+          </a:p>
+          <a:p>
+            <a:pPr lvl="4"/>
+            <a:r>
+              <a:rPr lang="ja-JP" altLang="en-US"/>
+              <a:t>第 </a:t>
+            </a:r>
+            <a:r>
+              <a:rPr lang="en-US" altLang="ja-JP"/>
+              <a:t>5 </a:t>
+            </a:r>
+            <a:r>
+              <a:rPr lang="ja-JP" altLang="en-US"/>
+              <a:t>レベル</a:t>
+            </a:r>
+            <a:endParaRPr lang="en-US" dirty="0"/>
+          </a:p>
+        </p:txBody>
+      </p:sp>
+      <p:sp>
+        <p:nvSpPr>
+          <p:cNvPr id="4" name="Text Placeholder 3"/>
+          <p:cNvSpPr>
+            <a:spLocks noGrp="1"/>
+          </p:cNvSpPr>
+          <p:nvPr>
+            <p:ph type="body" sz="half" idx="2"/>
+          </p:nvPr>
+        </p:nvSpPr>
+        <p:spPr>
+          <a:xfrm>
+            <a:off x="913774" y="2632852"/>
+            <a:ext cx="3935689" cy="3158348"/>
           </a:xfrm>
         </p:spPr>
         <p:txBody>
           <a:bodyPr/>
           <a:lstStyle>
-            <a:lvl1pPr>
-              <a:defRPr sz="3200"/>
-            </a:lvl1pPr>
-            <a:lvl2pPr>
-              <a:defRPr sz="2800"/>
-            </a:lvl2pPr>
-            <a:lvl3pPr>
-              <a:defRPr sz="2400"/>
-            </a:lvl3pPr>
-            <a:lvl4pPr>
-              <a:defRPr sz="2000"/>
-            </a:lvl4pPr>
-            <a:lvl5pPr>
-              <a:defRPr sz="2000"/>
-            </a:lvl5pPr>
-            <a:lvl6pPr>
-              <a:defRPr sz="2000"/>
-            </a:lvl6pPr>
-            <a:lvl7pPr>
-              <a:defRPr sz="2000"/>
-            </a:lvl7pPr>
-            <a:lvl8pPr>
-              <a:defRPr sz="2000"/>
-            </a:lvl8pPr>
-            <a:lvl9pPr>
-              <a:defRPr sz="2000"/>
-            </a:lvl9pPr>
-          </a:lstStyle>
-          <a:p>
-            <a:pPr lvl="0"/>
-            <a:r>
-              <a:rPr kumimoji="1" lang="ja-JP" altLang="en-US"/>
-              <a:t>マスター テキストの書式設定</a:t>
-            </a:r>
-          </a:p>
-          <a:p>
-            <a:pPr lvl="1"/>
-            <a:r>
-              <a:rPr kumimoji="1" lang="ja-JP" altLang="en-US"/>
-              <a:t>第 </a:t>
-            </a:r>
-            <a:r>
-              <a:rPr kumimoji="1" lang="en-US" altLang="ja-JP"/>
-              <a:t>2 </a:t>
-            </a:r>
-            <a:r>
-              <a:rPr kumimoji="1" lang="ja-JP" altLang="en-US"/>
-              <a:t>レベル</a:t>
-            </a:r>
-          </a:p>
-          <a:p>
-            <a:pPr lvl="2"/>
-            <a:r>
-              <a:rPr kumimoji="1" lang="ja-JP" altLang="en-US"/>
-              <a:t>第 </a:t>
-            </a:r>
-            <a:r>
-              <a:rPr kumimoji="1" lang="en-US" altLang="ja-JP"/>
-              <a:t>3 </a:t>
-            </a:r>
-            <a:r>
-              <a:rPr kumimoji="1" lang="ja-JP" altLang="en-US"/>
-              <a:t>レベル</a:t>
-            </a:r>
-          </a:p>
-          <a:p>
-            <a:pPr lvl="3"/>
-            <a:r>
-              <a:rPr kumimoji="1" lang="ja-JP" altLang="en-US"/>
-              <a:t>第 </a:t>
-            </a:r>
-            <a:r>
-              <a:rPr kumimoji="1" lang="en-US" altLang="ja-JP"/>
-              <a:t>4 </a:t>
-            </a:r>
-            <a:r>
-              <a:rPr kumimoji="1" lang="ja-JP" altLang="en-US"/>
-              <a:t>レベル</a:t>
-            </a:r>
-          </a:p>
-          <a:p>
-            <a:pPr lvl="4"/>
-            <a:r>
-              <a:rPr kumimoji="1" lang="ja-JP" altLang="en-US"/>
-              <a:t>第 </a:t>
-            </a:r>
-            <a:r>
-              <a:rPr kumimoji="1" lang="en-US" altLang="ja-JP"/>
-              <a:t>5 </a:t>
-            </a:r>
-            <a:r>
-              <a:rPr kumimoji="1" lang="ja-JP" altLang="en-US"/>
-              <a:t>レベル</a:t>
-            </a:r>
-          </a:p>
-        </p:txBody>
-      </p:sp>
-      <p:sp>
-        <p:nvSpPr>
-          <p:cNvPr id="4" name="テキスト プレースホルダー 3">
-            <a:extLst>
-              <a:ext uri="{FF2B5EF4-FFF2-40B4-BE49-F238E27FC236}">
-                <a16:creationId xmlns:a16="http://schemas.microsoft.com/office/drawing/2014/main" id="{07FDD74B-4DF8-4283-83A4-82C8DD84A969}"/>
-              </a:ext>
-            </a:extLst>
-          </p:cNvPr>
-          <p:cNvSpPr>
-            <a:spLocks noGrp="1"/>
-          </p:cNvSpPr>
-          <p:nvPr>
-            <p:ph type="body" sz="half" idx="2"/>
-          </p:nvPr>
-        </p:nvSpPr>
-        <p:spPr>
-          <a:xfrm>
-            <a:off x="839788" y="2057400"/>
-            <a:ext cx="3932237" cy="3811588"/>
-          </a:xfrm>
-        </p:spPr>
-        <p:txBody>
-          <a:bodyPr/>
-          <a:lstStyle>
-            <a:lvl1pPr marL="0" indent="0">
+            <a:lvl1pPr marL="0" indent="0" algn="ctr">
               <a:buNone/>
               <a:defRPr sz="1600"/>
             </a:lvl1pPr>
@@ -2609,7 +5565,7 @@
           <a:p>
             <a:pPr lvl="0"/>
             <a:r>
-              <a:rPr kumimoji="1" lang="ja-JP" altLang="en-US"/>
+              <a:rPr lang="ja-JP" altLang="en-US"/>
               <a:t>マスター テキストの書式設定</a:t>
             </a:r>
           </a:p>
@@ -2617,13 +5573,7 @@
       </p:sp>
       <p:sp>
         <p:nvSpPr>
-          <p:cNvPr id="5" name="日付プレースホルダー 4">
-            <a:extLst>
-              <a:ext uri="{FF2B5EF4-FFF2-40B4-BE49-F238E27FC236}">
-                <a16:creationId xmlns:a16="http://schemas.microsoft.com/office/drawing/2014/main" id="{F3418D43-42AE-489B-ADAB-E1A59D72C4F3}"/>
-              </a:ext>
-            </a:extLst>
-          </p:cNvPr>
+          <p:cNvPr id="5" name="Date Placeholder 4"/>
           <p:cNvSpPr>
             <a:spLocks noGrp="1"/>
           </p:cNvSpPr>
@@ -2638,7 +5588,7 @@
           <a:p>
             <a:fld id="{5F305778-E222-4C85-8E95-A8CE1D926E62}" type="datetimeFigureOut">
               <a:rPr kumimoji="1" lang="ja-JP" altLang="en-US" smtClean="0"/>
-              <a:t>2025/10/29</a:t>
+              <a:t>2025/10/31</a:t>
             </a:fld>
             <a:endParaRPr kumimoji="1" lang="ja-JP" altLang="en-US"/>
           </a:p>
@@ -2646,13 +5596,7 @@
       </p:sp>
       <p:sp>
         <p:nvSpPr>
-          <p:cNvPr id="6" name="フッター プレースホルダー 5">
-            <a:extLst>
-              <a:ext uri="{FF2B5EF4-FFF2-40B4-BE49-F238E27FC236}">
-                <a16:creationId xmlns:a16="http://schemas.microsoft.com/office/drawing/2014/main" id="{44B7D0AA-1054-4296-9F3E-890414E75B64}"/>
-              </a:ext>
-            </a:extLst>
-          </p:cNvPr>
+          <p:cNvPr id="6" name="Footer Placeholder 5"/>
           <p:cNvSpPr>
             <a:spLocks noGrp="1"/>
           </p:cNvSpPr>
@@ -2671,13 +5615,7 @@
       </p:sp>
       <p:sp>
         <p:nvSpPr>
-          <p:cNvPr id="7" name="スライド番号プレースホルダー 6">
-            <a:extLst>
-              <a:ext uri="{FF2B5EF4-FFF2-40B4-BE49-F238E27FC236}">
-                <a16:creationId xmlns:a16="http://schemas.microsoft.com/office/drawing/2014/main" id="{6E36059E-9AC3-4BE1-A47B-B536FE20C984}"/>
-              </a:ext>
-            </a:extLst>
-          </p:cNvPr>
+          <p:cNvPr id="7" name="Slide Number Placeholder 6"/>
           <p:cNvSpPr>
             <a:spLocks noGrp="1"/>
           </p:cNvSpPr>
@@ -2701,7 +5639,7 @@
     </p:spTree>
     <p:extLst>
       <p:ext uri="{BB962C8B-B14F-4D97-AF65-F5344CB8AC3E}">
-        <p14:creationId xmlns:p14="http://schemas.microsoft.com/office/powerpoint/2010/main" val="2329263450"/>
+        <p14:creationId xmlns:p14="http://schemas.microsoft.com/office/powerpoint/2010/main" val="3447494434"/>
       </p:ext>
     </p:extLst>
   </p:cSld>
@@ -2728,15 +5666,39 @@
           <a:chExt cx="0" cy="0"/>
         </a:xfrm>
       </p:grpSpPr>
-      <p:sp>
-        <p:nvSpPr>
-          <p:cNvPr id="2" name="タイトル 1">
+      <p:pic>
+        <p:nvPicPr>
+          <p:cNvPr id="10" name="Picture 9" descr="Droplets-HD-Content-R1d.png"/>
+          <p:cNvPicPr>
+            <a:picLocks noChangeAspect="1"/>
+          </p:cNvPicPr>
+          <p:nvPr/>
+        </p:nvPicPr>
+        <p:blipFill>
+          <a:blip r:embed="rId2">
             <a:extLst>
-              <a:ext uri="{FF2B5EF4-FFF2-40B4-BE49-F238E27FC236}">
-                <a16:creationId xmlns:a16="http://schemas.microsoft.com/office/drawing/2014/main" id="{67A5E258-3332-4C9B-ADA1-679268126B62}"/>
+              <a:ext uri="{28A0092B-C50C-407E-A947-70E740481C1C}">
+                <a14:useLocalDpi xmlns:a14="http://schemas.microsoft.com/office/drawing/2010/main" val="0"/>
               </a:ext>
             </a:extLst>
-          </p:cNvPr>
+          </a:blip>
+          <a:stretch>
+            <a:fillRect/>
+          </a:stretch>
+        </p:blipFill>
+        <p:spPr>
+          <a:xfrm>
+            <a:off x="0" y="0"/>
+            <a:ext cx="12192000" cy="6858000"/>
+          </a:xfrm>
+          <a:prstGeom prst="rect">
+            <a:avLst/>
+          </a:prstGeom>
+        </p:spPr>
+      </p:pic>
+      <p:sp>
+        <p:nvSpPr>
+          <p:cNvPr id="2" name="Title 1"/>
           <p:cNvSpPr>
             <a:spLocks noGrp="1"/>
           </p:cNvSpPr>
@@ -2746,36 +5708,31 @@
         </p:nvSpPr>
         <p:spPr>
           <a:xfrm>
-            <a:off x="839788" y="457200"/>
-            <a:ext cx="3932237" cy="1600200"/>
+            <a:off x="913774" y="609600"/>
+            <a:ext cx="5934969" cy="2023254"/>
           </a:xfrm>
         </p:spPr>
         <p:txBody>
           <a:bodyPr anchor="b"/>
           <a:lstStyle>
-            <a:lvl1pPr>
+            <a:lvl1pPr algn="ctr">
               <a:defRPr sz="3200"/>
             </a:lvl1pPr>
           </a:lstStyle>
           <a:p>
             <a:r>
-              <a:rPr kumimoji="1" lang="ja-JP" altLang="en-US"/>
+              <a:rPr lang="ja-JP" altLang="en-US"/>
               <a:t>マスター タイトルの書式設定</a:t>
             </a:r>
-          </a:p>
-        </p:txBody>
-      </p:sp>
-      <p:sp>
-        <p:nvSpPr>
-          <p:cNvPr id="3" name="図プレースホルダー 2">
-            <a:extLst>
-              <a:ext uri="{FF2B5EF4-FFF2-40B4-BE49-F238E27FC236}">
-                <a16:creationId xmlns:a16="http://schemas.microsoft.com/office/drawing/2014/main" id="{E8A4E8E9-7994-417F-94E6-E35BB82E6668}"/>
-              </a:ext>
-            </a:extLst>
-          </p:cNvPr>
-          <p:cNvSpPr>
-            <a:spLocks noGrp="1"/>
+            <a:endParaRPr lang="en-US" dirty="0"/>
+          </a:p>
+        </p:txBody>
+      </p:sp>
+      <p:sp>
+        <p:nvSpPr>
+          <p:cNvPr id="3" name="Picture Placeholder 2"/>
+          <p:cNvSpPr>
+            <a:spLocks noGrp="1" noChangeAspect="1"/>
           </p:cNvSpPr>
           <p:nvPr>
             <p:ph type="pic" idx="1"/>
@@ -2783,12 +5740,37 @@
         </p:nvSpPr>
         <p:spPr>
           <a:xfrm>
-            <a:off x="5183188" y="987425"/>
-            <a:ext cx="6172200" cy="4873625"/>
-          </a:xfrm>
-        </p:spPr>
-        <p:txBody>
-          <a:bodyPr/>
+            <a:off x="7424803" y="609601"/>
+            <a:ext cx="3255358" cy="5181600"/>
+          </a:xfrm>
+          <a:prstGeom prst="roundRect">
+            <a:avLst>
+              <a:gd name="adj" fmla="val 4943"/>
+            </a:avLst>
+          </a:prstGeom>
+          <a:noFill/>
+          <a:ln w="82550" cap="sq">
+            <a:solidFill>
+              <a:srgbClr val="EAEAEA"/>
+            </a:solidFill>
+            <a:miter lim="800000"/>
+          </a:ln>
+          <a:effectLst/>
+          <a:scene3d>
+            <a:camera prst="orthographicFront"/>
+            <a:lightRig rig="threePt" dir="t">
+              <a:rot lat="0" lon="0" rev="2700000"/>
+            </a:lightRig>
+          </a:scene3d>
+          <a:sp3d contourW="6350">
+            <a:bevelT h="38100"/>
+            <a:contourClr>
+              <a:srgbClr val="C0C0C0"/>
+            </a:contourClr>
+          </a:sp3d>
+        </p:spPr>
+        <p:txBody>
+          <a:bodyPr anchor="t"/>
           <a:lstStyle>
             <a:lvl1pPr marL="0" indent="0">
               <a:buNone/>
@@ -2828,19 +5810,17 @@
             </a:lvl9pPr>
           </a:lstStyle>
           <a:p>
-            <a:endParaRPr kumimoji="1" lang="ja-JP" altLang="en-US"/>
-          </a:p>
-        </p:txBody>
-      </p:sp>
-      <p:sp>
-        <p:nvSpPr>
-          <p:cNvPr id="4" name="テキスト プレースホルダー 3">
-            <a:extLst>
-              <a:ext uri="{FF2B5EF4-FFF2-40B4-BE49-F238E27FC236}">
-                <a16:creationId xmlns:a16="http://schemas.microsoft.com/office/drawing/2014/main" id="{791C35BD-3B5A-4BEA-8F1B-49B026C58316}"/>
-              </a:ext>
-            </a:extLst>
-          </p:cNvPr>
+            <a:r>
+              <a:rPr lang="ja-JP" altLang="en-US"/>
+              <a:t>アイコンをクリックして図を追加</a:t>
+            </a:r>
+            <a:endParaRPr lang="en-US" dirty="0"/>
+          </a:p>
+        </p:txBody>
+      </p:sp>
+      <p:sp>
+        <p:nvSpPr>
+          <p:cNvPr id="4" name="Text Placeholder 3"/>
           <p:cNvSpPr>
             <a:spLocks noGrp="1"/>
           </p:cNvSpPr>
@@ -2850,14 +5830,14 @@
         </p:nvSpPr>
         <p:spPr>
           <a:xfrm>
-            <a:off x="839788" y="2057400"/>
-            <a:ext cx="3932237" cy="3811588"/>
+            <a:off x="913794" y="2632852"/>
+            <a:ext cx="5934949" cy="3158347"/>
           </a:xfrm>
         </p:spPr>
         <p:txBody>
           <a:bodyPr/>
           <a:lstStyle>
-            <a:lvl1pPr marL="0" indent="0">
+            <a:lvl1pPr marL="0" indent="0" algn="ctr">
               <a:buNone/>
               <a:defRPr sz="1600"/>
             </a:lvl1pPr>
@@ -2897,7 +5877,7 @@
           <a:p>
             <a:pPr lvl="0"/>
             <a:r>
-              <a:rPr kumimoji="1" lang="ja-JP" altLang="en-US"/>
+              <a:rPr lang="ja-JP" altLang="en-US"/>
               <a:t>マスター テキストの書式設定</a:t>
             </a:r>
           </a:p>
@@ -2905,13 +5885,7 @@
       </p:sp>
       <p:sp>
         <p:nvSpPr>
-          <p:cNvPr id="5" name="日付プレースホルダー 4">
-            <a:extLst>
-              <a:ext uri="{FF2B5EF4-FFF2-40B4-BE49-F238E27FC236}">
-                <a16:creationId xmlns:a16="http://schemas.microsoft.com/office/drawing/2014/main" id="{6390092F-C3F8-4A1D-9BC7-47D4A6A2E09E}"/>
-              </a:ext>
-            </a:extLst>
-          </p:cNvPr>
+          <p:cNvPr id="5" name="Date Placeholder 4"/>
           <p:cNvSpPr>
             <a:spLocks noGrp="1"/>
           </p:cNvSpPr>
@@ -2926,7 +5900,7 @@
           <a:p>
             <a:fld id="{5F305778-E222-4C85-8E95-A8CE1D926E62}" type="datetimeFigureOut">
               <a:rPr kumimoji="1" lang="ja-JP" altLang="en-US" smtClean="0"/>
-              <a:t>2025/10/29</a:t>
+              <a:t>2025/10/31</a:t>
             </a:fld>
             <a:endParaRPr kumimoji="1" lang="ja-JP" altLang="en-US"/>
           </a:p>
@@ -2934,13 +5908,7 @@
       </p:sp>
       <p:sp>
         <p:nvSpPr>
-          <p:cNvPr id="6" name="フッター プレースホルダー 5">
-            <a:extLst>
-              <a:ext uri="{FF2B5EF4-FFF2-40B4-BE49-F238E27FC236}">
-                <a16:creationId xmlns:a16="http://schemas.microsoft.com/office/drawing/2014/main" id="{BD92E516-5DE9-4CE4-B9D0-F7AB142AF4E6}"/>
-              </a:ext>
-            </a:extLst>
-          </p:cNvPr>
+          <p:cNvPr id="6" name="Footer Placeholder 5"/>
           <p:cNvSpPr>
             <a:spLocks noGrp="1"/>
           </p:cNvSpPr>
@@ -2959,13 +5927,7 @@
       </p:sp>
       <p:sp>
         <p:nvSpPr>
-          <p:cNvPr id="7" name="スライド番号プレースホルダー 6">
-            <a:extLst>
-              <a:ext uri="{FF2B5EF4-FFF2-40B4-BE49-F238E27FC236}">
-                <a16:creationId xmlns:a16="http://schemas.microsoft.com/office/drawing/2014/main" id="{C569128B-D9BB-431C-9532-4E5641556B62}"/>
-              </a:ext>
-            </a:extLst>
-          </p:cNvPr>
+          <p:cNvPr id="7" name="Slide Number Placeholder 6"/>
           <p:cNvSpPr>
             <a:spLocks noGrp="1"/>
           </p:cNvSpPr>
@@ -2989,7 +5951,7 @@
     </p:spTree>
     <p:extLst>
       <p:ext uri="{BB962C8B-B14F-4D97-AF65-F5344CB8AC3E}">
-        <p14:creationId xmlns:p14="http://schemas.microsoft.com/office/powerpoint/2010/main" val="3862292086"/>
+        <p14:creationId xmlns:p14="http://schemas.microsoft.com/office/powerpoint/2010/main" val="2795530363"/>
       </p:ext>
     </p:extLst>
   </p:cSld>
@@ -3003,7 +5965,7 @@
 <p:sldMaster xmlns:a="http://schemas.openxmlformats.org/drawingml/2006/main" xmlns:r="http://schemas.openxmlformats.org/officeDocument/2006/relationships" xmlns:p="http://schemas.openxmlformats.org/presentationml/2006/main">
   <p:cSld>
     <p:bg>
-      <p:bgRef idx="1001">
+      <p:bgRef idx="1002">
         <a:schemeClr val="bg1"/>
       </p:bgRef>
     </p:bg>
@@ -3021,30 +5983,66 @@
           <a:chExt cx="0" cy="0"/>
         </a:xfrm>
       </p:grpSpPr>
-      <p:sp>
-        <p:nvSpPr>
-          <p:cNvPr id="2" name="タイトル プレースホルダー 1">
+      <p:pic>
+        <p:nvPicPr>
+          <p:cNvPr id="1026" name="Picture 2" descr="\\DROBO-FS\QuickDrops\JB\PPTX NG\Droplets\LightingOverlay.png"/>
+          <p:cNvPicPr>
+            <a:picLocks noChangeAspect="1" noChangeArrowheads="1"/>
+          </p:cNvPicPr>
+          <p:nvPr/>
+        </p:nvPicPr>
+        <p:blipFill>
+          <a:blip r:embed="rId20">
+            <a:alphaModFix/>
             <a:extLst>
-              <a:ext uri="{FF2B5EF4-FFF2-40B4-BE49-F238E27FC236}">
-                <a16:creationId xmlns:a16="http://schemas.microsoft.com/office/drawing/2014/main" id="{96FEA066-F456-4AE2-8C18-50C5CA165673}"/>
+              <a:ext uri="{28A0092B-C50C-407E-A947-70E740481C1C}">
+                <a14:useLocalDpi xmlns:a14="http://schemas.microsoft.com/office/drawing/2010/main" val="0"/>
               </a:ext>
             </a:extLst>
-          </p:cNvPr>
-          <p:cNvSpPr>
-            <a:spLocks noGrp="1"/>
-          </p:cNvSpPr>
-          <p:nvPr>
-            <p:ph type="title"/>
-          </p:nvPr>
-        </p:nvSpPr>
-        <p:spPr>
-          <a:xfrm>
-            <a:off x="838200" y="365125"/>
-            <a:ext cx="10515600" cy="1325563"/>
+          </a:blip>
+          <a:srcRect/>
+          <a:stretch>
+            <a:fillRect/>
+          </a:stretch>
+        </p:blipFill>
+        <p:spPr bwMode="auto">
+          <a:xfrm>
+            <a:off x="0" y="-1"/>
+            <a:ext cx="12192003" cy="6858001"/>
           </a:xfrm>
           <a:prstGeom prst="rect">
             <a:avLst/>
           </a:prstGeom>
+          <a:noFill/>
+          <a:extLst>
+            <a:ext uri="{909E8E84-426E-40DD-AFC4-6F175D3DCCD1}">
+              <a14:hiddenFill xmlns:a14="http://schemas.microsoft.com/office/drawing/2010/main">
+                <a:solidFill>
+                  <a:srgbClr val="FFFFFF"/>
+                </a:solidFill>
+              </a14:hiddenFill>
+            </a:ext>
+          </a:extLst>
+        </p:spPr>
+      </p:pic>
+      <p:sp>
+        <p:nvSpPr>
+          <p:cNvPr id="2" name="Title Placeholder 1"/>
+          <p:cNvSpPr>
+            <a:spLocks noGrp="1"/>
+          </p:cNvSpPr>
+          <p:nvPr>
+            <p:ph type="title"/>
+          </p:nvPr>
+        </p:nvSpPr>
+        <p:spPr>
+          <a:xfrm>
+            <a:off x="913775" y="618517"/>
+            <a:ext cx="10364451" cy="1596177"/>
+          </a:xfrm>
+          <a:prstGeom prst="rect">
+            <a:avLst/>
+          </a:prstGeom>
         </p:spPr>
         <p:txBody>
           <a:bodyPr vert="horz" lIns="91440" tIns="45720" rIns="91440" bIns="45720" rtlCol="0" anchor="ctr">
@@ -3053,21 +6051,16 @@
           <a:lstStyle/>
           <a:p>
             <a:r>
-              <a:rPr kumimoji="1" lang="ja-JP" altLang="en-US"/>
+              <a:rPr lang="ja-JP" altLang="en-US"/>
               <a:t>マスター タイトルの書式設定</a:t>
             </a:r>
-          </a:p>
-        </p:txBody>
-      </p:sp>
-      <p:sp>
-        <p:nvSpPr>
-          <p:cNvPr id="3" name="テキスト プレースホルダー 2">
-            <a:extLst>
-              <a:ext uri="{FF2B5EF4-FFF2-40B4-BE49-F238E27FC236}">
-                <a16:creationId xmlns:a16="http://schemas.microsoft.com/office/drawing/2014/main" id="{5DFABB68-2B95-40C9-A2C1-4EA0852F18DB}"/>
-              </a:ext>
-            </a:extLst>
-          </p:cNvPr>
+            <a:endParaRPr lang="en-US" dirty="0"/>
+          </a:p>
+        </p:txBody>
+      </p:sp>
+      <p:sp>
+        <p:nvSpPr>
+          <p:cNvPr id="3" name="Text Placeholder 2"/>
           <p:cNvSpPr>
             <a:spLocks noGrp="1"/>
           </p:cNvSpPr>
@@ -3077,8 +6070,8 @@
         </p:nvSpPr>
         <p:spPr>
           <a:xfrm>
-            <a:off x="838200" y="1825625"/>
-            <a:ext cx="10515600" cy="4351338"/>
+            <a:off x="913775" y="2367093"/>
+            <a:ext cx="10364452" cy="3424107"/>
           </a:xfrm>
           <a:prstGeom prst="rect">
             <a:avLst/>
@@ -3092,81 +6085,76 @@
           <a:p>
             <a:pPr lvl="0"/>
             <a:r>
-              <a:rPr kumimoji="1" lang="ja-JP" altLang="en-US"/>
+              <a:rPr lang="ja-JP" altLang="en-US"/>
               <a:t>マスター テキストの書式設定</a:t>
             </a:r>
           </a:p>
           <a:p>
             <a:pPr lvl="1"/>
             <a:r>
-              <a:rPr kumimoji="1" lang="ja-JP" altLang="en-US"/>
+              <a:rPr lang="ja-JP" altLang="en-US"/>
               <a:t>第 </a:t>
             </a:r>
             <a:r>
-              <a:rPr kumimoji="1" lang="en-US" altLang="ja-JP"/>
+              <a:rPr lang="en-US" altLang="ja-JP"/>
               <a:t>2 </a:t>
             </a:r>
             <a:r>
-              <a:rPr kumimoji="1" lang="ja-JP" altLang="en-US"/>
+              <a:rPr lang="ja-JP" altLang="en-US"/>
               <a:t>レベル</a:t>
             </a:r>
           </a:p>
           <a:p>
             <a:pPr lvl="2"/>
             <a:r>
-              <a:rPr kumimoji="1" lang="ja-JP" altLang="en-US"/>
+              <a:rPr lang="ja-JP" altLang="en-US"/>
               <a:t>第 </a:t>
             </a:r>
             <a:r>
-              <a:rPr kumimoji="1" lang="en-US" altLang="ja-JP"/>
+              <a:rPr lang="en-US" altLang="ja-JP"/>
               <a:t>3 </a:t>
             </a:r>
             <a:r>
-              <a:rPr kumimoji="1" lang="ja-JP" altLang="en-US"/>
+              <a:rPr lang="ja-JP" altLang="en-US"/>
               <a:t>レベル</a:t>
             </a:r>
           </a:p>
           <a:p>
             <a:pPr lvl="3"/>
             <a:r>
-              <a:rPr kumimoji="1" lang="ja-JP" altLang="en-US"/>
+              <a:rPr lang="ja-JP" altLang="en-US"/>
               <a:t>第 </a:t>
             </a:r>
             <a:r>
-              <a:rPr kumimoji="1" lang="en-US" altLang="ja-JP"/>
+              <a:rPr lang="en-US" altLang="ja-JP"/>
               <a:t>4 </a:t>
             </a:r>
             <a:r>
-              <a:rPr kumimoji="1" lang="ja-JP" altLang="en-US"/>
+              <a:rPr lang="ja-JP" altLang="en-US"/>
               <a:t>レベル</a:t>
             </a:r>
           </a:p>
           <a:p>
             <a:pPr lvl="4"/>
             <a:r>
-              <a:rPr kumimoji="1" lang="ja-JP" altLang="en-US"/>
+              <a:rPr lang="ja-JP" altLang="en-US"/>
               <a:t>第 </a:t>
             </a:r>
             <a:r>
-              <a:rPr kumimoji="1" lang="en-US" altLang="ja-JP"/>
+              <a:rPr lang="en-US" altLang="ja-JP"/>
               <a:t>5 </a:t>
             </a:r>
             <a:r>
-              <a:rPr kumimoji="1" lang="ja-JP" altLang="en-US"/>
+              <a:rPr lang="ja-JP" altLang="en-US"/>
               <a:t>レベル</a:t>
             </a:r>
-          </a:p>
-        </p:txBody>
-      </p:sp>
-      <p:sp>
-        <p:nvSpPr>
-          <p:cNvPr id="4" name="日付プレースホルダー 3">
-            <a:extLst>
-              <a:ext uri="{FF2B5EF4-FFF2-40B4-BE49-F238E27FC236}">
-                <a16:creationId xmlns:a16="http://schemas.microsoft.com/office/drawing/2014/main" id="{62048098-1272-4A58-96B5-958AE6DB63A3}"/>
-              </a:ext>
-            </a:extLst>
-          </p:cNvPr>
+            <a:endParaRPr lang="en-US" dirty="0"/>
+          </a:p>
+        </p:txBody>
+      </p:sp>
+      <p:sp>
+        <p:nvSpPr>
+          <p:cNvPr id="4" name="Date Placeholder 3"/>
           <p:cNvSpPr>
             <a:spLocks noGrp="1"/>
           </p:cNvSpPr>
@@ -3176,7 +6164,7 @@
         </p:nvSpPr>
         <p:spPr>
           <a:xfrm>
-            <a:off x="838200" y="6356350"/>
+            <a:off x="7678737" y="5883275"/>
             <a:ext cx="2743200" cy="365125"/>
           </a:xfrm>
           <a:prstGeom prst="rect">
@@ -3186,12 +6174,10 @@
         <p:txBody>
           <a:bodyPr vert="horz" lIns="91440" tIns="45720" rIns="91440" bIns="45720" rtlCol="0" anchor="ctr"/>
           <a:lstStyle>
-            <a:lvl1pPr algn="l">
-              <a:defRPr sz="1200">
+            <a:lvl1pPr algn="r">
+              <a:defRPr sz="1000">
                 <a:solidFill>
-                  <a:schemeClr val="tx1">
-                    <a:tint val="75000"/>
-                  </a:schemeClr>
+                  <a:schemeClr val="tx1"/>
                 </a:solidFill>
               </a:defRPr>
             </a:lvl1pPr>
@@ -3199,7 +6185,7 @@
           <a:p>
             <a:fld id="{5F305778-E222-4C85-8E95-A8CE1D926E62}" type="datetimeFigureOut">
               <a:rPr kumimoji="1" lang="ja-JP" altLang="en-US" smtClean="0"/>
-              <a:t>2025/10/29</a:t>
+              <a:t>2025/10/31</a:t>
             </a:fld>
             <a:endParaRPr kumimoji="1" lang="ja-JP" altLang="en-US"/>
           </a:p>
@@ -3207,13 +6193,7 @@
       </p:sp>
       <p:sp>
         <p:nvSpPr>
-          <p:cNvPr id="5" name="フッター プレースホルダー 4">
-            <a:extLst>
-              <a:ext uri="{FF2B5EF4-FFF2-40B4-BE49-F238E27FC236}">
-                <a16:creationId xmlns:a16="http://schemas.microsoft.com/office/drawing/2014/main" id="{086EF95C-9C49-438E-B52A-B86279FD4DB4}"/>
-              </a:ext>
-            </a:extLst>
-          </p:cNvPr>
+          <p:cNvPr id="5" name="Footer Placeholder 4"/>
           <p:cNvSpPr>
             <a:spLocks noGrp="1"/>
           </p:cNvSpPr>
@@ -3223,8 +6203,8 @@
         </p:nvSpPr>
         <p:spPr>
           <a:xfrm>
-            <a:off x="4038600" y="6356350"/>
-            <a:ext cx="4114800" cy="365125"/>
+            <a:off x="913774" y="5883275"/>
+            <a:ext cx="6672887" cy="365125"/>
           </a:xfrm>
           <a:prstGeom prst="rect">
             <a:avLst/>
@@ -3233,12 +6213,10 @@
         <p:txBody>
           <a:bodyPr vert="horz" lIns="91440" tIns="45720" rIns="91440" bIns="45720" rtlCol="0" anchor="ctr"/>
           <a:lstStyle>
-            <a:lvl1pPr algn="ctr">
-              <a:defRPr sz="1200">
+            <a:lvl1pPr algn="l">
+              <a:defRPr sz="1000">
                 <a:solidFill>
-                  <a:schemeClr val="tx1">
-                    <a:tint val="75000"/>
-                  </a:schemeClr>
+                  <a:schemeClr val="tx1"/>
                 </a:solidFill>
               </a:defRPr>
             </a:lvl1pPr>
@@ -3250,13 +6228,7 @@
       </p:sp>
       <p:sp>
         <p:nvSpPr>
-          <p:cNvPr id="6" name="スライド番号プレースホルダー 5">
-            <a:extLst>
-              <a:ext uri="{FF2B5EF4-FFF2-40B4-BE49-F238E27FC236}">
-                <a16:creationId xmlns:a16="http://schemas.microsoft.com/office/drawing/2014/main" id="{70A9CA5E-D1FF-4577-8B6D-FD7EE70AB73F}"/>
-              </a:ext>
-            </a:extLst>
-          </p:cNvPr>
+          <p:cNvPr id="6" name="Slide Number Placeholder 5"/>
           <p:cNvSpPr>
             <a:spLocks noGrp="1"/>
           </p:cNvSpPr>
@@ -3266,8 +6238,8 @@
         </p:nvSpPr>
         <p:spPr>
           <a:xfrm>
-            <a:off x="8610600" y="6356350"/>
-            <a:ext cx="2743200" cy="365125"/>
+            <a:off x="10514011" y="5883275"/>
+            <a:ext cx="764215" cy="365125"/>
           </a:xfrm>
           <a:prstGeom prst="rect">
             <a:avLst/>
@@ -3277,11 +6249,9 @@
           <a:bodyPr vert="horz" lIns="91440" tIns="45720" rIns="91440" bIns="45720" rtlCol="0" anchor="ctr"/>
           <a:lstStyle>
             <a:lvl1pPr algn="r">
-              <a:defRPr sz="1200">
+              <a:defRPr sz="1000">
                 <a:solidFill>
-                  <a:schemeClr val="tx1">
-                    <a:tint val="75000"/>
-                  </a:schemeClr>
+                  <a:schemeClr val="tx1"/>
                 </a:solidFill>
               </a:defRPr>
             </a:lvl1pPr>
@@ -3298,27 +6268,34 @@
     </p:spTree>
     <p:extLst>
       <p:ext uri="{BB962C8B-B14F-4D97-AF65-F5344CB8AC3E}">
-        <p14:creationId xmlns:p14="http://schemas.microsoft.com/office/powerpoint/2010/main" val="697066395"/>
+        <p14:creationId xmlns:p14="http://schemas.microsoft.com/office/powerpoint/2010/main" val="3118504261"/>
       </p:ext>
     </p:extLst>
   </p:cSld>
   <p:clrMap bg1="lt1" tx1="dk1" bg2="lt2" tx2="dk2" accent1="accent1" accent2="accent2" accent3="accent3" accent4="accent4" accent5="accent5" accent6="accent6" hlink="hlink" folHlink="folHlink"/>
   <p:sldLayoutIdLst>
-    <p:sldLayoutId id="2147483649" r:id="rId1"/>
-    <p:sldLayoutId id="2147483650" r:id="rId2"/>
-    <p:sldLayoutId id="2147483651" r:id="rId3"/>
-    <p:sldLayoutId id="2147483652" r:id="rId4"/>
-    <p:sldLayoutId id="2147483653" r:id="rId5"/>
-    <p:sldLayoutId id="2147483654" r:id="rId6"/>
-    <p:sldLayoutId id="2147483655" r:id="rId7"/>
-    <p:sldLayoutId id="2147483656" r:id="rId8"/>
-    <p:sldLayoutId id="2147483657" r:id="rId9"/>
-    <p:sldLayoutId id="2147483658" r:id="rId10"/>
-    <p:sldLayoutId id="2147483659" r:id="rId11"/>
+    <p:sldLayoutId id="2147483679" r:id="rId1"/>
+    <p:sldLayoutId id="2147483680" r:id="rId2"/>
+    <p:sldLayoutId id="2147483681" r:id="rId3"/>
+    <p:sldLayoutId id="2147483682" r:id="rId4"/>
+    <p:sldLayoutId id="2147483683" r:id="rId5"/>
+    <p:sldLayoutId id="2147483684" r:id="rId6"/>
+    <p:sldLayoutId id="2147483685" r:id="rId7"/>
+    <p:sldLayoutId id="2147483686" r:id="rId8"/>
+    <p:sldLayoutId id="2147483687" r:id="rId9"/>
+    <p:sldLayoutId id="2147483688" r:id="rId10"/>
+    <p:sldLayoutId id="2147483689" r:id="rId11"/>
+    <p:sldLayoutId id="2147483690" r:id="rId12"/>
+    <p:sldLayoutId id="2147483691" r:id="rId13"/>
+    <p:sldLayoutId id="2147483692" r:id="rId14"/>
+    <p:sldLayoutId id="2147483693" r:id="rId15"/>
+    <p:sldLayoutId id="2147483694" r:id="rId16"/>
+    <p:sldLayoutId id="2147483695" r:id="rId17"/>
+    <p:sldLayoutId id="2147483696" r:id="rId18"/>
   </p:sldLayoutIdLst>
   <p:txStyles>
     <p:titleStyle>
-      <a:lvl1pPr algn="l" defTabSz="914400" rtl="0" eaLnBrk="1" latinLnBrk="0" hangingPunct="1">
+      <a:lvl1pPr algn="ctr" defTabSz="914400" rtl="0" eaLnBrk="1" latinLnBrk="0" hangingPunct="1">
         <a:lnSpc>
           <a:spcPct val="90000"/>
         </a:lnSpc>
@@ -3326,10 +6303,11 @@
           <a:spcPct val="0"/>
         </a:spcBef>
         <a:buNone/>
-        <a:defRPr kumimoji="1" sz="4400" kern="1200">
+        <a:defRPr kumimoji="1" sz="3600" kern="1200" cap="all" baseline="0">
           <a:solidFill>
             <a:schemeClr val="tx1"/>
           </a:solidFill>
+          <a:effectLst/>
           <a:latin typeface="+mj-lt"/>
           <a:ea typeface="+mj-ea"/>
           <a:cs typeface="+mj-cs"/>
@@ -3339,17 +6317,21 @@
     <p:bodyStyle>
       <a:lvl1pPr marL="228600" indent="-228600" algn="l" defTabSz="914400" rtl="0" eaLnBrk="1" latinLnBrk="0" hangingPunct="1">
         <a:lnSpc>
-          <a:spcPct val="90000"/>
+          <a:spcPct val="120000"/>
         </a:lnSpc>
         <a:spcBef>
           <a:spcPts val="1000"/>
         </a:spcBef>
+        <a:buClr>
+          <a:schemeClr val="tx1"/>
+        </a:buClr>
         <a:buFont typeface="Arial" panose="020B0604020202020204" pitchFamily="34" charset="0"/>
         <a:buChar char="•"/>
-        <a:defRPr kumimoji="1" sz="2800" kern="1200">
+        <a:defRPr kumimoji="1" sz="2000" kern="1200" cap="all" baseline="0">
           <a:solidFill>
             <a:schemeClr val="tx1"/>
           </a:solidFill>
+          <a:effectLst/>
           <a:latin typeface="+mn-lt"/>
           <a:ea typeface="+mn-ea"/>
           <a:cs typeface="+mn-cs"/>
@@ -3357,17 +6339,21 @@
       </a:lvl1pPr>
       <a:lvl2pPr marL="685800" indent="-228600" algn="l" defTabSz="914400" rtl="0" eaLnBrk="1" latinLnBrk="0" hangingPunct="1">
         <a:lnSpc>
-          <a:spcPct val="90000"/>
+          <a:spcPct val="120000"/>
         </a:lnSpc>
         <a:spcBef>
           <a:spcPts val="500"/>
         </a:spcBef>
+        <a:buClr>
+          <a:schemeClr val="tx1"/>
+        </a:buClr>
         <a:buFont typeface="Arial" panose="020B0604020202020204" pitchFamily="34" charset="0"/>
         <a:buChar char="•"/>
-        <a:defRPr kumimoji="1" sz="2400" kern="1200">
+        <a:defRPr kumimoji="1" sz="1800" kern="1200" cap="all" baseline="0">
           <a:solidFill>
             <a:schemeClr val="tx1"/>
           </a:solidFill>
+          <a:effectLst/>
           <a:latin typeface="+mn-lt"/>
           <a:ea typeface="+mn-ea"/>
           <a:cs typeface="+mn-cs"/>
@@ -3375,17 +6361,21 @@
       </a:lvl2pPr>
       <a:lvl3pPr marL="1143000" indent="-228600" algn="l" defTabSz="914400" rtl="0" eaLnBrk="1" latinLnBrk="0" hangingPunct="1">
         <a:lnSpc>
-          <a:spcPct val="90000"/>
+          <a:spcPct val="120000"/>
         </a:lnSpc>
         <a:spcBef>
           <a:spcPts val="500"/>
         </a:spcBef>
+        <a:buClr>
+          <a:schemeClr val="tx1"/>
+        </a:buClr>
         <a:buFont typeface="Arial" panose="020B0604020202020204" pitchFamily="34" charset="0"/>
         <a:buChar char="•"/>
-        <a:defRPr kumimoji="1" sz="2000" kern="1200">
+        <a:defRPr kumimoji="1" sz="1600" kern="1200" cap="all" baseline="0">
           <a:solidFill>
             <a:schemeClr val="tx1"/>
           </a:solidFill>
+          <a:effectLst/>
           <a:latin typeface="+mn-lt"/>
           <a:ea typeface="+mn-ea"/>
           <a:cs typeface="+mn-cs"/>
@@ -3393,17 +6383,21 @@
       </a:lvl3pPr>
       <a:lvl4pPr marL="1600200" indent="-228600" algn="l" defTabSz="914400" rtl="0" eaLnBrk="1" latinLnBrk="0" hangingPunct="1">
         <a:lnSpc>
-          <a:spcPct val="90000"/>
+          <a:spcPct val="120000"/>
         </a:lnSpc>
         <a:spcBef>
           <a:spcPts val="500"/>
         </a:spcBef>
+        <a:buClr>
+          <a:schemeClr val="tx1"/>
+        </a:buClr>
         <a:buFont typeface="Arial" panose="020B0604020202020204" pitchFamily="34" charset="0"/>
         <a:buChar char="•"/>
-        <a:defRPr kumimoji="1" sz="1800" kern="1200">
+        <a:defRPr kumimoji="1" sz="1400" kern="1200" cap="all" baseline="0">
           <a:solidFill>
             <a:schemeClr val="tx1"/>
           </a:solidFill>
+          <a:effectLst/>
           <a:latin typeface="+mn-lt"/>
           <a:ea typeface="+mn-ea"/>
           <a:cs typeface="+mn-cs"/>
@@ -3411,17 +6405,21 @@
       </a:lvl4pPr>
       <a:lvl5pPr marL="2057400" indent="-228600" algn="l" defTabSz="914400" rtl="0" eaLnBrk="1" latinLnBrk="0" hangingPunct="1">
         <a:lnSpc>
-          <a:spcPct val="90000"/>
+          <a:spcPct val="120000"/>
         </a:lnSpc>
         <a:spcBef>
           <a:spcPts val="500"/>
         </a:spcBef>
+        <a:buClr>
+          <a:schemeClr val="tx1"/>
+        </a:buClr>
         <a:buFont typeface="Arial" panose="020B0604020202020204" pitchFamily="34" charset="0"/>
         <a:buChar char="•"/>
-        <a:defRPr kumimoji="1" sz="1800" kern="1200">
+        <a:defRPr kumimoji="1" sz="1400" kern="1200" cap="all" baseline="0">
           <a:solidFill>
             <a:schemeClr val="tx1"/>
           </a:solidFill>
+          <a:effectLst/>
           <a:latin typeface="+mn-lt"/>
           <a:ea typeface="+mn-ea"/>
           <a:cs typeface="+mn-cs"/>
@@ -3429,17 +6427,21 @@
       </a:lvl5pPr>
       <a:lvl6pPr marL="2514600" indent="-228600" algn="l" defTabSz="914400" rtl="0" eaLnBrk="1" latinLnBrk="0" hangingPunct="1">
         <a:lnSpc>
-          <a:spcPct val="90000"/>
+          <a:spcPct val="120000"/>
         </a:lnSpc>
         <a:spcBef>
           <a:spcPts val="500"/>
         </a:spcBef>
+        <a:buClr>
+          <a:schemeClr val="tx1"/>
+        </a:buClr>
         <a:buFont typeface="Arial" panose="020B0604020202020204" pitchFamily="34" charset="0"/>
         <a:buChar char="•"/>
-        <a:defRPr kumimoji="1" sz="1800" kern="1200">
+        <a:defRPr kumimoji="1" sz="1400" kern="1200" cap="all" baseline="0">
           <a:solidFill>
             <a:schemeClr val="tx1"/>
           </a:solidFill>
+          <a:effectLst/>
           <a:latin typeface="+mn-lt"/>
           <a:ea typeface="+mn-ea"/>
           <a:cs typeface="+mn-cs"/>
@@ -3447,17 +6449,21 @@
       </a:lvl6pPr>
       <a:lvl7pPr marL="2971800" indent="-228600" algn="l" defTabSz="914400" rtl="0" eaLnBrk="1" latinLnBrk="0" hangingPunct="1">
         <a:lnSpc>
-          <a:spcPct val="90000"/>
+          <a:spcPct val="120000"/>
         </a:lnSpc>
         <a:spcBef>
           <a:spcPts val="500"/>
         </a:spcBef>
+        <a:buClr>
+          <a:schemeClr val="tx1"/>
+        </a:buClr>
         <a:buFont typeface="Arial" panose="020B0604020202020204" pitchFamily="34" charset="0"/>
         <a:buChar char="•"/>
-        <a:defRPr kumimoji="1" sz="1800" kern="1200">
+        <a:defRPr kumimoji="1" sz="1400" kern="1200" cap="all" baseline="0">
           <a:solidFill>
             <a:schemeClr val="tx1"/>
           </a:solidFill>
+          <a:effectLst/>
           <a:latin typeface="+mn-lt"/>
           <a:ea typeface="+mn-ea"/>
           <a:cs typeface="+mn-cs"/>
@@ -3465,17 +6471,21 @@
       </a:lvl7pPr>
       <a:lvl8pPr marL="3429000" indent="-228600" algn="l" defTabSz="914400" rtl="0" eaLnBrk="1" latinLnBrk="0" hangingPunct="1">
         <a:lnSpc>
-          <a:spcPct val="90000"/>
+          <a:spcPct val="120000"/>
         </a:lnSpc>
         <a:spcBef>
           <a:spcPts val="500"/>
         </a:spcBef>
+        <a:buClr>
+          <a:schemeClr val="tx1"/>
+        </a:buClr>
         <a:buFont typeface="Arial" panose="020B0604020202020204" pitchFamily="34" charset="0"/>
         <a:buChar char="•"/>
-        <a:defRPr kumimoji="1" sz="1800" kern="1200">
+        <a:defRPr kumimoji="1" sz="1400" kern="1200" cap="all" baseline="0">
           <a:solidFill>
             <a:schemeClr val="tx1"/>
           </a:solidFill>
+          <a:effectLst/>
           <a:latin typeface="+mn-lt"/>
           <a:ea typeface="+mn-ea"/>
           <a:cs typeface="+mn-cs"/>
@@ -3483,17 +6493,21 @@
       </a:lvl8pPr>
       <a:lvl9pPr marL="3886200" indent="-228600" algn="l" defTabSz="914400" rtl="0" eaLnBrk="1" latinLnBrk="0" hangingPunct="1">
         <a:lnSpc>
-          <a:spcPct val="90000"/>
+          <a:spcPct val="120000"/>
         </a:lnSpc>
         <a:spcBef>
           <a:spcPts val="500"/>
         </a:spcBef>
+        <a:buClr>
+          <a:schemeClr val="tx1"/>
+        </a:buClr>
         <a:buFont typeface="Arial" panose="020B0604020202020204" pitchFamily="34" charset="0"/>
         <a:buChar char="•"/>
-        <a:defRPr kumimoji="1" sz="1800" kern="1200">
+        <a:defRPr kumimoji="1" sz="1400" kern="1200" cap="all" baseline="0">
           <a:solidFill>
             <a:schemeClr val="tx1"/>
           </a:solidFill>
+          <a:effectLst/>
           <a:latin typeface="+mn-lt"/>
           <a:ea typeface="+mn-ea"/>
           <a:cs typeface="+mn-cs"/>
@@ -3502,7 +6516,7 @@
     </p:bodyStyle>
     <p:otherStyle>
       <a:defPPr>
-        <a:defRPr lang="ja-JP"/>
+        <a:defRPr lang="en-US"/>
       </a:defPPr>
       <a:lvl1pPr marL="0" algn="l" defTabSz="914400" rtl="0" eaLnBrk="1" latinLnBrk="0" hangingPunct="1">
         <a:defRPr kumimoji="1" sz="1800" kern="1200">
@@ -3618,10 +6632,10 @@
       </p:grpSpPr>
       <p:sp>
         <p:nvSpPr>
-          <p:cNvPr id="4" name="テキスト ボックス 3">
+          <p:cNvPr id="3" name="テキスト ボックス 2">
             <a:extLst>
               <a:ext uri="{FF2B5EF4-FFF2-40B4-BE49-F238E27FC236}">
-                <a16:creationId xmlns:a16="http://schemas.microsoft.com/office/drawing/2014/main" id="{AAE7F0B7-2900-4767-AE46-FBBEB9DA71C3}"/>
+                <a16:creationId xmlns:a16="http://schemas.microsoft.com/office/drawing/2014/main" id="{C99351A2-12EB-4D59-80C7-928512A6C618}"/>
               </a:ext>
             </a:extLst>
           </p:cNvPr>
@@ -3630,8 +6644,8 @@
         </p:nvSpPr>
         <p:spPr>
           <a:xfrm>
-            <a:off x="1985433" y="1321992"/>
-            <a:ext cx="8221133" cy="769441"/>
+            <a:off x="3733800" y="1118632"/>
+            <a:ext cx="4724400" cy="707886"/>
           </a:xfrm>
           <a:prstGeom prst="rect">
             <a:avLst/>
@@ -3646,7 +6660,7 @@
           <a:p>
             <a:pPr algn="ctr"/>
             <a:r>
-              <a:rPr kumimoji="1" lang="ja-JP" altLang="en-US" sz="4400" dirty="0"/>
+              <a:rPr kumimoji="1" lang="ja-JP" altLang="en-US" sz="4000" b="1" dirty="0"/>
               <a:t>タイトル名</a:t>
             </a:r>
           </a:p>
@@ -3654,10 +6668,10 @@
       </p:sp>
       <p:sp>
         <p:nvSpPr>
-          <p:cNvPr id="6" name="テキスト ボックス 5">
+          <p:cNvPr id="5" name="テキスト ボックス 4">
             <a:extLst>
               <a:ext uri="{FF2B5EF4-FFF2-40B4-BE49-F238E27FC236}">
-                <a16:creationId xmlns:a16="http://schemas.microsoft.com/office/drawing/2014/main" id="{A6022116-B332-4A0E-A36A-2A53C1917EED}"/>
+                <a16:creationId xmlns:a16="http://schemas.microsoft.com/office/drawing/2014/main" id="{BA119E13-D330-410B-A025-C915DCCB6997}"/>
               </a:ext>
             </a:extLst>
           </p:cNvPr>
@@ -3666,8 +6680,8 @@
         </p:nvSpPr>
         <p:spPr>
           <a:xfrm>
-            <a:off x="1625600" y="2616200"/>
-            <a:ext cx="3060700" cy="369332"/>
+            <a:off x="3321050" y="2082800"/>
+            <a:ext cx="5549900" cy="2677656"/>
           </a:xfrm>
           <a:prstGeom prst="rect">
             <a:avLst/>
@@ -3680,9 +6694,50 @@
           </a:bodyPr>
           <a:lstStyle/>
           <a:p>
-            <a:r>
-              <a:rPr kumimoji="1" lang="ja-JP" altLang="en-US" dirty="0"/>
-              <a:t>ジャンル</a:t>
+            <a:pPr algn="ctr"/>
+            <a:r>
+              <a:rPr kumimoji="1" lang="ja-JP" altLang="en-US" sz="2400" dirty="0"/>
+              <a:t>ジャンル　　　アクション</a:t>
+            </a:r>
+            <a:br>
+              <a:rPr kumimoji="1" lang="en-US" altLang="ja-JP" sz="2400" dirty="0"/>
+            </a:br>
+            <a:br>
+              <a:rPr kumimoji="1" lang="en-US" altLang="ja-JP" sz="2400" dirty="0"/>
+            </a:br>
+            <a:r>
+              <a:rPr kumimoji="1" lang="ja-JP" altLang="en-US" sz="2400" dirty="0"/>
+              <a:t>開発エンジン　　　</a:t>
+            </a:r>
+            <a:r>
+              <a:rPr kumimoji="1" lang="en-US" altLang="ja-JP" sz="2400" dirty="0"/>
+              <a:t>Unity</a:t>
+            </a:r>
+          </a:p>
+          <a:p>
+            <a:pPr algn="ctr"/>
+            <a:endParaRPr kumimoji="1" lang="en-US" altLang="ja-JP" sz="2400" dirty="0"/>
+          </a:p>
+          <a:p>
+            <a:pPr algn="ctr"/>
+            <a:r>
+              <a:rPr kumimoji="1" lang="ja-JP" altLang="en-US" sz="2400" dirty="0"/>
+              <a:t>プラットフォーム  </a:t>
+            </a:r>
+            <a:r>
+              <a:rPr kumimoji="1" lang="en-US" altLang="ja-JP" sz="2400" dirty="0"/>
+              <a:t>Windows</a:t>
+            </a:r>
+          </a:p>
+          <a:p>
+            <a:pPr algn="ctr"/>
+            <a:endParaRPr kumimoji="1" lang="en-US" altLang="ja-JP" sz="2400" dirty="0"/>
+          </a:p>
+          <a:p>
+            <a:pPr algn="ctr"/>
+            <a:r>
+              <a:rPr kumimoji="1" lang="ja-JP" altLang="en-US" sz="2400" dirty="0"/>
+              <a:t>企画者　立石喜遼</a:t>
             </a:r>
           </a:p>
         </p:txBody>
@@ -3868,9 +6923,9 @@
 </file>
 
 <file path=ppt/theme/theme1.xml><?xml version="1.0" encoding="utf-8"?>
-<a:theme xmlns:a="http://schemas.openxmlformats.org/drawingml/2006/main" name="Office テーマ">
+<a:theme xmlns:a="http://schemas.openxmlformats.org/drawingml/2006/main" name="しずく">
   <a:themeElements>
-    <a:clrScheme name="Office">
+    <a:clrScheme name="しずく">
       <a:dk1>
         <a:sysClr val="windowText" lastClr="000000"/>
       </a:dk1>
@@ -3878,44 +6933,44 @@
         <a:sysClr val="window" lastClr="FFFFFF"/>
       </a:lt1>
       <a:dk2>
-        <a:srgbClr val="44546A"/>
+        <a:srgbClr val="355071"/>
       </a:dk2>
       <a:lt2>
-        <a:srgbClr val="E7E6E6"/>
+        <a:srgbClr val="AABED7"/>
       </a:lt2>
       <a:accent1>
-        <a:srgbClr val="4472C4"/>
+        <a:srgbClr val="2FA3EE"/>
       </a:accent1>
       <a:accent2>
-        <a:srgbClr val="ED7D31"/>
+        <a:srgbClr val="4BCAAD"/>
       </a:accent2>
       <a:accent3>
-        <a:srgbClr val="A5A5A5"/>
+        <a:srgbClr val="86C157"/>
       </a:accent3>
       <a:accent4>
-        <a:srgbClr val="FFC000"/>
+        <a:srgbClr val="D99C3F"/>
       </a:accent4>
       <a:accent5>
-        <a:srgbClr val="5B9BD5"/>
+        <a:srgbClr val="CE6633"/>
       </a:accent5>
       <a:accent6>
-        <a:srgbClr val="70AD47"/>
+        <a:srgbClr val="A35DD1"/>
       </a:accent6>
       <a:hlink>
-        <a:srgbClr val="0563C1"/>
+        <a:srgbClr val="56BCFE"/>
       </a:hlink>
       <a:folHlink>
-        <a:srgbClr val="954F72"/>
+        <a:srgbClr val="97C5E3"/>
       </a:folHlink>
     </a:clrScheme>
-    <a:fontScheme name="Office">
+    <a:fontScheme name="しずく">
       <a:majorFont>
-        <a:latin typeface="游ゴシック Light" panose="020F0302020204030204"/>
+        <a:latin typeface="Tw Cen MT" panose="020B0602020104020603"/>
         <a:ea typeface=""/>
         <a:cs typeface=""/>
-        <a:font script="Jpan" typeface="游ゴシック Light"/>
+        <a:font script="Jpan" typeface="ＭＳ Ｐゴシック"/>
         <a:font script="Hang" typeface="맑은 고딕"/>
-        <a:font script="Hans" typeface="等线 Light"/>
+        <a:font script="Hans" typeface="宋体"/>
         <a:font script="Hant" typeface="新細明體"/>
         <a:font script="Arab" typeface="Times New Roman"/>
         <a:font script="Hebr" typeface="Times New Roman"/>
@@ -3943,31 +6998,14 @@
         <a:font script="Viet" typeface="Times New Roman"/>
         <a:font script="Uigh" typeface="Microsoft Uighur"/>
         <a:font script="Geor" typeface="Sylfaen"/>
-        <a:font script="Armn" typeface="Arial"/>
-        <a:font script="Bugi" typeface="Leelawadee UI"/>
-        <a:font script="Bopo" typeface="Microsoft JhengHei"/>
-        <a:font script="Java" typeface="Javanese Text"/>
-        <a:font script="Lisu" typeface="Segoe UI"/>
-        <a:font script="Mymr" typeface="Myanmar Text"/>
-        <a:font script="Nkoo" typeface="Ebrima"/>
-        <a:font script="Olck" typeface="Nirmala UI"/>
-        <a:font script="Osma" typeface="Ebrima"/>
-        <a:font script="Phag" typeface="Phagspa"/>
-        <a:font script="Syrn" typeface="Estrangelo Edessa"/>
-        <a:font script="Syrj" typeface="Estrangelo Edessa"/>
-        <a:font script="Syre" typeface="Estrangelo Edessa"/>
-        <a:font script="Sora" typeface="Nirmala UI"/>
-        <a:font script="Tale" typeface="Microsoft Tai Le"/>
-        <a:font script="Talu" typeface="Microsoft New Tai Lue"/>
-        <a:font script="Tfng" typeface="Ebrima"/>
       </a:majorFont>
       <a:minorFont>
-        <a:latin typeface="游ゴシック" panose="020F0502020204030204"/>
+        <a:latin typeface="Tw Cen MT" panose="020B0602020104020603"/>
         <a:ea typeface=""/>
         <a:cs typeface=""/>
-        <a:font script="Jpan" typeface="游ゴシック"/>
+        <a:font script="Jpan" typeface="ＭＳ Ｐゴシック"/>
         <a:font script="Hang" typeface="맑은 고딕"/>
-        <a:font script="Hans" typeface="等线"/>
+        <a:font script="Hans" typeface="宋体"/>
         <a:font script="Hant" typeface="新細明體"/>
         <a:font script="Arab" typeface="Arial"/>
         <a:font script="Hebr" typeface="Arial"/>
@@ -3995,27 +7033,105 @@
         <a:font script="Viet" typeface="Arial"/>
         <a:font script="Uigh" typeface="Microsoft Uighur"/>
         <a:font script="Geor" typeface="Sylfaen"/>
-        <a:font script="Armn" typeface="Arial"/>
-        <a:font script="Bugi" typeface="Leelawadee UI"/>
-        <a:font script="Bopo" typeface="Microsoft JhengHei"/>
-        <a:font script="Java" typeface="Javanese Text"/>
-        <a:font script="Lisu" typeface="Segoe UI"/>
-        <a:font script="Mymr" typeface="Myanmar Text"/>
-        <a:font script="Nkoo" typeface="Ebrima"/>
-        <a:font script="Olck" typeface="Nirmala UI"/>
-        <a:font script="Osma" typeface="Ebrima"/>
-        <a:font script="Phag" typeface="Phagspa"/>
-        <a:font script="Syrn" typeface="Estrangelo Edessa"/>
-        <a:font script="Syrj" typeface="Estrangelo Edessa"/>
-        <a:font script="Syre" typeface="Estrangelo Edessa"/>
-        <a:font script="Sora" typeface="Nirmala UI"/>
-        <a:font script="Tale" typeface="Microsoft Tai Le"/>
-        <a:font script="Talu" typeface="Microsoft New Tai Lue"/>
-        <a:font script="Tfng" typeface="Ebrima"/>
       </a:minorFont>
     </a:fontScheme>
-    <a:fmtScheme name="Office">
+    <a:fmtScheme name="しずく">
       <a:fillStyleLst>
+        <a:solidFill>
+          <a:schemeClr val="phClr"/>
+        </a:solidFill>
+        <a:solidFill>
+          <a:schemeClr val="phClr">
+            <a:tint val="69000"/>
+            <a:satMod val="105000"/>
+            <a:lumMod val="110000"/>
+          </a:schemeClr>
+        </a:solidFill>
+        <a:gradFill rotWithShape="1">
+          <a:gsLst>
+            <a:gs pos="0">
+              <a:schemeClr val="phClr">
+                <a:tint val="94000"/>
+                <a:satMod val="100000"/>
+                <a:lumMod val="108000"/>
+              </a:schemeClr>
+            </a:gs>
+            <a:gs pos="50000">
+              <a:schemeClr val="phClr">
+                <a:tint val="98000"/>
+                <a:shade val="100000"/>
+                <a:satMod val="100000"/>
+                <a:lumMod val="100000"/>
+              </a:schemeClr>
+            </a:gs>
+            <a:gs pos="100000">
+              <a:schemeClr val="phClr">
+                <a:shade val="72000"/>
+                <a:satMod val="120000"/>
+                <a:lumMod val="100000"/>
+              </a:schemeClr>
+            </a:gs>
+          </a:gsLst>
+          <a:lin ang="5400000" scaled="0"/>
+        </a:gradFill>
+      </a:fillStyleLst>
+      <a:lnStyleLst>
+        <a:ln w="9525" cap="flat" cmpd="sng" algn="ctr">
+          <a:solidFill>
+            <a:schemeClr val="phClr">
+              <a:shade val="60000"/>
+            </a:schemeClr>
+          </a:solidFill>
+          <a:prstDash val="solid"/>
+        </a:ln>
+        <a:ln w="15875" cap="flat" cmpd="sng" algn="ctr">
+          <a:solidFill>
+            <a:schemeClr val="phClr"/>
+          </a:solidFill>
+          <a:prstDash val="solid"/>
+        </a:ln>
+        <a:ln w="22225" cap="flat" cmpd="sng" algn="ctr">
+          <a:solidFill>
+            <a:schemeClr val="phClr"/>
+          </a:solidFill>
+          <a:prstDash val="solid"/>
+        </a:ln>
+      </a:lnStyleLst>
+      <a:effectStyleLst>
+        <a:effectStyle>
+          <a:effectLst/>
+        </a:effectStyle>
+        <a:effectStyle>
+          <a:effectLst>
+            <a:outerShdw blurRad="50800" dist="25400" dir="5400000" rotWithShape="0">
+              <a:srgbClr val="000000">
+                <a:alpha val="28000"/>
+              </a:srgbClr>
+            </a:outerShdw>
+          </a:effectLst>
+        </a:effectStyle>
+        <a:effectStyle>
+          <a:effectLst>
+            <a:outerShdw blurRad="63500" dist="25400" dir="5400000" algn="ctr" rotWithShape="0">
+              <a:srgbClr val="000000">
+                <a:alpha val="69000"/>
+              </a:srgbClr>
+            </a:outerShdw>
+          </a:effectLst>
+          <a:scene3d>
+            <a:camera prst="orthographicFront">
+              <a:rot lat="0" lon="0" rev="0"/>
+            </a:camera>
+            <a:lightRig rig="balanced" dir="t">
+              <a:rot lat="0" lon="0" rev="1200000"/>
+            </a:lightRig>
+          </a:scene3d>
+          <a:sp3d prstMaterial="plastic">
+            <a:bevelT w="25400" h="25400"/>
+          </a:sp3d>
+        </a:effectStyle>
+      </a:effectStyleLst>
+      <a:bgFillStyleLst>
         <a:solidFill>
           <a:schemeClr val="phClr"/>
         </a:solidFill>
@@ -4023,23 +7139,14 @@
           <a:gsLst>
             <a:gs pos="0">
               <a:schemeClr val="phClr">
+                <a:tint val="90000"/>
                 <a:lumMod val="110000"/>
-                <a:satMod val="105000"/>
-                <a:tint val="67000"/>
-              </a:schemeClr>
-            </a:gs>
-            <a:gs pos="50000">
-              <a:schemeClr val="phClr">
-                <a:lumMod val="105000"/>
-                <a:satMod val="103000"/>
-                <a:tint val="73000"/>
               </a:schemeClr>
             </a:gs>
             <a:gs pos="100000">
               <a:schemeClr val="phClr">
-                <a:lumMod val="105000"/>
-                <a:satMod val="109000"/>
-                <a:tint val="81000"/>
+                <a:shade val="64000"/>
+                <a:lumMod val="88000"/>
               </a:schemeClr>
             </a:gs>
           </a:gsLst>
@@ -4049,101 +7156,18 @@
           <a:gsLst>
             <a:gs pos="0">
               <a:schemeClr val="phClr">
-                <a:satMod val="103000"/>
-                <a:lumMod val="102000"/>
-                <a:tint val="94000"/>
-              </a:schemeClr>
-            </a:gs>
-            <a:gs pos="50000">
-              <a:schemeClr val="phClr">
-                <a:satMod val="110000"/>
-                <a:lumMod val="100000"/>
+                <a:tint val="84000"/>
                 <a:shade val="100000"/>
+                <a:hueMod val="130000"/>
+                <a:satMod val="150000"/>
+                <a:lumMod val="112000"/>
               </a:schemeClr>
             </a:gs>
             <a:gs pos="100000">
               <a:schemeClr val="phClr">
-                <a:lumMod val="99000"/>
-                <a:satMod val="120000"/>
-                <a:shade val="78000"/>
-              </a:schemeClr>
-            </a:gs>
-          </a:gsLst>
-          <a:lin ang="5400000" scaled="0"/>
-        </a:gradFill>
-      </a:fillStyleLst>
-      <a:lnStyleLst>
-        <a:ln w="6350" cap="flat" cmpd="sng" algn="ctr">
-          <a:solidFill>
-            <a:schemeClr val="phClr"/>
-          </a:solidFill>
-          <a:prstDash val="solid"/>
-          <a:miter lim="800000"/>
-        </a:ln>
-        <a:ln w="12700" cap="flat" cmpd="sng" algn="ctr">
-          <a:solidFill>
-            <a:schemeClr val="phClr"/>
-          </a:solidFill>
-          <a:prstDash val="solid"/>
-          <a:miter lim="800000"/>
-        </a:ln>
-        <a:ln w="19050" cap="flat" cmpd="sng" algn="ctr">
-          <a:solidFill>
-            <a:schemeClr val="phClr"/>
-          </a:solidFill>
-          <a:prstDash val="solid"/>
-          <a:miter lim="800000"/>
-        </a:ln>
-      </a:lnStyleLst>
-      <a:effectStyleLst>
-        <a:effectStyle>
-          <a:effectLst/>
-        </a:effectStyle>
-        <a:effectStyle>
-          <a:effectLst/>
-        </a:effectStyle>
-        <a:effectStyle>
-          <a:effectLst>
-            <a:outerShdw blurRad="57150" dist="19050" dir="5400000" algn="ctr" rotWithShape="0">
-              <a:srgbClr val="000000">
-                <a:alpha val="63000"/>
-              </a:srgbClr>
-            </a:outerShdw>
-          </a:effectLst>
-        </a:effectStyle>
-      </a:effectStyleLst>
-      <a:bgFillStyleLst>
-        <a:solidFill>
-          <a:schemeClr val="phClr"/>
-        </a:solidFill>
-        <a:solidFill>
-          <a:schemeClr val="phClr">
-            <a:tint val="95000"/>
-            <a:satMod val="170000"/>
-          </a:schemeClr>
-        </a:solidFill>
-        <a:gradFill rotWithShape="1">
-          <a:gsLst>
-            <a:gs pos="0">
-              <a:schemeClr val="phClr">
-                <a:tint val="93000"/>
-                <a:satMod val="150000"/>
-                <a:shade val="98000"/>
-                <a:lumMod val="102000"/>
-              </a:schemeClr>
-            </a:gs>
-            <a:gs pos="50000">
-              <a:schemeClr val="phClr">
-                <a:tint val="98000"/>
-                <a:satMod val="130000"/>
-                <a:shade val="90000"/>
-                <a:lumMod val="103000"/>
-              </a:schemeClr>
-            </a:gs>
-            <a:gs pos="100000">
-              <a:schemeClr val="phClr">
-                <a:shade val="63000"/>
-                <a:satMod val="120000"/>
+                <a:shade val="92000"/>
+                <a:satMod val="140000"/>
+                <a:lumMod val="110000"/>
               </a:schemeClr>
             </a:gs>
           </a:gsLst>
@@ -4156,7 +7180,7 @@
   <a:extraClrSchemeLst/>
   <a:extLst>
     <a:ext uri="{05A4C25C-085E-4340-85A3-A5531E510DB2}">
-      <thm15:themeFamily xmlns:thm15="http://schemas.microsoft.com/office/thememl/2012/main" name="Office Theme" id="{62F939B6-93AF-4DB8-9C6B-D6C7DFDC589F}" vid="{4A3C46E8-61CC-4603-A589-7422A47A8E4A}"/>
+      <thm15:themeFamily xmlns:thm15="http://schemas.microsoft.com/office/thememl/2012/main" name="Droplet" id="{8984A317-299A-4E50-B45D-BFC9EDE2337A}" vid="{A633B6A3-9E7F-4C10-9C98-2517A3134361}"/>
     </a:ext>
   </a:extLst>
 </a:theme>

--- a/プレゼンテーション1.pptx
+++ b/プレゼンテーション1.pptx
@@ -5,9 +5,10 @@
     <p:sldMasterId id="2147483678" r:id="rId1"/>
   </p:sldMasterIdLst>
   <p:sldIdLst>
-    <p:sldId id="256" r:id="rId2"/>
-    <p:sldId id="257" r:id="rId3"/>
-    <p:sldId id="258" r:id="rId4"/>
+    <p:sldId id="260" r:id="rId2"/>
+    <p:sldId id="256" r:id="rId3"/>
+    <p:sldId id="261" r:id="rId4"/>
+    <p:sldId id="262" r:id="rId5"/>
   </p:sldIdLst>
   <p:sldSz cx="12192000" cy="6858000"/>
   <p:notesSz cx="6858000" cy="9144000"/>
@@ -285,7 +286,7 @@
           <a:p>
             <a:fld id="{5F305778-E222-4C85-8E95-A8CE1D926E62}" type="datetimeFigureOut">
               <a:rPr kumimoji="1" lang="ja-JP" altLang="en-US" smtClean="0"/>
-              <a:t>2025/10/31</a:t>
+              <a:t>2025/11/4</a:t>
             </a:fld>
             <a:endParaRPr kumimoji="1" lang="ja-JP" altLang="en-US"/>
           </a:p>
@@ -597,7 +598,7 @@
           <a:p>
             <a:fld id="{5F305778-E222-4C85-8E95-A8CE1D926E62}" type="datetimeFigureOut">
               <a:rPr kumimoji="1" lang="ja-JP" altLang="en-US" smtClean="0"/>
-              <a:t>2025/10/31</a:t>
+              <a:t>2025/11/4</a:t>
             </a:fld>
             <a:endParaRPr kumimoji="1" lang="ja-JP" altLang="en-US"/>
           </a:p>
@@ -819,7 +820,7 @@
           <a:p>
             <a:fld id="{5F305778-E222-4C85-8E95-A8CE1D926E62}" type="datetimeFigureOut">
               <a:rPr kumimoji="1" lang="ja-JP" altLang="en-US" smtClean="0"/>
-              <a:t>2025/10/31</a:t>
+              <a:t>2025/11/4</a:t>
             </a:fld>
             <a:endParaRPr kumimoji="1" lang="ja-JP" altLang="en-US"/>
           </a:p>
@@ -1110,7 +1111,7 @@
           <a:p>
             <a:fld id="{5F305778-E222-4C85-8E95-A8CE1D926E62}" type="datetimeFigureOut">
               <a:rPr kumimoji="1" lang="ja-JP" altLang="en-US" smtClean="0"/>
-              <a:t>2025/10/31</a:t>
+              <a:t>2025/11/4</a:t>
             </a:fld>
             <a:endParaRPr kumimoji="1" lang="ja-JP" altLang="en-US"/>
           </a:p>
@@ -1564,7 +1565,7 @@
           <a:p>
             <a:fld id="{5F305778-E222-4C85-8E95-A8CE1D926E62}" type="datetimeFigureOut">
               <a:rPr kumimoji="1" lang="ja-JP" altLang="en-US" smtClean="0"/>
-              <a:t>2025/10/31</a:t>
+              <a:t>2025/11/4</a:t>
             </a:fld>
             <a:endParaRPr kumimoji="1" lang="ja-JP" altLang="en-US"/>
           </a:p>
@@ -2140,7 +2141,7 @@
           <a:p>
             <a:fld id="{5F305778-E222-4C85-8E95-A8CE1D926E62}" type="datetimeFigureOut">
               <a:rPr kumimoji="1" lang="ja-JP" altLang="en-US" smtClean="0"/>
-              <a:t>2025/10/31</a:t>
+              <a:t>2025/11/4</a:t>
             </a:fld>
             <a:endParaRPr kumimoji="1" lang="ja-JP" altLang="en-US"/>
           </a:p>
@@ -2992,7 +2993,7 @@
           <a:p>
             <a:fld id="{5F305778-E222-4C85-8E95-A8CE1D926E62}" type="datetimeFigureOut">
               <a:rPr kumimoji="1" lang="ja-JP" altLang="en-US" smtClean="0"/>
-              <a:t>2025/10/31</a:t>
+              <a:t>2025/11/4</a:t>
             </a:fld>
             <a:endParaRPr kumimoji="1" lang="ja-JP" altLang="en-US"/>
           </a:p>
@@ -3229,7 +3230,7 @@
           <a:p>
             <a:fld id="{5F305778-E222-4C85-8E95-A8CE1D926E62}" type="datetimeFigureOut">
               <a:rPr kumimoji="1" lang="ja-JP" altLang="en-US" smtClean="0"/>
-              <a:t>2025/10/31</a:t>
+              <a:t>2025/11/4</a:t>
             </a:fld>
             <a:endParaRPr kumimoji="1" lang="ja-JP" altLang="en-US"/>
           </a:p>
@@ -3475,7 +3476,7 @@
           <a:p>
             <a:fld id="{5F305778-E222-4C85-8E95-A8CE1D926E62}" type="datetimeFigureOut">
               <a:rPr kumimoji="1" lang="ja-JP" altLang="en-US" smtClean="0"/>
-              <a:t>2025/10/31</a:t>
+              <a:t>2025/11/4</a:t>
             </a:fld>
             <a:endParaRPr kumimoji="1" lang="ja-JP" altLang="en-US"/>
           </a:p>
@@ -3527,208 +3528,6 @@
     <p:extLst>
       <p:ext uri="{BB962C8B-B14F-4D97-AF65-F5344CB8AC3E}">
         <p14:creationId xmlns:p14="http://schemas.microsoft.com/office/powerpoint/2010/main" val="2630191778"/>
-      </p:ext>
-    </p:extLst>
-  </p:cSld>
-  <p:clrMapOvr>
-    <a:masterClrMapping/>
-  </p:clrMapOvr>
-</p:sldLayout>
-</file>
-
-<file path=ppt/slideLayouts/slideLayout18.xml><?xml version="1.0" encoding="utf-8"?>
-<p:sldLayout xmlns:a="http://schemas.openxmlformats.org/drawingml/2006/main" xmlns:r="http://schemas.openxmlformats.org/officeDocument/2006/relationships" xmlns:p="http://schemas.openxmlformats.org/presentationml/2006/main" type="obj">
-  <p:cSld name="1_タイトルとコンテンツ">
-    <p:spTree>
-      <p:nvGrpSpPr>
-        <p:cNvPr id="1" name=""/>
-        <p:cNvGrpSpPr/>
-        <p:nvPr/>
-      </p:nvGrpSpPr>
-      <p:grpSpPr>
-        <a:xfrm>
-          <a:off x="0" y="0"/>
-          <a:ext cx="0" cy="0"/>
-          <a:chOff x="0" y="0"/>
-          <a:chExt cx="0" cy="0"/>
-        </a:xfrm>
-      </p:grpSpPr>
-      <p:sp>
-        <p:nvSpPr>
-          <p:cNvPr id="2" name="Title 1"/>
-          <p:cNvSpPr>
-            <a:spLocks noGrp="1"/>
-          </p:cNvSpPr>
-          <p:nvPr>
-            <p:ph type="title"/>
-          </p:nvPr>
-        </p:nvSpPr>
-        <p:spPr/>
-        <p:txBody>
-          <a:bodyPr/>
-          <a:lstStyle/>
-          <a:p>
-            <a:r>
-              <a:rPr lang="ja-JP" altLang="en-US"/>
-              <a:t>マスター タイトルの書式設定</a:t>
-            </a:r>
-            <a:endParaRPr lang="en-US" dirty="0"/>
-          </a:p>
-        </p:txBody>
-      </p:sp>
-      <p:sp>
-        <p:nvSpPr>
-          <p:cNvPr id="3" name="Content Placeholder 2"/>
-          <p:cNvSpPr>
-            <a:spLocks noGrp="1"/>
-          </p:cNvSpPr>
-          <p:nvPr>
-            <p:ph idx="1"/>
-          </p:nvPr>
-        </p:nvSpPr>
-        <p:spPr/>
-        <p:txBody>
-          <a:bodyPr/>
-          <a:lstStyle/>
-          <a:p>
-            <a:pPr lvl="0"/>
-            <a:r>
-              <a:rPr lang="ja-JP" altLang="en-US"/>
-              <a:t>マスター テキストの書式設定</a:t>
-            </a:r>
-          </a:p>
-          <a:p>
-            <a:pPr lvl="1"/>
-            <a:r>
-              <a:rPr lang="ja-JP" altLang="en-US"/>
-              <a:t>第 </a:t>
-            </a:r>
-            <a:r>
-              <a:rPr lang="en-US" altLang="ja-JP"/>
-              <a:t>2 </a:t>
-            </a:r>
-            <a:r>
-              <a:rPr lang="ja-JP" altLang="en-US"/>
-              <a:t>レベル</a:t>
-            </a:r>
-          </a:p>
-          <a:p>
-            <a:pPr lvl="2"/>
-            <a:r>
-              <a:rPr lang="ja-JP" altLang="en-US"/>
-              <a:t>第 </a:t>
-            </a:r>
-            <a:r>
-              <a:rPr lang="en-US" altLang="ja-JP"/>
-              <a:t>3 </a:t>
-            </a:r>
-            <a:r>
-              <a:rPr lang="ja-JP" altLang="en-US"/>
-              <a:t>レベル</a:t>
-            </a:r>
-          </a:p>
-          <a:p>
-            <a:pPr lvl="3"/>
-            <a:r>
-              <a:rPr lang="ja-JP" altLang="en-US"/>
-              <a:t>第 </a:t>
-            </a:r>
-            <a:r>
-              <a:rPr lang="en-US" altLang="ja-JP"/>
-              <a:t>4 </a:t>
-            </a:r>
-            <a:r>
-              <a:rPr lang="ja-JP" altLang="en-US"/>
-              <a:t>レベル</a:t>
-            </a:r>
-          </a:p>
-          <a:p>
-            <a:pPr lvl="4"/>
-            <a:r>
-              <a:rPr lang="ja-JP" altLang="en-US"/>
-              <a:t>第 </a:t>
-            </a:r>
-            <a:r>
-              <a:rPr lang="en-US" altLang="ja-JP"/>
-              <a:t>5 </a:t>
-            </a:r>
-            <a:r>
-              <a:rPr lang="ja-JP" altLang="en-US"/>
-              <a:t>レベル</a:t>
-            </a:r>
-            <a:endParaRPr lang="en-US" dirty="0"/>
-          </a:p>
-        </p:txBody>
-      </p:sp>
-      <p:sp>
-        <p:nvSpPr>
-          <p:cNvPr id="4" name="Date Placeholder 3"/>
-          <p:cNvSpPr>
-            <a:spLocks noGrp="1"/>
-          </p:cNvSpPr>
-          <p:nvPr>
-            <p:ph type="dt" sz="half" idx="10"/>
-          </p:nvPr>
-        </p:nvSpPr>
-        <p:spPr/>
-        <p:txBody>
-          <a:bodyPr/>
-          <a:lstStyle/>
-          <a:p>
-            <a:fld id="{5F305778-E222-4C85-8E95-A8CE1D926E62}" type="datetimeFigureOut">
-              <a:rPr kumimoji="1" lang="ja-JP" altLang="en-US" smtClean="0"/>
-              <a:t>2025/10/31</a:t>
-            </a:fld>
-            <a:endParaRPr kumimoji="1" lang="ja-JP" altLang="en-US"/>
-          </a:p>
-        </p:txBody>
-      </p:sp>
-      <p:sp>
-        <p:nvSpPr>
-          <p:cNvPr id="5" name="Footer Placeholder 4"/>
-          <p:cNvSpPr>
-            <a:spLocks noGrp="1"/>
-          </p:cNvSpPr>
-          <p:nvPr>
-            <p:ph type="ftr" sz="quarter" idx="11"/>
-          </p:nvPr>
-        </p:nvSpPr>
-        <p:spPr/>
-        <p:txBody>
-          <a:bodyPr/>
-          <a:lstStyle/>
-          <a:p>
-            <a:endParaRPr kumimoji="1" lang="ja-JP" altLang="en-US"/>
-          </a:p>
-        </p:txBody>
-      </p:sp>
-      <p:sp>
-        <p:nvSpPr>
-          <p:cNvPr id="6" name="Slide Number Placeholder 5"/>
-          <p:cNvSpPr>
-            <a:spLocks noGrp="1"/>
-          </p:cNvSpPr>
-          <p:nvPr>
-            <p:ph type="sldNum" sz="quarter" idx="12"/>
-          </p:nvPr>
-        </p:nvSpPr>
-        <p:spPr/>
-        <p:txBody>
-          <a:bodyPr/>
-          <a:lstStyle/>
-          <a:p>
-            <a:fld id="{48CB8B3E-63A1-441E-8AC1-5627B169235D}" type="slidenum">
-              <a:rPr kumimoji="1" lang="ja-JP" altLang="en-US" smtClean="0"/>
-              <a:t>‹#›</a:t>
-            </a:fld>
-            <a:endParaRPr kumimoji="1" lang="ja-JP" altLang="en-US"/>
-          </a:p>
-        </p:txBody>
-      </p:sp>
-    </p:spTree>
-    <p:extLst>
-      <p:ext uri="{BB962C8B-B14F-4D97-AF65-F5344CB8AC3E}">
-        <p14:creationId xmlns:p14="http://schemas.microsoft.com/office/powerpoint/2010/main" val="20193998"/>
       </p:ext>
     </p:extLst>
   </p:cSld>
@@ -3914,7 +3713,7 @@
           <a:p>
             <a:fld id="{5F305778-E222-4C85-8E95-A8CE1D926E62}" type="datetimeFigureOut">
               <a:rPr kumimoji="1" lang="ja-JP" altLang="en-US" smtClean="0"/>
-              <a:t>2025/10/31</a:t>
+              <a:t>2025/11/4</a:t>
             </a:fld>
             <a:endParaRPr kumimoji="1" lang="ja-JP" altLang="en-US"/>
           </a:p>
@@ -4194,7 +3993,7 @@
           <a:p>
             <a:fld id="{5F305778-E222-4C85-8E95-A8CE1D926E62}" type="datetimeFigureOut">
               <a:rPr kumimoji="1" lang="ja-JP" altLang="en-US" smtClean="0"/>
-              <a:t>2025/10/31</a:t>
+              <a:t>2025/11/4</a:t>
             </a:fld>
             <a:endParaRPr kumimoji="1" lang="ja-JP" altLang="en-US"/>
           </a:p>
@@ -4525,7 +4324,7 @@
           <a:p>
             <a:fld id="{5F305778-E222-4C85-8E95-A8CE1D926E62}" type="datetimeFigureOut">
               <a:rPr kumimoji="1" lang="ja-JP" altLang="en-US" smtClean="0"/>
-              <a:t>2025/10/31</a:t>
+              <a:t>2025/11/4</a:t>
             </a:fld>
             <a:endParaRPr kumimoji="1" lang="ja-JP" altLang="en-US"/>
           </a:p>
@@ -5004,7 +4803,7 @@
           <a:p>
             <a:fld id="{5F305778-E222-4C85-8E95-A8CE1D926E62}" type="datetimeFigureOut">
               <a:rPr kumimoji="1" lang="ja-JP" altLang="en-US" smtClean="0"/>
-              <a:t>2025/10/31</a:t>
+              <a:t>2025/11/4</a:t>
             </a:fld>
             <a:endParaRPr kumimoji="1" lang="ja-JP" altLang="en-US"/>
           </a:p>
@@ -5152,7 +4951,7 @@
           <a:p>
             <a:fld id="{5F305778-E222-4C85-8E95-A8CE1D926E62}" type="datetimeFigureOut">
               <a:rPr kumimoji="1" lang="ja-JP" altLang="en-US" smtClean="0"/>
-              <a:t>2025/10/31</a:t>
+              <a:t>2025/11/4</a:t>
             </a:fld>
             <a:endParaRPr kumimoji="1" lang="ja-JP" altLang="en-US"/>
           </a:p>
@@ -5277,7 +5076,7 @@
           <a:p>
             <a:fld id="{5F305778-E222-4C85-8E95-A8CE1D926E62}" type="datetimeFigureOut">
               <a:rPr kumimoji="1" lang="ja-JP" altLang="en-US" smtClean="0"/>
-              <a:t>2025/10/31</a:t>
+              <a:t>2025/11/4</a:t>
             </a:fld>
             <a:endParaRPr kumimoji="1" lang="ja-JP" altLang="en-US"/>
           </a:p>
@@ -5588,7 +5387,7 @@
           <a:p>
             <a:fld id="{5F305778-E222-4C85-8E95-A8CE1D926E62}" type="datetimeFigureOut">
               <a:rPr kumimoji="1" lang="ja-JP" altLang="en-US" smtClean="0"/>
-              <a:t>2025/10/31</a:t>
+              <a:t>2025/11/4</a:t>
             </a:fld>
             <a:endParaRPr kumimoji="1" lang="ja-JP" altLang="en-US"/>
           </a:p>
@@ -5900,7 +5699,7 @@
           <a:p>
             <a:fld id="{5F305778-E222-4C85-8E95-A8CE1D926E62}" type="datetimeFigureOut">
               <a:rPr kumimoji="1" lang="ja-JP" altLang="en-US" smtClean="0"/>
-              <a:t>2025/10/31</a:t>
+              <a:t>2025/11/4</a:t>
             </a:fld>
             <a:endParaRPr kumimoji="1" lang="ja-JP" altLang="en-US"/>
           </a:p>
@@ -5992,7 +5791,7 @@
           <p:nvPr/>
         </p:nvPicPr>
         <p:blipFill>
-          <a:blip r:embed="rId20">
+          <a:blip r:embed="rId19">
             <a:alphaModFix/>
             <a:extLst>
               <a:ext uri="{28A0092B-C50C-407E-A947-70E740481C1C}">
@@ -6185,7 +5984,7 @@
           <a:p>
             <a:fld id="{5F305778-E222-4C85-8E95-A8CE1D926E62}" type="datetimeFigureOut">
               <a:rPr kumimoji="1" lang="ja-JP" altLang="en-US" smtClean="0"/>
-              <a:t>2025/10/31</a:t>
+              <a:t>2025/11/4</a:t>
             </a:fld>
             <a:endParaRPr kumimoji="1" lang="ja-JP" altLang="en-US"/>
           </a:p>
@@ -6291,7 +6090,6 @@
     <p:sldLayoutId id="2147483693" r:id="rId15"/>
     <p:sldLayoutId id="2147483694" r:id="rId16"/>
     <p:sldLayoutId id="2147483695" r:id="rId17"/>
-    <p:sldLayoutId id="2147483696" r:id="rId18"/>
   </p:sldLayoutIdLst>
   <p:txStyles>
     <p:titleStyle>
@@ -6680,8 +6478,8 @@
         </p:nvSpPr>
         <p:spPr>
           <a:xfrm>
-            <a:off x="3321050" y="2082800"/>
-            <a:ext cx="5549900" cy="2677656"/>
+            <a:off x="570347" y="3685166"/>
+            <a:ext cx="4576618" cy="1569660"/>
           </a:xfrm>
           <a:prstGeom prst="rect">
             <a:avLst/>
@@ -6696,48 +6494,81 @@
           <a:p>
             <a:pPr algn="ctr"/>
             <a:r>
-              <a:rPr kumimoji="1" lang="ja-JP" altLang="en-US" sz="2400" dirty="0"/>
-              <a:t>ジャンル　　　アクション</a:t>
+              <a:rPr kumimoji="1" lang="ja-JP" altLang="en-US" sz="3200" dirty="0"/>
+              <a:t>ジャンル　：　３</a:t>
+            </a:r>
+            <a:r>
+              <a:rPr kumimoji="1" lang="en-US" altLang="ja-JP" sz="3200" dirty="0"/>
+              <a:t>D</a:t>
+            </a:r>
+            <a:r>
+              <a:rPr kumimoji="1" lang="ja-JP" altLang="en-US" sz="3200" dirty="0"/>
+              <a:t>アクション</a:t>
             </a:r>
             <a:br>
-              <a:rPr kumimoji="1" lang="en-US" altLang="ja-JP" sz="2400" dirty="0"/>
+              <a:rPr kumimoji="1" lang="en-US" altLang="ja-JP" sz="3200" dirty="0"/>
             </a:br>
             <a:br>
-              <a:rPr kumimoji="1" lang="en-US" altLang="ja-JP" sz="2400" dirty="0"/>
+              <a:rPr kumimoji="1" lang="en-US" altLang="ja-JP" sz="3200" dirty="0"/>
             </a:br>
             <a:r>
-              <a:rPr kumimoji="1" lang="ja-JP" altLang="en-US" sz="2400" dirty="0"/>
-              <a:t>開発エンジン　　　</a:t>
-            </a:r>
-            <a:r>
-              <a:rPr kumimoji="1" lang="en-US" altLang="ja-JP" sz="2400" dirty="0"/>
+              <a:rPr kumimoji="1" lang="ja-JP" altLang="en-US" sz="3200" dirty="0"/>
+              <a:t>開発エンジン　：　</a:t>
+            </a:r>
+            <a:r>
+              <a:rPr kumimoji="1" lang="en-US" altLang="ja-JP" sz="3200" dirty="0"/>
               <a:t>Unity</a:t>
             </a:r>
           </a:p>
+        </p:txBody>
+      </p:sp>
+      <p:sp>
+        <p:nvSpPr>
+          <p:cNvPr id="4" name="テキスト ボックス 3">
+            <a:extLst>
+              <a:ext uri="{FF2B5EF4-FFF2-40B4-BE49-F238E27FC236}">
+                <a16:creationId xmlns:a16="http://schemas.microsoft.com/office/drawing/2014/main" id="{9BF980E4-9CB8-43BE-91FB-945E58B46688}"/>
+              </a:ext>
+            </a:extLst>
+          </p:cNvPr>
+          <p:cNvSpPr txBox="1"/>
+          <p:nvPr/>
+        </p:nvSpPr>
+        <p:spPr>
+          <a:xfrm>
+            <a:off x="6480460" y="3685166"/>
+            <a:ext cx="5141193" cy="1569660"/>
+          </a:xfrm>
+          <a:prstGeom prst="rect">
+            <a:avLst/>
+          </a:prstGeom>
+          <a:noFill/>
+        </p:spPr>
+        <p:txBody>
+          <a:bodyPr wrap="square" rtlCol="0">
+            <a:spAutoFit/>
+          </a:bodyPr>
+          <a:lstStyle/>
           <a:p>
             <a:pPr algn="ctr"/>
-            <a:endParaRPr kumimoji="1" lang="en-US" altLang="ja-JP" sz="2400" dirty="0"/>
+            <a:r>
+              <a:rPr kumimoji="1" lang="ja-JP" altLang="en-US" sz="3200" dirty="0"/>
+              <a:t>プラットフォーム　：　</a:t>
+            </a:r>
+            <a:r>
+              <a:rPr kumimoji="1" lang="en-US" altLang="ja-JP" sz="3200" dirty="0"/>
+              <a:t>Windows</a:t>
+            </a:r>
           </a:p>
           <a:p>
             <a:pPr algn="ctr"/>
-            <a:r>
-              <a:rPr kumimoji="1" lang="ja-JP" altLang="en-US" sz="2400" dirty="0"/>
-              <a:t>プラットフォーム  </a:t>
-            </a:r>
-            <a:r>
-              <a:rPr kumimoji="1" lang="en-US" altLang="ja-JP" sz="2400" dirty="0"/>
-              <a:t>Windows</a:t>
-            </a:r>
+            <a:endParaRPr kumimoji="1" lang="en-US" altLang="ja-JP" sz="3200" dirty="0"/>
           </a:p>
           <a:p>
             <a:pPr algn="ctr"/>
-            <a:endParaRPr kumimoji="1" lang="en-US" altLang="ja-JP" sz="2400" dirty="0"/>
-          </a:p>
-          <a:p>
-            <a:pPr algn="ctr"/>
-            <a:r>
-              <a:rPr kumimoji="1" lang="ja-JP" altLang="en-US" sz="2400" dirty="0"/>
-              <a:t>企画者　立石喜遼</a:t>
+            <a:r>
+              <a:rPr kumimoji="1" lang="ja-JP" altLang="en-US" sz="3200" dirty="0"/>
+              <a:t>操作方法　：　コントローラー</a:t>
             </a:r>
           </a:p>
         </p:txBody>
@@ -6745,7 +6576,7 @@
     </p:spTree>
     <p:extLst>
       <p:ext uri="{BB962C8B-B14F-4D97-AF65-F5344CB8AC3E}">
-        <p14:creationId xmlns:p14="http://schemas.microsoft.com/office/powerpoint/2010/main" val="4178234957"/>
+        <p14:creationId xmlns:p14="http://schemas.microsoft.com/office/powerpoint/2010/main" val="2517944918"/>
       </p:ext>
     </p:extLst>
   </p:cSld>
@@ -6777,7 +6608,7 @@
           <p:cNvPr id="4" name="テキスト ボックス 3">
             <a:extLst>
               <a:ext uri="{FF2B5EF4-FFF2-40B4-BE49-F238E27FC236}">
-                <a16:creationId xmlns:a16="http://schemas.microsoft.com/office/drawing/2014/main" id="{C1D3E058-9B78-41CE-843B-558CA7136A50}"/>
+                <a16:creationId xmlns:a16="http://schemas.microsoft.com/office/drawing/2014/main" id="{043AA3EF-5D70-4E8F-9219-F6EF470D8EFA}"/>
               </a:ext>
             </a:extLst>
           </p:cNvPr>
@@ -6786,8 +6617,8 @@
         </p:nvSpPr>
         <p:spPr>
           <a:xfrm>
-            <a:off x="876300" y="647700"/>
-            <a:ext cx="6642100" cy="369332"/>
+            <a:off x="4475884" y="1163783"/>
+            <a:ext cx="3240232" cy="769441"/>
           </a:xfrm>
           <a:prstGeom prst="rect">
             <a:avLst/>
@@ -6800,9 +6631,10 @@
           </a:bodyPr>
           <a:lstStyle/>
           <a:p>
-            <a:r>
-              <a:rPr kumimoji="1" lang="ja-JP" altLang="en-US" dirty="0"/>
-              <a:t>コンセプト</a:t>
+            <a:pPr algn="ctr"/>
+            <a:r>
+              <a:rPr kumimoji="1" lang="ja-JP" altLang="en-US" sz="4400" b="1" dirty="0"/>
+              <a:t>タイトル名</a:t>
             </a:r>
           </a:p>
         </p:txBody>
@@ -6810,7 +6642,7 @@
     </p:spTree>
     <p:extLst>
       <p:ext uri="{BB962C8B-B14F-4D97-AF65-F5344CB8AC3E}">
-        <p14:creationId xmlns:p14="http://schemas.microsoft.com/office/powerpoint/2010/main" val="4272995794"/>
+        <p14:creationId xmlns:p14="http://schemas.microsoft.com/office/powerpoint/2010/main" val="4178234957"/>
       </p:ext>
     </p:extLst>
   </p:cSld>
@@ -6839,10 +6671,10 @@
       </p:grpSpPr>
       <p:sp>
         <p:nvSpPr>
-          <p:cNvPr id="2" name="テキスト ボックス 1">
+          <p:cNvPr id="4" name="テキスト ボックス 3">
             <a:extLst>
               <a:ext uri="{FF2B5EF4-FFF2-40B4-BE49-F238E27FC236}">
-                <a16:creationId xmlns:a16="http://schemas.microsoft.com/office/drawing/2014/main" id="{67E759AC-4F81-4EF5-874A-F9B46635B72E}"/>
+                <a16:creationId xmlns:a16="http://schemas.microsoft.com/office/drawing/2014/main" id="{29CF269B-054B-42BF-BC29-B3D66BB2C182}"/>
               </a:ext>
             </a:extLst>
           </p:cNvPr>
@@ -6851,8 +6683,8 @@
         </p:nvSpPr>
         <p:spPr>
           <a:xfrm>
-            <a:off x="584200" y="533400"/>
-            <a:ext cx="5041900" cy="369332"/>
+            <a:off x="876300" y="647700"/>
+            <a:ext cx="6642100" cy="369332"/>
           </a:xfrm>
           <a:prstGeom prst="rect">
             <a:avLst/>
@@ -6865,20 +6697,49 @@
           </a:bodyPr>
           <a:lstStyle/>
           <a:p>
-            <a:pPr algn="ctr"/>
             <a:r>
               <a:rPr kumimoji="1" lang="ja-JP" altLang="en-US" dirty="0"/>
-              <a:t>タイトル画面</a:t>
-            </a:r>
-          </a:p>
-        </p:txBody>
-      </p:sp>
-      <p:sp>
-        <p:nvSpPr>
-          <p:cNvPr id="3" name="テキスト ボックス 2">
+              <a:t>コンセプト</a:t>
+            </a:r>
+          </a:p>
+        </p:txBody>
+      </p:sp>
+    </p:spTree>
+    <p:extLst>
+      <p:ext uri="{BB962C8B-B14F-4D97-AF65-F5344CB8AC3E}">
+        <p14:creationId xmlns:p14="http://schemas.microsoft.com/office/powerpoint/2010/main" val="357713500"/>
+      </p:ext>
+    </p:extLst>
+  </p:cSld>
+  <p:clrMapOvr>
+    <a:masterClrMapping/>
+  </p:clrMapOvr>
+</p:sld>
+</file>
+
+<file path=ppt/slides/slide4.xml><?xml version="1.0" encoding="utf-8"?>
+<p:sld xmlns:a="http://schemas.openxmlformats.org/drawingml/2006/main" xmlns:r="http://schemas.openxmlformats.org/officeDocument/2006/relationships" xmlns:p="http://schemas.openxmlformats.org/presentationml/2006/main">
+  <p:cSld>
+    <p:spTree>
+      <p:nvGrpSpPr>
+        <p:cNvPr id="1" name=""/>
+        <p:cNvGrpSpPr/>
+        <p:nvPr/>
+      </p:nvGrpSpPr>
+      <p:grpSpPr>
+        <a:xfrm>
+          <a:off x="0" y="0"/>
+          <a:ext cx="0" cy="0"/>
+          <a:chOff x="0" y="0"/>
+          <a:chExt cx="0" cy="0"/>
+        </a:xfrm>
+      </p:grpSpPr>
+      <p:sp>
+        <p:nvSpPr>
+          <p:cNvPr id="4" name="テキスト ボックス 3">
             <a:extLst>
               <a:ext uri="{FF2B5EF4-FFF2-40B4-BE49-F238E27FC236}">
-                <a16:creationId xmlns:a16="http://schemas.microsoft.com/office/drawing/2014/main" id="{957271D5-E44E-4DCA-A4EC-3AB9F083146B}"/>
+                <a16:creationId xmlns:a16="http://schemas.microsoft.com/office/drawing/2014/main" id="{B1B948EA-7FE8-4793-A0E5-649D32D23242}"/>
               </a:ext>
             </a:extLst>
           </p:cNvPr>
@@ -6887,8 +6748,8 @@
         </p:nvSpPr>
         <p:spPr>
           <a:xfrm>
-            <a:off x="1193800" y="1384300"/>
-            <a:ext cx="3263900" cy="369332"/>
+            <a:off x="584200" y="533400"/>
+            <a:ext cx="5041900" cy="369332"/>
           </a:xfrm>
           <a:prstGeom prst="rect">
             <a:avLst/>
@@ -6904,6 +6765,42 @@
             <a:pPr algn="ctr"/>
             <a:r>
               <a:rPr kumimoji="1" lang="ja-JP" altLang="en-US" dirty="0"/>
+              <a:t>タイトル画面</a:t>
+            </a:r>
+          </a:p>
+        </p:txBody>
+      </p:sp>
+      <p:sp>
+        <p:nvSpPr>
+          <p:cNvPr id="5" name="テキスト ボックス 4">
+            <a:extLst>
+              <a:ext uri="{FF2B5EF4-FFF2-40B4-BE49-F238E27FC236}">
+                <a16:creationId xmlns:a16="http://schemas.microsoft.com/office/drawing/2014/main" id="{FF7B4157-C097-4E12-AF88-1CF846156C81}"/>
+              </a:ext>
+            </a:extLst>
+          </p:cNvPr>
+          <p:cNvSpPr txBox="1"/>
+          <p:nvPr/>
+        </p:nvSpPr>
+        <p:spPr>
+          <a:xfrm>
+            <a:off x="1193800" y="1384300"/>
+            <a:ext cx="3263900" cy="369332"/>
+          </a:xfrm>
+          <a:prstGeom prst="rect">
+            <a:avLst/>
+          </a:prstGeom>
+          <a:noFill/>
+        </p:spPr>
+        <p:txBody>
+          <a:bodyPr wrap="square" rtlCol="0">
+            <a:spAutoFit/>
+          </a:bodyPr>
+          <a:lstStyle/>
+          <a:p>
+            <a:pPr algn="ctr"/>
+            <a:r>
+              <a:rPr kumimoji="1" lang="ja-JP" altLang="en-US" dirty="0"/>
               <a:t>理想</a:t>
             </a:r>
           </a:p>
@@ -6912,7 +6809,7 @@
     </p:spTree>
     <p:extLst>
       <p:ext uri="{BB962C8B-B14F-4D97-AF65-F5344CB8AC3E}">
-        <p14:creationId xmlns:p14="http://schemas.microsoft.com/office/powerpoint/2010/main" val="3135437470"/>
+        <p14:creationId xmlns:p14="http://schemas.microsoft.com/office/powerpoint/2010/main" val="4032219349"/>
       </p:ext>
     </p:extLst>
   </p:cSld>

--- a/プレゼンテーション1.pptx
+++ b/プレゼンテーション1.pptx
@@ -6704,6 +6704,76 @@
           </a:p>
         </p:txBody>
       </p:sp>
+      <p:sp>
+        <p:nvSpPr>
+          <p:cNvPr id="2" name="テキスト ボックス 1">
+            <a:extLst>
+              <a:ext uri="{FF2B5EF4-FFF2-40B4-BE49-F238E27FC236}">
+                <a16:creationId xmlns:a16="http://schemas.microsoft.com/office/drawing/2014/main" id="{BC0010D7-3B91-421E-9E49-7E26D61833E3}"/>
+              </a:ext>
+            </a:extLst>
+          </p:cNvPr>
+          <p:cNvSpPr txBox="1"/>
+          <p:nvPr/>
+        </p:nvSpPr>
+        <p:spPr>
+          <a:xfrm>
+            <a:off x="1714500" y="2660073"/>
+            <a:ext cx="3938155" cy="369332"/>
+          </a:xfrm>
+          <a:prstGeom prst="rect">
+            <a:avLst/>
+          </a:prstGeom>
+          <a:noFill/>
+        </p:spPr>
+        <p:txBody>
+          <a:bodyPr wrap="square" rtlCol="0">
+            <a:spAutoFit/>
+          </a:bodyPr>
+          <a:lstStyle/>
+          <a:p>
+            <a:r>
+              <a:rPr kumimoji="1" lang="ja-JP" altLang="en-US" dirty="0"/>
+              <a:t>相手の攻撃回避での乗り</a:t>
+            </a:r>
+          </a:p>
+        </p:txBody>
+      </p:sp>
+      <p:sp>
+        <p:nvSpPr>
+          <p:cNvPr id="3" name="テキスト ボックス 2">
+            <a:extLst>
+              <a:ext uri="{FF2B5EF4-FFF2-40B4-BE49-F238E27FC236}">
+                <a16:creationId xmlns:a16="http://schemas.microsoft.com/office/drawing/2014/main" id="{99DB0CAE-23E9-4CFC-B17F-5F94E68997D1}"/>
+              </a:ext>
+            </a:extLst>
+          </p:cNvPr>
+          <p:cNvSpPr txBox="1"/>
+          <p:nvPr/>
+        </p:nvSpPr>
+        <p:spPr>
+          <a:xfrm>
+            <a:off x="1475509" y="1558636"/>
+            <a:ext cx="4436918" cy="369332"/>
+          </a:xfrm>
+          <a:prstGeom prst="rect">
+            <a:avLst/>
+          </a:prstGeom>
+          <a:noFill/>
+        </p:spPr>
+        <p:txBody>
+          <a:bodyPr wrap="square" rtlCol="0">
+            <a:spAutoFit/>
+          </a:bodyPr>
+          <a:lstStyle/>
+          <a:p>
+            <a:r>
+              <a:rPr kumimoji="1" lang="ja-JP" altLang="en-US" dirty="0"/>
+              <a:t>あ</a:t>
+            </a:r>
+          </a:p>
+        </p:txBody>
+      </p:sp>
     </p:spTree>
     <p:extLst>
       <p:ext uri="{BB962C8B-B14F-4D97-AF65-F5344CB8AC3E}">
